--- a/assets/projects/m2/editable-figures/Figure_02_iros_02_evaluated.pptx
+++ b/assets/projects/m2/editable-figures/Figure_02_iros_02_evaluated.pptx
@@ -4009,6 +4009,220 @@
         </p:nvSpPr>
         <p:spPr>
           <a:xfrm>
+            <a:off x="3048000" y="2906884"/>
+            <a:ext cx="2316480" cy="503114"/>
+          </a:xfrm>
+          <a:custGeom>
+            <a:avLst/>
+            <a:gdLst/>
+            <a:ahLst/>
+            <a:cxnLst/>
+            <a:rect l="l" t="t" r="r" b="b"/>
+            <a:pathLst>
+              <a:path w="2316480" h="503114">
+                <a:moveTo>
+                  <a:pt x="152400" y="503114"/>
+                </a:moveTo>
+                <a:lnTo>
+                  <a:pt x="2164080" y="503114"/>
+                </a:lnTo>
+                <a:lnTo>
+                  <a:pt x="2188421" y="502629"/>
+                </a:lnTo>
+                <a:lnTo>
+                  <a:pt x="2210646" y="501173"/>
+                </a:lnTo>
+                <a:lnTo>
+                  <a:pt x="2230755" y="498747"/>
+                </a:lnTo>
+                <a:lnTo>
+                  <a:pt x="2248746" y="495350"/>
+                </a:lnTo>
+                <a:lnTo>
+                  <a:pt x="2264621" y="490983"/>
+                </a:lnTo>
+                <a:lnTo>
+                  <a:pt x="2278380" y="485645"/>
+                </a:lnTo>
+                <a:lnTo>
+                  <a:pt x="2290021" y="479336"/>
+                </a:lnTo>
+                <a:lnTo>
+                  <a:pt x="2299546" y="472058"/>
+                </a:lnTo>
+                <a:lnTo>
+                  <a:pt x="2306955" y="463808"/>
+                </a:lnTo>
+                <a:lnTo>
+                  <a:pt x="2312246" y="454588"/>
+                </a:lnTo>
+                <a:lnTo>
+                  <a:pt x="2315421" y="444398"/>
+                </a:lnTo>
+                <a:lnTo>
+                  <a:pt x="2316480" y="433237"/>
+                </a:lnTo>
+                <a:lnTo>
+                  <a:pt x="2316480" y="69877"/>
+                </a:lnTo>
+                <a:lnTo>
+                  <a:pt x="2315421" y="58716"/>
+                </a:lnTo>
+                <a:lnTo>
+                  <a:pt x="2312246" y="48525"/>
+                </a:lnTo>
+                <a:lnTo>
+                  <a:pt x="2306955" y="39305"/>
+                </a:lnTo>
+                <a:lnTo>
+                  <a:pt x="2299546" y="31056"/>
+                </a:lnTo>
+                <a:lnTo>
+                  <a:pt x="2290021" y="23777"/>
+                </a:lnTo>
+                <a:lnTo>
+                  <a:pt x="2278380" y="17469"/>
+                </a:lnTo>
+                <a:lnTo>
+                  <a:pt x="2264621" y="12131"/>
+                </a:lnTo>
+                <a:lnTo>
+                  <a:pt x="2248746" y="7764"/>
+                </a:lnTo>
+                <a:lnTo>
+                  <a:pt x="2230755" y="4367"/>
+                </a:lnTo>
+                <a:lnTo>
+                  <a:pt x="2210646" y="1941"/>
+                </a:lnTo>
+                <a:lnTo>
+                  <a:pt x="2188421" y="485"/>
+                </a:lnTo>
+                <a:lnTo>
+                  <a:pt x="2164080" y="0"/>
+                </a:lnTo>
+                <a:lnTo>
+                  <a:pt x="152400" y="0"/>
+                </a:lnTo>
+                <a:lnTo>
+                  <a:pt x="128058" y="485"/>
+                </a:lnTo>
+                <a:lnTo>
+                  <a:pt x="105833" y="1941"/>
+                </a:lnTo>
+                <a:lnTo>
+                  <a:pt x="85725" y="4367"/>
+                </a:lnTo>
+                <a:lnTo>
+                  <a:pt x="67733" y="7764"/>
+                </a:lnTo>
+                <a:lnTo>
+                  <a:pt x="51858" y="12131"/>
+                </a:lnTo>
+                <a:lnTo>
+                  <a:pt x="38100" y="17469"/>
+                </a:lnTo>
+                <a:lnTo>
+                  <a:pt x="26458" y="23777"/>
+                </a:lnTo>
+                <a:lnTo>
+                  <a:pt x="16933" y="31056"/>
+                </a:lnTo>
+                <a:lnTo>
+                  <a:pt x="9525" y="39305"/>
+                </a:lnTo>
+                <a:lnTo>
+                  <a:pt x="4233" y="48525"/>
+                </a:lnTo>
+                <a:lnTo>
+                  <a:pt x="1058" y="58716"/>
+                </a:lnTo>
+                <a:lnTo>
+                  <a:pt x="0" y="69877"/>
+                </a:lnTo>
+                <a:lnTo>
+                  <a:pt x="0" y="433237"/>
+                </a:lnTo>
+                <a:lnTo>
+                  <a:pt x="1058" y="444398"/>
+                </a:lnTo>
+                <a:lnTo>
+                  <a:pt x="4233" y="454588"/>
+                </a:lnTo>
+                <a:lnTo>
+                  <a:pt x="9525" y="463808"/>
+                </a:lnTo>
+                <a:lnTo>
+                  <a:pt x="16933" y="472058"/>
+                </a:lnTo>
+                <a:lnTo>
+                  <a:pt x="26458" y="479336"/>
+                </a:lnTo>
+                <a:lnTo>
+                  <a:pt x="38100" y="485645"/>
+                </a:lnTo>
+                <a:lnTo>
+                  <a:pt x="51858" y="490983"/>
+                </a:lnTo>
+                <a:lnTo>
+                  <a:pt x="67733" y="495350"/>
+                </a:lnTo>
+                <a:lnTo>
+                  <a:pt x="85725" y="498747"/>
+                </a:lnTo>
+                <a:lnTo>
+                  <a:pt x="105833" y="501173"/>
+                </a:lnTo>
+                <a:lnTo>
+                  <a:pt x="128058" y="502629"/>
+                </a:lnTo>
+                <a:lnTo>
+                  <a:pt x="152400" y="503114"/>
+                </a:lnTo>
+                <a:close/>
+              </a:path>
+            </a:pathLst>
+          </a:custGeom>
+          <a:solidFill>
+            <a:srgbClr val="EEF0F3"/>
+          </a:solidFill>
+          <a:ln w="15393">
+            <a:solidFill>
+              <a:srgbClr val="6B7280"/>
+            </a:solidFill>
+            <a:prstDash val="dash"/>
+          </a:ln>
+        </p:spPr>
+        <p:style>
+          <a:lnRef idx="1">
+            <a:schemeClr val="accent1"/>
+          </a:lnRef>
+          <a:fillRef idx="3">
+            <a:schemeClr val="accent1"/>
+          </a:fillRef>
+          <a:effectRef idx="2">
+            <a:schemeClr val="accent1"/>
+          </a:effectRef>
+          <a:fontRef idx="minor">
+            <a:schemeClr val="lt1"/>
+          </a:fontRef>
+        </p:style>
+        <p:txBody>
+          <a:bodyPr rtlCol="0" anchor="ctr"/>
+          <a:lstStyle/>
+          <a:p>
+            <a:pPr algn="ctr"/>
+          </a:p>
+        </p:txBody>
+      </p:sp>
+      <p:sp>
+        <p:nvSpPr>
+          <p:cNvPr id="6" name="Editable path 5"/>
+          <p:cNvSpPr/>
+          <p:nvPr/>
+        </p:nvSpPr>
+        <p:spPr>
+          <a:xfrm>
             <a:off x="5852160" y="391311"/>
             <a:ext cx="3535679" cy="3130491"/>
           </a:xfrm>
@@ -4216,7 +4430,7 @@
       </p:sp>
       <p:sp>
         <p:nvSpPr>
-          <p:cNvPr id="6" name="Editable path 5"/>
+          <p:cNvPr id="7" name="Editable path 6"/>
           <p:cNvSpPr/>
           <p:nvPr/>
         </p:nvSpPr>
@@ -4429,7 +4643,7 @@
       </p:sp>
       <p:sp>
         <p:nvSpPr>
-          <p:cNvPr id="7" name="Editable path 6"/>
+          <p:cNvPr id="8" name="Editable path 7"/>
           <p:cNvSpPr/>
           <p:nvPr/>
         </p:nvSpPr>
@@ -4642,7 +4856,7 @@
       </p:sp>
       <p:sp>
         <p:nvSpPr>
-          <p:cNvPr id="8" name="Editable path 7"/>
+          <p:cNvPr id="9" name="Editable path 8"/>
           <p:cNvSpPr/>
           <p:nvPr/>
         </p:nvSpPr>
@@ -4855,7 +5069,7 @@
       </p:sp>
       <p:sp>
         <p:nvSpPr>
-          <p:cNvPr id="9" name="Editable path 8"/>
+          <p:cNvPr id="10" name="Editable path 9"/>
           <p:cNvSpPr/>
           <p:nvPr/>
         </p:nvSpPr>
@@ -5068,7 +5282,7 @@
       </p:sp>
       <p:sp>
         <p:nvSpPr>
-          <p:cNvPr id="10" name="Editable path 9"/>
+          <p:cNvPr id="11" name="Editable path 10"/>
           <p:cNvSpPr/>
           <p:nvPr/>
         </p:nvSpPr>
@@ -5281,7 +5495,7 @@
       </p:sp>
       <p:sp>
         <p:nvSpPr>
-          <p:cNvPr id="11" name="Editable path 10"/>
+          <p:cNvPr id="12" name="Editable path 11"/>
           <p:cNvSpPr/>
           <p:nvPr/>
         </p:nvSpPr>
@@ -5495,7 +5709,7 @@
       </p:sp>
       <p:sp>
         <p:nvSpPr>
-          <p:cNvPr id="12" name="Editable path 11"/>
+          <p:cNvPr id="13" name="Editable path 12"/>
           <p:cNvSpPr/>
           <p:nvPr/>
         </p:nvSpPr>
@@ -5708,1798 +5922,7 @@
       </p:sp>
       <p:sp>
         <p:nvSpPr>
-          <p:cNvPr id="13" name="Editable path 12"/>
-          <p:cNvSpPr/>
-          <p:nvPr/>
-        </p:nvSpPr>
-        <p:spPr>
-          <a:xfrm>
-            <a:off x="3291840" y="1062131"/>
-            <a:ext cx="1828800" cy="279508"/>
-          </a:xfrm>
-          <a:custGeom>
-            <a:avLst/>
-            <a:gdLst/>
-            <a:ahLst/>
-            <a:cxnLst/>
-            <a:rect l="l" t="t" r="r" b="b"/>
-            <a:pathLst>
-              <a:path w="1828800" h="279508">
-                <a:moveTo>
-                  <a:pt x="0" y="223606"/>
-                </a:moveTo>
-                <a:lnTo>
-                  <a:pt x="365760" y="223606"/>
-                </a:lnTo>
-                <a:lnTo>
-                  <a:pt x="853440" y="0"/>
-                </a:lnTo>
-                <a:lnTo>
-                  <a:pt x="1341120" y="0"/>
-                </a:lnTo>
-                <a:lnTo>
-                  <a:pt x="1828800" y="279508"/>
-                </a:lnTo>
-              </a:path>
-            </a:pathLst>
-          </a:custGeom>
-          <a:noFill/>
-          <a:ln w="28419">
-            <a:solidFill>
-              <a:srgbClr val="7C5AA6"/>
-            </a:solidFill>
-          </a:ln>
-        </p:spPr>
-        <p:style>
-          <a:lnRef idx="1">
-            <a:schemeClr val="accent1"/>
-          </a:lnRef>
-          <a:fillRef idx="3">
-            <a:schemeClr val="accent1"/>
-          </a:fillRef>
-          <a:effectRef idx="2">
-            <a:schemeClr val="accent1"/>
-          </a:effectRef>
-          <a:fontRef idx="minor">
-            <a:schemeClr val="lt1"/>
-          </a:fontRef>
-        </p:style>
-        <p:txBody>
-          <a:bodyPr rtlCol="0" anchor="ctr"/>
-          <a:lstStyle/>
-          <a:p>
-            <a:pPr algn="ctr"/>
-          </a:p>
-        </p:txBody>
-      </p:sp>
-      <p:sp>
-        <p:nvSpPr>
           <p:cNvPr id="14" name="Editable path 13"/>
-          <p:cNvSpPr/>
-          <p:nvPr/>
-        </p:nvSpPr>
-        <p:spPr>
-          <a:xfrm>
-            <a:off x="3263420" y="1257318"/>
-            <a:ext cx="56839" cy="56839"/>
-          </a:xfrm>
-          <a:custGeom>
-            <a:avLst/>
-            <a:gdLst/>
-            <a:ahLst/>
-            <a:cxnLst/>
-            <a:rect l="l" t="t" r="r" b="b"/>
-            <a:pathLst>
-              <a:path w="56839" h="56839">
-                <a:moveTo>
-                  <a:pt x="28420" y="56839"/>
-                </a:moveTo>
-                <a:lnTo>
-                  <a:pt x="30297" y="56777"/>
-                </a:lnTo>
-                <a:lnTo>
-                  <a:pt x="32155" y="56592"/>
-                </a:lnTo>
-                <a:lnTo>
-                  <a:pt x="33990" y="56288"/>
-                </a:lnTo>
-                <a:lnTo>
-                  <a:pt x="35795" y="55865"/>
-                </a:lnTo>
-                <a:lnTo>
-                  <a:pt x="37566" y="55327"/>
-                </a:lnTo>
-                <a:lnTo>
-                  <a:pt x="39295" y="54675"/>
-                </a:lnTo>
-                <a:lnTo>
-                  <a:pt x="40979" y="53913"/>
-                </a:lnTo>
-                <a:lnTo>
-                  <a:pt x="42612" y="53041"/>
-                </a:lnTo>
-                <a:lnTo>
-                  <a:pt x="44187" y="52064"/>
-                </a:lnTo>
-                <a:lnTo>
-                  <a:pt x="45700" y="50982"/>
-                </a:lnTo>
-                <a:lnTo>
-                  <a:pt x="47144" y="49798"/>
-                </a:lnTo>
-                <a:lnTo>
-                  <a:pt x="48515" y="48515"/>
-                </a:lnTo>
-                <a:lnTo>
-                  <a:pt x="49799" y="47144"/>
-                </a:lnTo>
-                <a:lnTo>
-                  <a:pt x="50983" y="45699"/>
-                </a:lnTo>
-                <a:lnTo>
-                  <a:pt x="52064" y="44186"/>
-                </a:lnTo>
-                <a:lnTo>
-                  <a:pt x="53042" y="42611"/>
-                </a:lnTo>
-                <a:lnTo>
-                  <a:pt x="53913" y="40979"/>
-                </a:lnTo>
-                <a:lnTo>
-                  <a:pt x="54676" y="39295"/>
-                </a:lnTo>
-                <a:lnTo>
-                  <a:pt x="55327" y="37565"/>
-                </a:lnTo>
-                <a:lnTo>
-                  <a:pt x="55866" y="35795"/>
-                </a:lnTo>
-                <a:lnTo>
-                  <a:pt x="56288" y="33989"/>
-                </a:lnTo>
-                <a:lnTo>
-                  <a:pt x="56593" y="32155"/>
-                </a:lnTo>
-                <a:lnTo>
-                  <a:pt x="56777" y="30296"/>
-                </a:lnTo>
-                <a:lnTo>
-                  <a:pt x="56839" y="28419"/>
-                </a:lnTo>
-                <a:lnTo>
-                  <a:pt x="56777" y="26542"/>
-                </a:lnTo>
-                <a:lnTo>
-                  <a:pt x="56593" y="24684"/>
-                </a:lnTo>
-                <a:lnTo>
-                  <a:pt x="56288" y="22849"/>
-                </a:lnTo>
-                <a:lnTo>
-                  <a:pt x="55866" y="21044"/>
-                </a:lnTo>
-                <a:lnTo>
-                  <a:pt x="55327" y="19273"/>
-                </a:lnTo>
-                <a:lnTo>
-                  <a:pt x="54676" y="17543"/>
-                </a:lnTo>
-                <a:lnTo>
-                  <a:pt x="53913" y="15860"/>
-                </a:lnTo>
-                <a:lnTo>
-                  <a:pt x="53042" y="14227"/>
-                </a:lnTo>
-                <a:lnTo>
-                  <a:pt x="52064" y="12652"/>
-                </a:lnTo>
-                <a:lnTo>
-                  <a:pt x="50983" y="11139"/>
-                </a:lnTo>
-                <a:lnTo>
-                  <a:pt x="49799" y="9694"/>
-                </a:lnTo>
-                <a:lnTo>
-                  <a:pt x="48515" y="8323"/>
-                </a:lnTo>
-                <a:lnTo>
-                  <a:pt x="47144" y="7040"/>
-                </a:lnTo>
-                <a:lnTo>
-                  <a:pt x="45700" y="5856"/>
-                </a:lnTo>
-                <a:lnTo>
-                  <a:pt x="44187" y="4774"/>
-                </a:lnTo>
-                <a:lnTo>
-                  <a:pt x="42612" y="3797"/>
-                </a:lnTo>
-                <a:lnTo>
-                  <a:pt x="40979" y="2925"/>
-                </a:lnTo>
-                <a:lnTo>
-                  <a:pt x="39295" y="2163"/>
-                </a:lnTo>
-                <a:lnTo>
-                  <a:pt x="37566" y="1511"/>
-                </a:lnTo>
-                <a:lnTo>
-                  <a:pt x="35795" y="973"/>
-                </a:lnTo>
-                <a:lnTo>
-                  <a:pt x="33990" y="551"/>
-                </a:lnTo>
-                <a:lnTo>
-                  <a:pt x="32155" y="246"/>
-                </a:lnTo>
-                <a:lnTo>
-                  <a:pt x="30297" y="62"/>
-                </a:lnTo>
-                <a:lnTo>
-                  <a:pt x="28420" y="0"/>
-                </a:lnTo>
-                <a:lnTo>
-                  <a:pt x="26543" y="62"/>
-                </a:lnTo>
-                <a:lnTo>
-                  <a:pt x="24684" y="246"/>
-                </a:lnTo>
-                <a:lnTo>
-                  <a:pt x="22850" y="551"/>
-                </a:lnTo>
-                <a:lnTo>
-                  <a:pt x="21045" y="973"/>
-                </a:lnTo>
-                <a:lnTo>
-                  <a:pt x="19274" y="1511"/>
-                </a:lnTo>
-                <a:lnTo>
-                  <a:pt x="17544" y="2163"/>
-                </a:lnTo>
-                <a:lnTo>
-                  <a:pt x="15860" y="2925"/>
-                </a:lnTo>
-                <a:lnTo>
-                  <a:pt x="14228" y="3797"/>
-                </a:lnTo>
-                <a:lnTo>
-                  <a:pt x="12653" y="4774"/>
-                </a:lnTo>
-                <a:lnTo>
-                  <a:pt x="11140" y="5856"/>
-                </a:lnTo>
-                <a:lnTo>
-                  <a:pt x="9695" y="7040"/>
-                </a:lnTo>
-                <a:lnTo>
-                  <a:pt x="8324" y="8323"/>
-                </a:lnTo>
-                <a:lnTo>
-                  <a:pt x="7041" y="9694"/>
-                </a:lnTo>
-                <a:lnTo>
-                  <a:pt x="5857" y="11139"/>
-                </a:lnTo>
-                <a:lnTo>
-                  <a:pt x="4775" y="12652"/>
-                </a:lnTo>
-                <a:lnTo>
-                  <a:pt x="3798" y="14227"/>
-                </a:lnTo>
-                <a:lnTo>
-                  <a:pt x="2926" y="15860"/>
-                </a:lnTo>
-                <a:lnTo>
-                  <a:pt x="2164" y="17543"/>
-                </a:lnTo>
-                <a:lnTo>
-                  <a:pt x="1512" y="19273"/>
-                </a:lnTo>
-                <a:lnTo>
-                  <a:pt x="974" y="21044"/>
-                </a:lnTo>
-                <a:lnTo>
-                  <a:pt x="551" y="22849"/>
-                </a:lnTo>
-                <a:lnTo>
-                  <a:pt x="247" y="24684"/>
-                </a:lnTo>
-                <a:lnTo>
-                  <a:pt x="62" y="26542"/>
-                </a:lnTo>
-                <a:lnTo>
-                  <a:pt x="0" y="28419"/>
-                </a:lnTo>
-                <a:lnTo>
-                  <a:pt x="62" y="30296"/>
-                </a:lnTo>
-                <a:lnTo>
-                  <a:pt x="247" y="32155"/>
-                </a:lnTo>
-                <a:lnTo>
-                  <a:pt x="551" y="33989"/>
-                </a:lnTo>
-                <a:lnTo>
-                  <a:pt x="974" y="35795"/>
-                </a:lnTo>
-                <a:lnTo>
-                  <a:pt x="1512" y="37565"/>
-                </a:lnTo>
-                <a:lnTo>
-                  <a:pt x="2164" y="39295"/>
-                </a:lnTo>
-                <a:lnTo>
-                  <a:pt x="2926" y="40979"/>
-                </a:lnTo>
-                <a:lnTo>
-                  <a:pt x="3798" y="42611"/>
-                </a:lnTo>
-                <a:lnTo>
-                  <a:pt x="4775" y="44186"/>
-                </a:lnTo>
-                <a:lnTo>
-                  <a:pt x="5857" y="45699"/>
-                </a:lnTo>
-                <a:lnTo>
-                  <a:pt x="7041" y="47144"/>
-                </a:lnTo>
-                <a:lnTo>
-                  <a:pt x="8324" y="48515"/>
-                </a:lnTo>
-                <a:lnTo>
-                  <a:pt x="9695" y="49798"/>
-                </a:lnTo>
-                <a:lnTo>
-                  <a:pt x="11140" y="50982"/>
-                </a:lnTo>
-                <a:lnTo>
-                  <a:pt x="12653" y="52064"/>
-                </a:lnTo>
-                <a:lnTo>
-                  <a:pt x="14228" y="53041"/>
-                </a:lnTo>
-                <a:lnTo>
-                  <a:pt x="15860" y="53913"/>
-                </a:lnTo>
-                <a:lnTo>
-                  <a:pt x="17544" y="54675"/>
-                </a:lnTo>
-                <a:lnTo>
-                  <a:pt x="19274" y="55327"/>
-                </a:lnTo>
-                <a:lnTo>
-                  <a:pt x="21045" y="55865"/>
-                </a:lnTo>
-                <a:lnTo>
-                  <a:pt x="22850" y="56288"/>
-                </a:lnTo>
-                <a:lnTo>
-                  <a:pt x="24684" y="56592"/>
-                </a:lnTo>
-                <a:lnTo>
-                  <a:pt x="26543" y="56777"/>
-                </a:lnTo>
-                <a:lnTo>
-                  <a:pt x="28420" y="56839"/>
-                </a:lnTo>
-                <a:close/>
-              </a:path>
-            </a:pathLst>
-          </a:custGeom>
-          <a:solidFill>
-            <a:srgbClr val="7C5AA6"/>
-          </a:solidFill>
-          <a:ln w="23682">
-            <a:solidFill>
-              <a:srgbClr val="7C5AA6"/>
-            </a:solidFill>
-          </a:ln>
-        </p:spPr>
-        <p:style>
-          <a:lnRef idx="1">
-            <a:schemeClr val="accent1"/>
-          </a:lnRef>
-          <a:fillRef idx="3">
-            <a:schemeClr val="accent1"/>
-          </a:fillRef>
-          <a:effectRef idx="2">
-            <a:schemeClr val="accent1"/>
-          </a:effectRef>
-          <a:fontRef idx="minor">
-            <a:schemeClr val="lt1"/>
-          </a:fontRef>
-        </p:style>
-        <p:txBody>
-          <a:bodyPr rtlCol="0" anchor="ctr"/>
-          <a:lstStyle/>
-          <a:p>
-            <a:pPr algn="ctr"/>
-          </a:p>
-        </p:txBody>
-      </p:sp>
-      <p:sp>
-        <p:nvSpPr>
-          <p:cNvPr id="15" name="Editable path 14"/>
-          <p:cNvSpPr/>
-          <p:nvPr/>
-        </p:nvSpPr>
-        <p:spPr>
-          <a:xfrm>
-            <a:off x="3629180" y="1257318"/>
-            <a:ext cx="56839" cy="56839"/>
-          </a:xfrm>
-          <a:custGeom>
-            <a:avLst/>
-            <a:gdLst/>
-            <a:ahLst/>
-            <a:cxnLst/>
-            <a:rect l="l" t="t" r="r" b="b"/>
-            <a:pathLst>
-              <a:path w="56839" h="56839">
-                <a:moveTo>
-                  <a:pt x="28420" y="56839"/>
-                </a:moveTo>
-                <a:lnTo>
-                  <a:pt x="30297" y="56777"/>
-                </a:lnTo>
-                <a:lnTo>
-                  <a:pt x="32155" y="56592"/>
-                </a:lnTo>
-                <a:lnTo>
-                  <a:pt x="33990" y="56288"/>
-                </a:lnTo>
-                <a:lnTo>
-                  <a:pt x="35795" y="55865"/>
-                </a:lnTo>
-                <a:lnTo>
-                  <a:pt x="37566" y="55327"/>
-                </a:lnTo>
-                <a:lnTo>
-                  <a:pt x="39295" y="54675"/>
-                </a:lnTo>
-                <a:lnTo>
-                  <a:pt x="40979" y="53913"/>
-                </a:lnTo>
-                <a:lnTo>
-                  <a:pt x="42612" y="53041"/>
-                </a:lnTo>
-                <a:lnTo>
-                  <a:pt x="44187" y="52064"/>
-                </a:lnTo>
-                <a:lnTo>
-                  <a:pt x="45700" y="50982"/>
-                </a:lnTo>
-                <a:lnTo>
-                  <a:pt x="47144" y="49798"/>
-                </a:lnTo>
-                <a:lnTo>
-                  <a:pt x="48515" y="48515"/>
-                </a:lnTo>
-                <a:lnTo>
-                  <a:pt x="49799" y="47144"/>
-                </a:lnTo>
-                <a:lnTo>
-                  <a:pt x="50983" y="45699"/>
-                </a:lnTo>
-                <a:lnTo>
-                  <a:pt x="52064" y="44186"/>
-                </a:lnTo>
-                <a:lnTo>
-                  <a:pt x="53042" y="42611"/>
-                </a:lnTo>
-                <a:lnTo>
-                  <a:pt x="53913" y="40979"/>
-                </a:lnTo>
-                <a:lnTo>
-                  <a:pt x="54676" y="39295"/>
-                </a:lnTo>
-                <a:lnTo>
-                  <a:pt x="55327" y="37565"/>
-                </a:lnTo>
-                <a:lnTo>
-                  <a:pt x="55866" y="35795"/>
-                </a:lnTo>
-                <a:lnTo>
-                  <a:pt x="56288" y="33989"/>
-                </a:lnTo>
-                <a:lnTo>
-                  <a:pt x="56593" y="32155"/>
-                </a:lnTo>
-                <a:lnTo>
-                  <a:pt x="56777" y="30296"/>
-                </a:lnTo>
-                <a:lnTo>
-                  <a:pt x="56839" y="28419"/>
-                </a:lnTo>
-                <a:lnTo>
-                  <a:pt x="56777" y="26542"/>
-                </a:lnTo>
-                <a:lnTo>
-                  <a:pt x="56593" y="24684"/>
-                </a:lnTo>
-                <a:lnTo>
-                  <a:pt x="56288" y="22849"/>
-                </a:lnTo>
-                <a:lnTo>
-                  <a:pt x="55866" y="21044"/>
-                </a:lnTo>
-                <a:lnTo>
-                  <a:pt x="55327" y="19273"/>
-                </a:lnTo>
-                <a:lnTo>
-                  <a:pt x="54676" y="17543"/>
-                </a:lnTo>
-                <a:lnTo>
-                  <a:pt x="53913" y="15860"/>
-                </a:lnTo>
-                <a:lnTo>
-                  <a:pt x="53042" y="14227"/>
-                </a:lnTo>
-                <a:lnTo>
-                  <a:pt x="52064" y="12652"/>
-                </a:lnTo>
-                <a:lnTo>
-                  <a:pt x="50983" y="11139"/>
-                </a:lnTo>
-                <a:lnTo>
-                  <a:pt x="49799" y="9694"/>
-                </a:lnTo>
-                <a:lnTo>
-                  <a:pt x="48515" y="8323"/>
-                </a:lnTo>
-                <a:lnTo>
-                  <a:pt x="47144" y="7040"/>
-                </a:lnTo>
-                <a:lnTo>
-                  <a:pt x="45700" y="5856"/>
-                </a:lnTo>
-                <a:lnTo>
-                  <a:pt x="44187" y="4774"/>
-                </a:lnTo>
-                <a:lnTo>
-                  <a:pt x="42612" y="3797"/>
-                </a:lnTo>
-                <a:lnTo>
-                  <a:pt x="40979" y="2925"/>
-                </a:lnTo>
-                <a:lnTo>
-                  <a:pt x="39295" y="2163"/>
-                </a:lnTo>
-                <a:lnTo>
-                  <a:pt x="37566" y="1511"/>
-                </a:lnTo>
-                <a:lnTo>
-                  <a:pt x="35795" y="973"/>
-                </a:lnTo>
-                <a:lnTo>
-                  <a:pt x="33990" y="551"/>
-                </a:lnTo>
-                <a:lnTo>
-                  <a:pt x="32155" y="246"/>
-                </a:lnTo>
-                <a:lnTo>
-                  <a:pt x="30297" y="62"/>
-                </a:lnTo>
-                <a:lnTo>
-                  <a:pt x="28420" y="0"/>
-                </a:lnTo>
-                <a:lnTo>
-                  <a:pt x="26543" y="62"/>
-                </a:lnTo>
-                <a:lnTo>
-                  <a:pt x="24684" y="246"/>
-                </a:lnTo>
-                <a:lnTo>
-                  <a:pt x="22850" y="551"/>
-                </a:lnTo>
-                <a:lnTo>
-                  <a:pt x="21045" y="973"/>
-                </a:lnTo>
-                <a:lnTo>
-                  <a:pt x="19274" y="1511"/>
-                </a:lnTo>
-                <a:lnTo>
-                  <a:pt x="17544" y="2163"/>
-                </a:lnTo>
-                <a:lnTo>
-                  <a:pt x="15860" y="2925"/>
-                </a:lnTo>
-                <a:lnTo>
-                  <a:pt x="14228" y="3797"/>
-                </a:lnTo>
-                <a:lnTo>
-                  <a:pt x="12653" y="4774"/>
-                </a:lnTo>
-                <a:lnTo>
-                  <a:pt x="11140" y="5856"/>
-                </a:lnTo>
-                <a:lnTo>
-                  <a:pt x="9695" y="7040"/>
-                </a:lnTo>
-                <a:lnTo>
-                  <a:pt x="8324" y="8323"/>
-                </a:lnTo>
-                <a:lnTo>
-                  <a:pt x="7041" y="9694"/>
-                </a:lnTo>
-                <a:lnTo>
-                  <a:pt x="5857" y="11139"/>
-                </a:lnTo>
-                <a:lnTo>
-                  <a:pt x="4775" y="12652"/>
-                </a:lnTo>
-                <a:lnTo>
-                  <a:pt x="3797" y="14227"/>
-                </a:lnTo>
-                <a:lnTo>
-                  <a:pt x="2926" y="15860"/>
-                </a:lnTo>
-                <a:lnTo>
-                  <a:pt x="2164" y="17543"/>
-                </a:lnTo>
-                <a:lnTo>
-                  <a:pt x="1512" y="19273"/>
-                </a:lnTo>
-                <a:lnTo>
-                  <a:pt x="974" y="21044"/>
-                </a:lnTo>
-                <a:lnTo>
-                  <a:pt x="551" y="22849"/>
-                </a:lnTo>
-                <a:lnTo>
-                  <a:pt x="247" y="24684"/>
-                </a:lnTo>
-                <a:lnTo>
-                  <a:pt x="62" y="26542"/>
-                </a:lnTo>
-                <a:lnTo>
-                  <a:pt x="0" y="28419"/>
-                </a:lnTo>
-                <a:lnTo>
-                  <a:pt x="62" y="30296"/>
-                </a:lnTo>
-                <a:lnTo>
-                  <a:pt x="247" y="32155"/>
-                </a:lnTo>
-                <a:lnTo>
-                  <a:pt x="551" y="33989"/>
-                </a:lnTo>
-                <a:lnTo>
-                  <a:pt x="974" y="35795"/>
-                </a:lnTo>
-                <a:lnTo>
-                  <a:pt x="1512" y="37565"/>
-                </a:lnTo>
-                <a:lnTo>
-                  <a:pt x="2164" y="39295"/>
-                </a:lnTo>
-                <a:lnTo>
-                  <a:pt x="2926" y="40979"/>
-                </a:lnTo>
-                <a:lnTo>
-                  <a:pt x="3797" y="42611"/>
-                </a:lnTo>
-                <a:lnTo>
-                  <a:pt x="4775" y="44186"/>
-                </a:lnTo>
-                <a:lnTo>
-                  <a:pt x="5857" y="45699"/>
-                </a:lnTo>
-                <a:lnTo>
-                  <a:pt x="7041" y="47144"/>
-                </a:lnTo>
-                <a:lnTo>
-                  <a:pt x="8324" y="48515"/>
-                </a:lnTo>
-                <a:lnTo>
-                  <a:pt x="9695" y="49798"/>
-                </a:lnTo>
-                <a:lnTo>
-                  <a:pt x="11140" y="50982"/>
-                </a:lnTo>
-                <a:lnTo>
-                  <a:pt x="12653" y="52064"/>
-                </a:lnTo>
-                <a:lnTo>
-                  <a:pt x="14228" y="53041"/>
-                </a:lnTo>
-                <a:lnTo>
-                  <a:pt x="15860" y="53913"/>
-                </a:lnTo>
-                <a:lnTo>
-                  <a:pt x="17544" y="54675"/>
-                </a:lnTo>
-                <a:lnTo>
-                  <a:pt x="19274" y="55327"/>
-                </a:lnTo>
-                <a:lnTo>
-                  <a:pt x="21045" y="55865"/>
-                </a:lnTo>
-                <a:lnTo>
-                  <a:pt x="22850" y="56288"/>
-                </a:lnTo>
-                <a:lnTo>
-                  <a:pt x="24684" y="56592"/>
-                </a:lnTo>
-                <a:lnTo>
-                  <a:pt x="26543" y="56777"/>
-                </a:lnTo>
-                <a:lnTo>
-                  <a:pt x="28420" y="56839"/>
-                </a:lnTo>
-                <a:close/>
-              </a:path>
-            </a:pathLst>
-          </a:custGeom>
-          <a:solidFill>
-            <a:srgbClr val="7C5AA6"/>
-          </a:solidFill>
-          <a:ln w="23682">
-            <a:solidFill>
-              <a:srgbClr val="7C5AA6"/>
-            </a:solidFill>
-          </a:ln>
-        </p:spPr>
-        <p:style>
-          <a:lnRef idx="1">
-            <a:schemeClr val="accent1"/>
-          </a:lnRef>
-          <a:fillRef idx="3">
-            <a:schemeClr val="accent1"/>
-          </a:fillRef>
-          <a:effectRef idx="2">
-            <a:schemeClr val="accent1"/>
-          </a:effectRef>
-          <a:fontRef idx="minor">
-            <a:schemeClr val="lt1"/>
-          </a:fontRef>
-        </p:style>
-        <p:txBody>
-          <a:bodyPr rtlCol="0" anchor="ctr"/>
-          <a:lstStyle/>
-          <a:p>
-            <a:pPr algn="ctr"/>
-          </a:p>
-        </p:txBody>
-      </p:sp>
-      <p:sp>
-        <p:nvSpPr>
-          <p:cNvPr id="16" name="Editable path 15"/>
-          <p:cNvSpPr/>
-          <p:nvPr/>
-        </p:nvSpPr>
-        <p:spPr>
-          <a:xfrm>
-            <a:off x="4116860" y="1033711"/>
-            <a:ext cx="56839" cy="56839"/>
-          </a:xfrm>
-          <a:custGeom>
-            <a:avLst/>
-            <a:gdLst/>
-            <a:ahLst/>
-            <a:cxnLst/>
-            <a:rect l="l" t="t" r="r" b="b"/>
-            <a:pathLst>
-              <a:path w="56839" h="56839">
-                <a:moveTo>
-                  <a:pt x="28420" y="56839"/>
-                </a:moveTo>
-                <a:lnTo>
-                  <a:pt x="30297" y="56777"/>
-                </a:lnTo>
-                <a:lnTo>
-                  <a:pt x="32155" y="56593"/>
-                </a:lnTo>
-                <a:lnTo>
-                  <a:pt x="33990" y="56288"/>
-                </a:lnTo>
-                <a:lnTo>
-                  <a:pt x="35795" y="55866"/>
-                </a:lnTo>
-                <a:lnTo>
-                  <a:pt x="37565" y="55327"/>
-                </a:lnTo>
-                <a:lnTo>
-                  <a:pt x="39295" y="54676"/>
-                </a:lnTo>
-                <a:lnTo>
-                  <a:pt x="40979" y="53913"/>
-                </a:lnTo>
-                <a:lnTo>
-                  <a:pt x="42612" y="53042"/>
-                </a:lnTo>
-                <a:lnTo>
-                  <a:pt x="44187" y="52064"/>
-                </a:lnTo>
-                <a:lnTo>
-                  <a:pt x="45700" y="50982"/>
-                </a:lnTo>
-                <a:lnTo>
-                  <a:pt x="47144" y="49799"/>
-                </a:lnTo>
-                <a:lnTo>
-                  <a:pt x="48515" y="48515"/>
-                </a:lnTo>
-                <a:lnTo>
-                  <a:pt x="49799" y="47144"/>
-                </a:lnTo>
-                <a:lnTo>
-                  <a:pt x="50982" y="45700"/>
-                </a:lnTo>
-                <a:lnTo>
-                  <a:pt x="52064" y="44187"/>
-                </a:lnTo>
-                <a:lnTo>
-                  <a:pt x="53042" y="42612"/>
-                </a:lnTo>
-                <a:lnTo>
-                  <a:pt x="53913" y="40979"/>
-                </a:lnTo>
-                <a:lnTo>
-                  <a:pt x="54676" y="39295"/>
-                </a:lnTo>
-                <a:lnTo>
-                  <a:pt x="55327" y="37565"/>
-                </a:lnTo>
-                <a:lnTo>
-                  <a:pt x="55866" y="35795"/>
-                </a:lnTo>
-                <a:lnTo>
-                  <a:pt x="56288" y="33990"/>
-                </a:lnTo>
-                <a:lnTo>
-                  <a:pt x="56593" y="32155"/>
-                </a:lnTo>
-                <a:lnTo>
-                  <a:pt x="56777" y="30297"/>
-                </a:lnTo>
-                <a:lnTo>
-                  <a:pt x="56839" y="28420"/>
-                </a:lnTo>
-                <a:lnTo>
-                  <a:pt x="56777" y="26543"/>
-                </a:lnTo>
-                <a:lnTo>
-                  <a:pt x="56593" y="24684"/>
-                </a:lnTo>
-                <a:lnTo>
-                  <a:pt x="56288" y="22850"/>
-                </a:lnTo>
-                <a:lnTo>
-                  <a:pt x="55866" y="21044"/>
-                </a:lnTo>
-                <a:lnTo>
-                  <a:pt x="55327" y="19274"/>
-                </a:lnTo>
-                <a:lnTo>
-                  <a:pt x="54676" y="17544"/>
-                </a:lnTo>
-                <a:lnTo>
-                  <a:pt x="53913" y="15860"/>
-                </a:lnTo>
-                <a:lnTo>
-                  <a:pt x="53042" y="14228"/>
-                </a:lnTo>
-                <a:lnTo>
-                  <a:pt x="52064" y="12652"/>
-                </a:lnTo>
-                <a:lnTo>
-                  <a:pt x="50982" y="11140"/>
-                </a:lnTo>
-                <a:lnTo>
-                  <a:pt x="49799" y="9695"/>
-                </a:lnTo>
-                <a:lnTo>
-                  <a:pt x="48515" y="8324"/>
-                </a:lnTo>
-                <a:lnTo>
-                  <a:pt x="47144" y="7041"/>
-                </a:lnTo>
-                <a:lnTo>
-                  <a:pt x="45700" y="5857"/>
-                </a:lnTo>
-                <a:lnTo>
-                  <a:pt x="44187" y="4775"/>
-                </a:lnTo>
-                <a:lnTo>
-                  <a:pt x="42612" y="3797"/>
-                </a:lnTo>
-                <a:lnTo>
-                  <a:pt x="40979" y="2926"/>
-                </a:lnTo>
-                <a:lnTo>
-                  <a:pt x="39295" y="2164"/>
-                </a:lnTo>
-                <a:lnTo>
-                  <a:pt x="37565" y="1512"/>
-                </a:lnTo>
-                <a:lnTo>
-                  <a:pt x="35795" y="974"/>
-                </a:lnTo>
-                <a:lnTo>
-                  <a:pt x="33990" y="551"/>
-                </a:lnTo>
-                <a:lnTo>
-                  <a:pt x="32155" y="247"/>
-                </a:lnTo>
-                <a:lnTo>
-                  <a:pt x="30297" y="62"/>
-                </a:lnTo>
-                <a:lnTo>
-                  <a:pt x="28420" y="0"/>
-                </a:lnTo>
-                <a:lnTo>
-                  <a:pt x="26543" y="62"/>
-                </a:lnTo>
-                <a:lnTo>
-                  <a:pt x="24684" y="247"/>
-                </a:lnTo>
-                <a:lnTo>
-                  <a:pt x="22850" y="551"/>
-                </a:lnTo>
-                <a:lnTo>
-                  <a:pt x="21044" y="974"/>
-                </a:lnTo>
-                <a:lnTo>
-                  <a:pt x="19274" y="1512"/>
-                </a:lnTo>
-                <a:lnTo>
-                  <a:pt x="17544" y="2164"/>
-                </a:lnTo>
-                <a:lnTo>
-                  <a:pt x="15860" y="2926"/>
-                </a:lnTo>
-                <a:lnTo>
-                  <a:pt x="14228" y="3797"/>
-                </a:lnTo>
-                <a:lnTo>
-                  <a:pt x="12653" y="4775"/>
-                </a:lnTo>
-                <a:lnTo>
-                  <a:pt x="11140" y="5857"/>
-                </a:lnTo>
-                <a:lnTo>
-                  <a:pt x="9695" y="7041"/>
-                </a:lnTo>
-                <a:lnTo>
-                  <a:pt x="8324" y="8324"/>
-                </a:lnTo>
-                <a:lnTo>
-                  <a:pt x="7041" y="9695"/>
-                </a:lnTo>
-                <a:lnTo>
-                  <a:pt x="5857" y="11140"/>
-                </a:lnTo>
-                <a:lnTo>
-                  <a:pt x="4775" y="12652"/>
-                </a:lnTo>
-                <a:lnTo>
-                  <a:pt x="3797" y="14228"/>
-                </a:lnTo>
-                <a:lnTo>
-                  <a:pt x="2926" y="15860"/>
-                </a:lnTo>
-                <a:lnTo>
-                  <a:pt x="2164" y="17544"/>
-                </a:lnTo>
-                <a:lnTo>
-                  <a:pt x="1512" y="19274"/>
-                </a:lnTo>
-                <a:lnTo>
-                  <a:pt x="974" y="21044"/>
-                </a:lnTo>
-                <a:lnTo>
-                  <a:pt x="551" y="22850"/>
-                </a:lnTo>
-                <a:lnTo>
-                  <a:pt x="247" y="24684"/>
-                </a:lnTo>
-                <a:lnTo>
-                  <a:pt x="62" y="26543"/>
-                </a:lnTo>
-                <a:lnTo>
-                  <a:pt x="0" y="28420"/>
-                </a:lnTo>
-                <a:lnTo>
-                  <a:pt x="62" y="30297"/>
-                </a:lnTo>
-                <a:lnTo>
-                  <a:pt x="247" y="32155"/>
-                </a:lnTo>
-                <a:lnTo>
-                  <a:pt x="551" y="33990"/>
-                </a:lnTo>
-                <a:lnTo>
-                  <a:pt x="974" y="35795"/>
-                </a:lnTo>
-                <a:lnTo>
-                  <a:pt x="1512" y="37565"/>
-                </a:lnTo>
-                <a:lnTo>
-                  <a:pt x="2164" y="39295"/>
-                </a:lnTo>
-                <a:lnTo>
-                  <a:pt x="2926" y="40979"/>
-                </a:lnTo>
-                <a:lnTo>
-                  <a:pt x="3797" y="42612"/>
-                </a:lnTo>
-                <a:lnTo>
-                  <a:pt x="4775" y="44187"/>
-                </a:lnTo>
-                <a:lnTo>
-                  <a:pt x="5857" y="45700"/>
-                </a:lnTo>
-                <a:lnTo>
-                  <a:pt x="7041" y="47144"/>
-                </a:lnTo>
-                <a:lnTo>
-                  <a:pt x="8324" y="48515"/>
-                </a:lnTo>
-                <a:lnTo>
-                  <a:pt x="9695" y="49799"/>
-                </a:lnTo>
-                <a:lnTo>
-                  <a:pt x="11140" y="50982"/>
-                </a:lnTo>
-                <a:lnTo>
-                  <a:pt x="12653" y="52064"/>
-                </a:lnTo>
-                <a:lnTo>
-                  <a:pt x="14228" y="53042"/>
-                </a:lnTo>
-                <a:lnTo>
-                  <a:pt x="15860" y="53913"/>
-                </a:lnTo>
-                <a:lnTo>
-                  <a:pt x="17544" y="54676"/>
-                </a:lnTo>
-                <a:lnTo>
-                  <a:pt x="19274" y="55327"/>
-                </a:lnTo>
-                <a:lnTo>
-                  <a:pt x="21044" y="55866"/>
-                </a:lnTo>
-                <a:lnTo>
-                  <a:pt x="22850" y="56288"/>
-                </a:lnTo>
-                <a:lnTo>
-                  <a:pt x="24684" y="56593"/>
-                </a:lnTo>
-                <a:lnTo>
-                  <a:pt x="26543" y="56777"/>
-                </a:lnTo>
-                <a:lnTo>
-                  <a:pt x="28420" y="56839"/>
-                </a:lnTo>
-                <a:close/>
-              </a:path>
-            </a:pathLst>
-          </a:custGeom>
-          <a:solidFill>
-            <a:srgbClr val="7C5AA6"/>
-          </a:solidFill>
-          <a:ln w="23682">
-            <a:solidFill>
-              <a:srgbClr val="7C5AA6"/>
-            </a:solidFill>
-          </a:ln>
-        </p:spPr>
-        <p:style>
-          <a:lnRef idx="1">
-            <a:schemeClr val="accent1"/>
-          </a:lnRef>
-          <a:fillRef idx="3">
-            <a:schemeClr val="accent1"/>
-          </a:fillRef>
-          <a:effectRef idx="2">
-            <a:schemeClr val="accent1"/>
-          </a:effectRef>
-          <a:fontRef idx="minor">
-            <a:schemeClr val="lt1"/>
-          </a:fontRef>
-        </p:style>
-        <p:txBody>
-          <a:bodyPr rtlCol="0" anchor="ctr"/>
-          <a:lstStyle/>
-          <a:p>
-            <a:pPr algn="ctr"/>
-          </a:p>
-        </p:txBody>
-      </p:sp>
-      <p:sp>
-        <p:nvSpPr>
-          <p:cNvPr id="17" name="Editable path 16"/>
-          <p:cNvSpPr/>
-          <p:nvPr/>
-        </p:nvSpPr>
-        <p:spPr>
-          <a:xfrm>
-            <a:off x="4604540" y="1033711"/>
-            <a:ext cx="56839" cy="56839"/>
-          </a:xfrm>
-          <a:custGeom>
-            <a:avLst/>
-            <a:gdLst/>
-            <a:ahLst/>
-            <a:cxnLst/>
-            <a:rect l="l" t="t" r="r" b="b"/>
-            <a:pathLst>
-              <a:path w="56839" h="56839">
-                <a:moveTo>
-                  <a:pt x="28420" y="56839"/>
-                </a:moveTo>
-                <a:lnTo>
-                  <a:pt x="30296" y="56777"/>
-                </a:lnTo>
-                <a:lnTo>
-                  <a:pt x="32155" y="56593"/>
-                </a:lnTo>
-                <a:lnTo>
-                  <a:pt x="33990" y="56288"/>
-                </a:lnTo>
-                <a:lnTo>
-                  <a:pt x="35795" y="55866"/>
-                </a:lnTo>
-                <a:lnTo>
-                  <a:pt x="37565" y="55327"/>
-                </a:lnTo>
-                <a:lnTo>
-                  <a:pt x="39295" y="54676"/>
-                </a:lnTo>
-                <a:lnTo>
-                  <a:pt x="40979" y="53913"/>
-                </a:lnTo>
-                <a:lnTo>
-                  <a:pt x="42611" y="53042"/>
-                </a:lnTo>
-                <a:lnTo>
-                  <a:pt x="44187" y="52064"/>
-                </a:lnTo>
-                <a:lnTo>
-                  <a:pt x="45699" y="50982"/>
-                </a:lnTo>
-                <a:lnTo>
-                  <a:pt x="47144" y="49799"/>
-                </a:lnTo>
-                <a:lnTo>
-                  <a:pt x="48515" y="48515"/>
-                </a:lnTo>
-                <a:lnTo>
-                  <a:pt x="49799" y="47144"/>
-                </a:lnTo>
-                <a:lnTo>
-                  <a:pt x="50982" y="45700"/>
-                </a:lnTo>
-                <a:lnTo>
-                  <a:pt x="52064" y="44187"/>
-                </a:lnTo>
-                <a:lnTo>
-                  <a:pt x="53042" y="42612"/>
-                </a:lnTo>
-                <a:lnTo>
-                  <a:pt x="53913" y="40979"/>
-                </a:lnTo>
-                <a:lnTo>
-                  <a:pt x="54676" y="39295"/>
-                </a:lnTo>
-                <a:lnTo>
-                  <a:pt x="55327" y="37565"/>
-                </a:lnTo>
-                <a:lnTo>
-                  <a:pt x="55865" y="35795"/>
-                </a:lnTo>
-                <a:lnTo>
-                  <a:pt x="56288" y="33990"/>
-                </a:lnTo>
-                <a:lnTo>
-                  <a:pt x="56593" y="32155"/>
-                </a:lnTo>
-                <a:lnTo>
-                  <a:pt x="56777" y="30297"/>
-                </a:lnTo>
-                <a:lnTo>
-                  <a:pt x="56839" y="28420"/>
-                </a:lnTo>
-                <a:lnTo>
-                  <a:pt x="56777" y="26543"/>
-                </a:lnTo>
-                <a:lnTo>
-                  <a:pt x="56593" y="24684"/>
-                </a:lnTo>
-                <a:lnTo>
-                  <a:pt x="56288" y="22850"/>
-                </a:lnTo>
-                <a:lnTo>
-                  <a:pt x="55865" y="21044"/>
-                </a:lnTo>
-                <a:lnTo>
-                  <a:pt x="55327" y="19274"/>
-                </a:lnTo>
-                <a:lnTo>
-                  <a:pt x="54676" y="17544"/>
-                </a:lnTo>
-                <a:lnTo>
-                  <a:pt x="53913" y="15860"/>
-                </a:lnTo>
-                <a:lnTo>
-                  <a:pt x="53042" y="14228"/>
-                </a:lnTo>
-                <a:lnTo>
-                  <a:pt x="52064" y="12652"/>
-                </a:lnTo>
-                <a:lnTo>
-                  <a:pt x="50982" y="11140"/>
-                </a:lnTo>
-                <a:lnTo>
-                  <a:pt x="49799" y="9695"/>
-                </a:lnTo>
-                <a:lnTo>
-                  <a:pt x="48515" y="8324"/>
-                </a:lnTo>
-                <a:lnTo>
-                  <a:pt x="47144" y="7041"/>
-                </a:lnTo>
-                <a:lnTo>
-                  <a:pt x="45699" y="5857"/>
-                </a:lnTo>
-                <a:lnTo>
-                  <a:pt x="44187" y="4775"/>
-                </a:lnTo>
-                <a:lnTo>
-                  <a:pt x="42611" y="3797"/>
-                </a:lnTo>
-                <a:lnTo>
-                  <a:pt x="40979" y="2926"/>
-                </a:lnTo>
-                <a:lnTo>
-                  <a:pt x="39295" y="2164"/>
-                </a:lnTo>
-                <a:lnTo>
-                  <a:pt x="37565" y="1512"/>
-                </a:lnTo>
-                <a:lnTo>
-                  <a:pt x="35795" y="974"/>
-                </a:lnTo>
-                <a:lnTo>
-                  <a:pt x="33990" y="551"/>
-                </a:lnTo>
-                <a:lnTo>
-                  <a:pt x="32155" y="247"/>
-                </a:lnTo>
-                <a:lnTo>
-                  <a:pt x="30296" y="62"/>
-                </a:lnTo>
-                <a:lnTo>
-                  <a:pt x="28420" y="0"/>
-                </a:lnTo>
-                <a:lnTo>
-                  <a:pt x="26543" y="62"/>
-                </a:lnTo>
-                <a:lnTo>
-                  <a:pt x="24684" y="247"/>
-                </a:lnTo>
-                <a:lnTo>
-                  <a:pt x="22849" y="551"/>
-                </a:lnTo>
-                <a:lnTo>
-                  <a:pt x="21044" y="974"/>
-                </a:lnTo>
-                <a:lnTo>
-                  <a:pt x="19274" y="1512"/>
-                </a:lnTo>
-                <a:lnTo>
-                  <a:pt x="17544" y="2164"/>
-                </a:lnTo>
-                <a:lnTo>
-                  <a:pt x="15860" y="2926"/>
-                </a:lnTo>
-                <a:lnTo>
-                  <a:pt x="14228" y="3797"/>
-                </a:lnTo>
-                <a:lnTo>
-                  <a:pt x="12652" y="4775"/>
-                </a:lnTo>
-                <a:lnTo>
-                  <a:pt x="11140" y="5857"/>
-                </a:lnTo>
-                <a:lnTo>
-                  <a:pt x="9695" y="7041"/>
-                </a:lnTo>
-                <a:lnTo>
-                  <a:pt x="8324" y="8324"/>
-                </a:lnTo>
-                <a:lnTo>
-                  <a:pt x="7041" y="9695"/>
-                </a:lnTo>
-                <a:lnTo>
-                  <a:pt x="5857" y="11140"/>
-                </a:lnTo>
-                <a:lnTo>
-                  <a:pt x="4775" y="12652"/>
-                </a:lnTo>
-                <a:lnTo>
-                  <a:pt x="3797" y="14228"/>
-                </a:lnTo>
-                <a:lnTo>
-                  <a:pt x="2926" y="15860"/>
-                </a:lnTo>
-                <a:lnTo>
-                  <a:pt x="2163" y="17544"/>
-                </a:lnTo>
-                <a:lnTo>
-                  <a:pt x="1512" y="19274"/>
-                </a:lnTo>
-                <a:lnTo>
-                  <a:pt x="974" y="21044"/>
-                </a:lnTo>
-                <a:lnTo>
-                  <a:pt x="551" y="22850"/>
-                </a:lnTo>
-                <a:lnTo>
-                  <a:pt x="247" y="24684"/>
-                </a:lnTo>
-                <a:lnTo>
-                  <a:pt x="62" y="26543"/>
-                </a:lnTo>
-                <a:lnTo>
-                  <a:pt x="0" y="28420"/>
-                </a:lnTo>
-                <a:lnTo>
-                  <a:pt x="62" y="30297"/>
-                </a:lnTo>
-                <a:lnTo>
-                  <a:pt x="247" y="32155"/>
-                </a:lnTo>
-                <a:lnTo>
-                  <a:pt x="551" y="33990"/>
-                </a:lnTo>
-                <a:lnTo>
-                  <a:pt x="974" y="35795"/>
-                </a:lnTo>
-                <a:lnTo>
-                  <a:pt x="1512" y="37565"/>
-                </a:lnTo>
-                <a:lnTo>
-                  <a:pt x="2163" y="39295"/>
-                </a:lnTo>
-                <a:lnTo>
-                  <a:pt x="2926" y="40979"/>
-                </a:lnTo>
-                <a:lnTo>
-                  <a:pt x="3797" y="42612"/>
-                </a:lnTo>
-                <a:lnTo>
-                  <a:pt x="4775" y="44187"/>
-                </a:lnTo>
-                <a:lnTo>
-                  <a:pt x="5857" y="45700"/>
-                </a:lnTo>
-                <a:lnTo>
-                  <a:pt x="7041" y="47144"/>
-                </a:lnTo>
-                <a:lnTo>
-                  <a:pt x="8324" y="48515"/>
-                </a:lnTo>
-                <a:lnTo>
-                  <a:pt x="9695" y="49799"/>
-                </a:lnTo>
-                <a:lnTo>
-                  <a:pt x="11140" y="50982"/>
-                </a:lnTo>
-                <a:lnTo>
-                  <a:pt x="12652" y="52064"/>
-                </a:lnTo>
-                <a:lnTo>
-                  <a:pt x="14228" y="53042"/>
-                </a:lnTo>
-                <a:lnTo>
-                  <a:pt x="15860" y="53913"/>
-                </a:lnTo>
-                <a:lnTo>
-                  <a:pt x="17544" y="54676"/>
-                </a:lnTo>
-                <a:lnTo>
-                  <a:pt x="19274" y="55327"/>
-                </a:lnTo>
-                <a:lnTo>
-                  <a:pt x="21044" y="55866"/>
-                </a:lnTo>
-                <a:lnTo>
-                  <a:pt x="22849" y="56288"/>
-                </a:lnTo>
-                <a:lnTo>
-                  <a:pt x="24684" y="56593"/>
-                </a:lnTo>
-                <a:lnTo>
-                  <a:pt x="26543" y="56777"/>
-                </a:lnTo>
-                <a:lnTo>
-                  <a:pt x="28420" y="56839"/>
-                </a:lnTo>
-                <a:close/>
-              </a:path>
-            </a:pathLst>
-          </a:custGeom>
-          <a:solidFill>
-            <a:srgbClr val="7C5AA6"/>
-          </a:solidFill>
-          <a:ln w="23682">
-            <a:solidFill>
-              <a:srgbClr val="7C5AA6"/>
-            </a:solidFill>
-          </a:ln>
-        </p:spPr>
-        <p:style>
-          <a:lnRef idx="1">
-            <a:schemeClr val="accent1"/>
-          </a:lnRef>
-          <a:fillRef idx="3">
-            <a:schemeClr val="accent1"/>
-          </a:fillRef>
-          <a:effectRef idx="2">
-            <a:schemeClr val="accent1"/>
-          </a:effectRef>
-          <a:fontRef idx="minor">
-            <a:schemeClr val="lt1"/>
-          </a:fontRef>
-        </p:style>
-        <p:txBody>
-          <a:bodyPr rtlCol="0" anchor="ctr"/>
-          <a:lstStyle/>
-          <a:p>
-            <a:pPr algn="ctr"/>
-          </a:p>
-        </p:txBody>
-      </p:sp>
-      <p:sp>
-        <p:nvSpPr>
-          <p:cNvPr id="18" name="Editable path 17"/>
-          <p:cNvSpPr/>
-          <p:nvPr/>
-        </p:nvSpPr>
-        <p:spPr>
-          <a:xfrm>
-            <a:off x="5092220" y="1313219"/>
-            <a:ext cx="56839" cy="56839"/>
-          </a:xfrm>
-          <a:custGeom>
-            <a:avLst/>
-            <a:gdLst/>
-            <a:ahLst/>
-            <a:cxnLst/>
-            <a:rect l="l" t="t" r="r" b="b"/>
-            <a:pathLst>
-              <a:path w="56839" h="56839">
-                <a:moveTo>
-                  <a:pt x="28419" y="56839"/>
-                </a:moveTo>
-                <a:lnTo>
-                  <a:pt x="30296" y="56777"/>
-                </a:lnTo>
-                <a:lnTo>
-                  <a:pt x="32155" y="56593"/>
-                </a:lnTo>
-                <a:lnTo>
-                  <a:pt x="33989" y="56288"/>
-                </a:lnTo>
-                <a:lnTo>
-                  <a:pt x="35795" y="55866"/>
-                </a:lnTo>
-                <a:lnTo>
-                  <a:pt x="37565" y="55327"/>
-                </a:lnTo>
-                <a:lnTo>
-                  <a:pt x="39295" y="54676"/>
-                </a:lnTo>
-                <a:lnTo>
-                  <a:pt x="40979" y="53913"/>
-                </a:lnTo>
-                <a:lnTo>
-                  <a:pt x="42611" y="53042"/>
-                </a:lnTo>
-                <a:lnTo>
-                  <a:pt x="44187" y="52064"/>
-                </a:lnTo>
-                <a:lnTo>
-                  <a:pt x="45699" y="50983"/>
-                </a:lnTo>
-                <a:lnTo>
-                  <a:pt x="47144" y="49799"/>
-                </a:lnTo>
-                <a:lnTo>
-                  <a:pt x="48515" y="48515"/>
-                </a:lnTo>
-                <a:lnTo>
-                  <a:pt x="49798" y="47144"/>
-                </a:lnTo>
-                <a:lnTo>
-                  <a:pt x="50982" y="45700"/>
-                </a:lnTo>
-                <a:lnTo>
-                  <a:pt x="52064" y="44187"/>
-                </a:lnTo>
-                <a:lnTo>
-                  <a:pt x="53042" y="42612"/>
-                </a:lnTo>
-                <a:lnTo>
-                  <a:pt x="53913" y="40979"/>
-                </a:lnTo>
-                <a:lnTo>
-                  <a:pt x="54676" y="39295"/>
-                </a:lnTo>
-                <a:lnTo>
-                  <a:pt x="55327" y="37566"/>
-                </a:lnTo>
-                <a:lnTo>
-                  <a:pt x="55865" y="35795"/>
-                </a:lnTo>
-                <a:lnTo>
-                  <a:pt x="56288" y="33990"/>
-                </a:lnTo>
-                <a:lnTo>
-                  <a:pt x="56592" y="32155"/>
-                </a:lnTo>
-                <a:lnTo>
-                  <a:pt x="56777" y="30297"/>
-                </a:lnTo>
-                <a:lnTo>
-                  <a:pt x="56839" y="28420"/>
-                </a:lnTo>
-                <a:lnTo>
-                  <a:pt x="56777" y="26543"/>
-                </a:lnTo>
-                <a:lnTo>
-                  <a:pt x="56592" y="24684"/>
-                </a:lnTo>
-                <a:lnTo>
-                  <a:pt x="56288" y="22850"/>
-                </a:lnTo>
-                <a:lnTo>
-                  <a:pt x="55865" y="21044"/>
-                </a:lnTo>
-                <a:lnTo>
-                  <a:pt x="55327" y="19274"/>
-                </a:lnTo>
-                <a:lnTo>
-                  <a:pt x="54676" y="17544"/>
-                </a:lnTo>
-                <a:lnTo>
-                  <a:pt x="53913" y="15860"/>
-                </a:lnTo>
-                <a:lnTo>
-                  <a:pt x="53042" y="14228"/>
-                </a:lnTo>
-                <a:lnTo>
-                  <a:pt x="52064" y="12652"/>
-                </a:lnTo>
-                <a:lnTo>
-                  <a:pt x="50982" y="11140"/>
-                </a:lnTo>
-                <a:lnTo>
-                  <a:pt x="49798" y="9695"/>
-                </a:lnTo>
-                <a:lnTo>
-                  <a:pt x="48515" y="8324"/>
-                </a:lnTo>
-                <a:lnTo>
-                  <a:pt x="47144" y="7041"/>
-                </a:lnTo>
-                <a:lnTo>
-                  <a:pt x="45699" y="5857"/>
-                </a:lnTo>
-                <a:lnTo>
-                  <a:pt x="44187" y="4775"/>
-                </a:lnTo>
-                <a:lnTo>
-                  <a:pt x="42611" y="3797"/>
-                </a:lnTo>
-                <a:lnTo>
-                  <a:pt x="40979" y="2926"/>
-                </a:lnTo>
-                <a:lnTo>
-                  <a:pt x="39295" y="2164"/>
-                </a:lnTo>
-                <a:lnTo>
-                  <a:pt x="37565" y="1512"/>
-                </a:lnTo>
-                <a:lnTo>
-                  <a:pt x="35795" y="974"/>
-                </a:lnTo>
-                <a:lnTo>
-                  <a:pt x="33989" y="551"/>
-                </a:lnTo>
-                <a:lnTo>
-                  <a:pt x="32155" y="247"/>
-                </a:lnTo>
-                <a:lnTo>
-                  <a:pt x="30296" y="62"/>
-                </a:lnTo>
-                <a:lnTo>
-                  <a:pt x="28419" y="0"/>
-                </a:lnTo>
-                <a:lnTo>
-                  <a:pt x="26543" y="62"/>
-                </a:lnTo>
-                <a:lnTo>
-                  <a:pt x="24684" y="247"/>
-                </a:lnTo>
-                <a:lnTo>
-                  <a:pt x="22849" y="551"/>
-                </a:lnTo>
-                <a:lnTo>
-                  <a:pt x="21044" y="974"/>
-                </a:lnTo>
-                <a:lnTo>
-                  <a:pt x="19274" y="1512"/>
-                </a:lnTo>
-                <a:lnTo>
-                  <a:pt x="17544" y="2164"/>
-                </a:lnTo>
-                <a:lnTo>
-                  <a:pt x="15860" y="2926"/>
-                </a:lnTo>
-                <a:lnTo>
-                  <a:pt x="14228" y="3797"/>
-                </a:lnTo>
-                <a:lnTo>
-                  <a:pt x="12652" y="4775"/>
-                </a:lnTo>
-                <a:lnTo>
-                  <a:pt x="11140" y="5857"/>
-                </a:lnTo>
-                <a:lnTo>
-                  <a:pt x="9695" y="7041"/>
-                </a:lnTo>
-                <a:lnTo>
-                  <a:pt x="8324" y="8324"/>
-                </a:lnTo>
-                <a:lnTo>
-                  <a:pt x="7040" y="9695"/>
-                </a:lnTo>
-                <a:lnTo>
-                  <a:pt x="5857" y="11140"/>
-                </a:lnTo>
-                <a:lnTo>
-                  <a:pt x="4775" y="12652"/>
-                </a:lnTo>
-                <a:lnTo>
-                  <a:pt x="3797" y="14228"/>
-                </a:lnTo>
-                <a:lnTo>
-                  <a:pt x="2926" y="15860"/>
-                </a:lnTo>
-                <a:lnTo>
-                  <a:pt x="2163" y="17544"/>
-                </a:lnTo>
-                <a:lnTo>
-                  <a:pt x="1512" y="19274"/>
-                </a:lnTo>
-                <a:lnTo>
-                  <a:pt x="974" y="21044"/>
-                </a:lnTo>
-                <a:lnTo>
-                  <a:pt x="551" y="22850"/>
-                </a:lnTo>
-                <a:lnTo>
-                  <a:pt x="246" y="24684"/>
-                </a:lnTo>
-                <a:lnTo>
-                  <a:pt x="62" y="26543"/>
-                </a:lnTo>
-                <a:lnTo>
-                  <a:pt x="0" y="28420"/>
-                </a:lnTo>
-                <a:lnTo>
-                  <a:pt x="62" y="30297"/>
-                </a:lnTo>
-                <a:lnTo>
-                  <a:pt x="246" y="32155"/>
-                </a:lnTo>
-                <a:lnTo>
-                  <a:pt x="551" y="33990"/>
-                </a:lnTo>
-                <a:lnTo>
-                  <a:pt x="974" y="35795"/>
-                </a:lnTo>
-                <a:lnTo>
-                  <a:pt x="1512" y="37566"/>
-                </a:lnTo>
-                <a:lnTo>
-                  <a:pt x="2163" y="39295"/>
-                </a:lnTo>
-                <a:lnTo>
-                  <a:pt x="2926" y="40979"/>
-                </a:lnTo>
-                <a:lnTo>
-                  <a:pt x="3797" y="42612"/>
-                </a:lnTo>
-                <a:lnTo>
-                  <a:pt x="4775" y="44187"/>
-                </a:lnTo>
-                <a:lnTo>
-                  <a:pt x="5857" y="45700"/>
-                </a:lnTo>
-                <a:lnTo>
-                  <a:pt x="7040" y="47144"/>
-                </a:lnTo>
-                <a:lnTo>
-                  <a:pt x="8324" y="48515"/>
-                </a:lnTo>
-                <a:lnTo>
-                  <a:pt x="9695" y="49799"/>
-                </a:lnTo>
-                <a:lnTo>
-                  <a:pt x="11140" y="50983"/>
-                </a:lnTo>
-                <a:lnTo>
-                  <a:pt x="12652" y="52064"/>
-                </a:lnTo>
-                <a:lnTo>
-                  <a:pt x="14228" y="53042"/>
-                </a:lnTo>
-                <a:lnTo>
-                  <a:pt x="15860" y="53913"/>
-                </a:lnTo>
-                <a:lnTo>
-                  <a:pt x="17544" y="54676"/>
-                </a:lnTo>
-                <a:lnTo>
-                  <a:pt x="19274" y="55327"/>
-                </a:lnTo>
-                <a:lnTo>
-                  <a:pt x="21044" y="55866"/>
-                </a:lnTo>
-                <a:lnTo>
-                  <a:pt x="22849" y="56288"/>
-                </a:lnTo>
-                <a:lnTo>
-                  <a:pt x="24684" y="56593"/>
-                </a:lnTo>
-                <a:lnTo>
-                  <a:pt x="26543" y="56777"/>
-                </a:lnTo>
-                <a:lnTo>
-                  <a:pt x="28419" y="56839"/>
-                </a:lnTo>
-                <a:close/>
-              </a:path>
-            </a:pathLst>
-          </a:custGeom>
-          <a:solidFill>
-            <a:srgbClr val="7C5AA6"/>
-          </a:solidFill>
-          <a:ln w="23682">
-            <a:solidFill>
-              <a:srgbClr val="7C5AA6"/>
-            </a:solidFill>
-          </a:ln>
-        </p:spPr>
-        <p:style>
-          <a:lnRef idx="1">
-            <a:schemeClr val="accent1"/>
-          </a:lnRef>
-          <a:fillRef idx="3">
-            <a:schemeClr val="accent1"/>
-          </a:fillRef>
-          <a:effectRef idx="2">
-            <a:schemeClr val="accent1"/>
-          </a:effectRef>
-          <a:fontRef idx="minor">
-            <a:schemeClr val="lt1"/>
-          </a:fontRef>
-        </p:style>
-        <p:txBody>
-          <a:bodyPr rtlCol="0" anchor="ctr"/>
-          <a:lstStyle/>
-          <a:p>
-            <a:pPr algn="ctr"/>
-          </a:p>
-        </p:txBody>
-      </p:sp>
-      <p:sp>
-        <p:nvSpPr>
-          <p:cNvPr id="19" name="Editable path 18"/>
           <p:cNvSpPr/>
           <p:nvPr/>
         </p:nvSpPr>
@@ -7556,7 +5979,7 @@
       </p:sp>
       <p:sp>
         <p:nvSpPr>
-          <p:cNvPr id="20" name="Editable path 19"/>
+          <p:cNvPr id="15" name="Editable path 14"/>
           <p:cNvSpPr/>
           <p:nvPr/>
         </p:nvSpPr>
@@ -7613,7 +6036,7 @@
       </p:sp>
       <p:sp>
         <p:nvSpPr>
-          <p:cNvPr id="21" name="Editable path 20"/>
+          <p:cNvPr id="16" name="Editable path 15"/>
           <p:cNvSpPr/>
           <p:nvPr/>
         </p:nvSpPr>
@@ -7670,7 +6093,7 @@
       </p:sp>
       <p:sp>
         <p:nvSpPr>
-          <p:cNvPr id="22" name="Editable path 21"/>
+          <p:cNvPr id="17" name="Editable path 16"/>
           <p:cNvSpPr/>
           <p:nvPr/>
         </p:nvSpPr>
@@ -7727,7 +6150,7 @@
       </p:sp>
       <p:sp>
         <p:nvSpPr>
-          <p:cNvPr id="23" name="Editable path 22"/>
+          <p:cNvPr id="18" name="Editable path 17"/>
           <p:cNvSpPr/>
           <p:nvPr/>
         </p:nvSpPr>
@@ -7784,7 +6207,7 @@
       </p:sp>
       <p:sp>
         <p:nvSpPr>
-          <p:cNvPr id="24" name="Editable path 23"/>
+          <p:cNvPr id="19" name="Editable path 18"/>
           <p:cNvSpPr/>
           <p:nvPr/>
         </p:nvSpPr>
@@ -7841,7 +6264,7 @@
       </p:sp>
       <p:sp>
         <p:nvSpPr>
-          <p:cNvPr id="25" name="Editable path 24"/>
+          <p:cNvPr id="20" name="Editable path 19"/>
           <p:cNvSpPr/>
           <p:nvPr/>
         </p:nvSpPr>
@@ -7898,7 +6321,7 @@
       </p:sp>
       <p:sp>
         <p:nvSpPr>
-          <p:cNvPr id="26" name="Editable path 25"/>
+          <p:cNvPr id="21" name="Editable path 20"/>
           <p:cNvSpPr/>
           <p:nvPr/>
         </p:nvSpPr>
@@ -7955,7 +6378,7 @@
       </p:sp>
       <p:sp>
         <p:nvSpPr>
-          <p:cNvPr id="27" name="Editable path 26"/>
+          <p:cNvPr id="22" name="Editable path 21"/>
           <p:cNvSpPr/>
           <p:nvPr/>
         </p:nvSpPr>
@@ -8013,7 +6436,7 @@
       </p:sp>
       <p:sp>
         <p:nvSpPr>
-          <p:cNvPr id="28" name="Editable path 27"/>
+          <p:cNvPr id="23" name="Editable path 22"/>
           <p:cNvSpPr/>
           <p:nvPr/>
         </p:nvSpPr>
@@ -8071,7 +6494,7 @@
       </p:sp>
       <p:sp>
         <p:nvSpPr>
-          <p:cNvPr id="29" name="Editable path 28"/>
+          <p:cNvPr id="24" name="Editable path 23"/>
           <p:cNvSpPr/>
           <p:nvPr/>
         </p:nvSpPr>
@@ -8129,7 +6552,7 @@
       </p:sp>
       <p:sp>
         <p:nvSpPr>
-          <p:cNvPr id="30" name="Editable path 29"/>
+          <p:cNvPr id="25" name="Editable path 24"/>
           <p:cNvSpPr/>
           <p:nvPr/>
         </p:nvSpPr>
@@ -8187,14 +6610,14 @@
       </p:sp>
       <p:sp>
         <p:nvSpPr>
-          <p:cNvPr id="31" name="Editable path 30"/>
+          <p:cNvPr id="26" name="Editable path 25"/>
           <p:cNvSpPr/>
           <p:nvPr/>
         </p:nvSpPr>
         <p:spPr>
           <a:xfrm>
-            <a:off x="3779520" y="1070959"/>
-            <a:ext cx="346505" cy="158877"/>
+            <a:off x="5486400" y="2236064"/>
+            <a:ext cx="182880" cy="0"/>
           </a:xfrm>
           <a:custGeom>
             <a:avLst/>
@@ -8203,45 +6626,12 @@
             <a:cxnLst/>
             <a:rect l="l" t="t" r="r" b="b"/>
             <a:pathLst>
-              <a:path w="346505" h="158877">
+              <a:path w="182880" h="0">
                 <a:moveTo>
-                  <a:pt x="0" y="158877"/>
+                  <a:pt x="0" y="0"/>
                 </a:moveTo>
                 <a:lnTo>
-                  <a:pt x="30346" y="144962"/>
-                </a:lnTo>
-                <a:lnTo>
-                  <a:pt x="60425" y="131171"/>
-                </a:lnTo>
-                <a:lnTo>
-                  <a:pt x="90236" y="117502"/>
-                </a:lnTo>
-                <a:lnTo>
-                  <a:pt x="119780" y="103956"/>
-                </a:lnTo>
-                <a:lnTo>
-                  <a:pt x="149057" y="90532"/>
-                </a:lnTo>
-                <a:lnTo>
-                  <a:pt x="178066" y="77231"/>
-                </a:lnTo>
-                <a:lnTo>
-                  <a:pt x="206808" y="64053"/>
-                </a:lnTo>
-                <a:lnTo>
-                  <a:pt x="235282" y="50997"/>
-                </a:lnTo>
-                <a:lnTo>
-                  <a:pt x="263489" y="38064"/>
-                </a:lnTo>
-                <a:lnTo>
-                  <a:pt x="291428" y="25254"/>
-                </a:lnTo>
-                <a:lnTo>
-                  <a:pt x="319100" y="12566"/>
-                </a:lnTo>
-                <a:lnTo>
-                  <a:pt x="346505" y="0"/>
+                  <a:pt x="182880" y="0"/>
                 </a:lnTo>
               </a:path>
             </a:pathLst>
@@ -8251,6 +6641,7 @@
             <a:solidFill>
               <a:srgbClr val="7C5AA6"/>
             </a:solidFill>
+            <a:prstDash val="dash"/>
           </a:ln>
         </p:spPr>
         <p:style>
@@ -8277,14 +6668,14 @@
       </p:sp>
       <p:sp>
         <p:nvSpPr>
-          <p:cNvPr id="32" name="Editable path 31"/>
+          <p:cNvPr id="27" name="Editable path 26"/>
           <p:cNvSpPr/>
           <p:nvPr/>
         </p:nvSpPr>
         <p:spPr>
           <a:xfrm>
-            <a:off x="4051927" y="1068459"/>
-            <a:ext cx="74098" cy="60278"/>
+            <a:off x="5669280" y="2236064"/>
+            <a:ext cx="0" cy="1509344"/>
           </a:xfrm>
           <a:custGeom>
             <a:avLst/>
@@ -8293,30 +6684,22 @@
             <a:cxnLst/>
             <a:rect l="l" t="t" r="r" b="b"/>
             <a:pathLst>
-              <a:path w="74098" h="60278">
+              <a:path w="0" h="1509344">
                 <a:moveTo>
                   <a:pt x="0" y="0"/>
                 </a:moveTo>
                 <a:lnTo>
-                  <a:pt x="74098" y="2500"/>
-                </a:lnTo>
-                <a:lnTo>
-                  <a:pt x="27638" y="60278"/>
-                </a:lnTo>
-                <a:lnTo>
-                  <a:pt x="0" y="0"/>
-                </a:lnTo>
-                <a:close/>
+                  <a:pt x="0" y="1509344"/>
+                </a:lnTo>
               </a:path>
             </a:pathLst>
           </a:custGeom>
-          <a:solidFill>
-            <a:srgbClr val="7C5AA6"/>
-          </a:solidFill>
+          <a:noFill/>
           <a:ln w="18946">
             <a:solidFill>
               <a:srgbClr val="7C5AA6"/>
             </a:solidFill>
+            <a:prstDash val="dash"/>
           </a:ln>
         </p:spPr>
         <p:style>
@@ -8343,7 +6726,181 @@
       </p:sp>
       <p:sp>
         <p:nvSpPr>
-          <p:cNvPr id="33" name="Editable path 32"/>
+          <p:cNvPr id="28" name="Editable path 27"/>
+          <p:cNvSpPr/>
+          <p:nvPr/>
+        </p:nvSpPr>
+        <p:spPr>
+          <a:xfrm>
+            <a:off x="5669280" y="3745408"/>
+            <a:ext cx="1645920" cy="0"/>
+          </a:xfrm>
+          <a:custGeom>
+            <a:avLst/>
+            <a:gdLst/>
+            <a:ahLst/>
+            <a:cxnLst/>
+            <a:rect l="l" t="t" r="r" b="b"/>
+            <a:pathLst>
+              <a:path w="1645920" h="0">
+                <a:moveTo>
+                  <a:pt x="0" y="0"/>
+                </a:moveTo>
+                <a:lnTo>
+                  <a:pt x="1645920" y="0"/>
+                </a:lnTo>
+              </a:path>
+            </a:pathLst>
+          </a:custGeom>
+          <a:noFill/>
+          <a:ln w="18946">
+            <a:solidFill>
+              <a:srgbClr val="7C5AA6"/>
+            </a:solidFill>
+            <a:prstDash val="dash"/>
+          </a:ln>
+        </p:spPr>
+        <p:style>
+          <a:lnRef idx="1">
+            <a:schemeClr val="accent1"/>
+          </a:lnRef>
+          <a:fillRef idx="3">
+            <a:schemeClr val="accent1"/>
+          </a:fillRef>
+          <a:effectRef idx="2">
+            <a:schemeClr val="accent1"/>
+          </a:effectRef>
+          <a:fontRef idx="minor">
+            <a:schemeClr val="lt1"/>
+          </a:fontRef>
+        </p:style>
+        <p:txBody>
+          <a:bodyPr rtlCol="0" anchor="ctr"/>
+          <a:lstStyle/>
+          <a:p>
+            <a:pPr algn="ctr"/>
+          </a:p>
+        </p:txBody>
+      </p:sp>
+      <p:sp>
+        <p:nvSpPr>
+          <p:cNvPr id="29" name="Editable path 28"/>
+          <p:cNvSpPr/>
+          <p:nvPr/>
+        </p:nvSpPr>
+        <p:spPr>
+          <a:xfrm>
+            <a:off x="10485119" y="3689506"/>
+            <a:ext cx="0" cy="167705"/>
+          </a:xfrm>
+          <a:custGeom>
+            <a:avLst/>
+            <a:gdLst/>
+            <a:ahLst/>
+            <a:cxnLst/>
+            <a:rect l="l" t="t" r="r" b="b"/>
+            <a:pathLst>
+              <a:path w="0" h="167705">
+                <a:moveTo>
+                  <a:pt x="0" y="167705"/>
+                </a:moveTo>
+                <a:lnTo>
+                  <a:pt x="0" y="0"/>
+                </a:lnTo>
+              </a:path>
+            </a:pathLst>
+          </a:custGeom>
+          <a:noFill/>
+          <a:ln w="18946">
+            <a:solidFill>
+              <a:srgbClr val="6B7280"/>
+            </a:solidFill>
+            <a:prstDash val="dash"/>
+          </a:ln>
+        </p:spPr>
+        <p:style>
+          <a:lnRef idx="1">
+            <a:schemeClr val="accent1"/>
+          </a:lnRef>
+          <a:fillRef idx="3">
+            <a:schemeClr val="accent1"/>
+          </a:fillRef>
+          <a:effectRef idx="2">
+            <a:schemeClr val="accent1"/>
+          </a:effectRef>
+          <a:fontRef idx="minor">
+            <a:schemeClr val="lt1"/>
+          </a:fontRef>
+        </p:style>
+        <p:txBody>
+          <a:bodyPr rtlCol="0" anchor="ctr"/>
+          <a:lstStyle/>
+          <a:p>
+            <a:pPr algn="ctr"/>
+          </a:p>
+        </p:txBody>
+      </p:sp>
+      <p:sp>
+        <p:nvSpPr>
+          <p:cNvPr id="30" name="Editable path 29"/>
+          <p:cNvSpPr/>
+          <p:nvPr/>
+        </p:nvSpPr>
+        <p:spPr>
+          <a:xfrm>
+            <a:off x="9570720" y="3689506"/>
+            <a:ext cx="914399" cy="0"/>
+          </a:xfrm>
+          <a:custGeom>
+            <a:avLst/>
+            <a:gdLst/>
+            <a:ahLst/>
+            <a:cxnLst/>
+            <a:rect l="l" t="t" r="r" b="b"/>
+            <a:pathLst>
+              <a:path w="914399" h="0">
+                <a:moveTo>
+                  <a:pt x="914399" y="0"/>
+                </a:moveTo>
+                <a:lnTo>
+                  <a:pt x="0" y="0"/>
+                </a:lnTo>
+              </a:path>
+            </a:pathLst>
+          </a:custGeom>
+          <a:noFill/>
+          <a:ln w="18946">
+            <a:solidFill>
+              <a:srgbClr val="6B7280"/>
+            </a:solidFill>
+            <a:prstDash val="dash"/>
+          </a:ln>
+        </p:spPr>
+        <p:style>
+          <a:lnRef idx="1">
+            <a:schemeClr val="accent1"/>
+          </a:lnRef>
+          <a:fillRef idx="3">
+            <a:schemeClr val="accent1"/>
+          </a:fillRef>
+          <a:effectRef idx="2">
+            <a:schemeClr val="accent1"/>
+          </a:effectRef>
+          <a:fontRef idx="minor">
+            <a:schemeClr val="lt1"/>
+          </a:fontRef>
+        </p:style>
+        <p:txBody>
+          <a:bodyPr rtlCol="0" anchor="ctr"/>
+          <a:lstStyle/>
+          <a:p>
+            <a:pPr algn="ctr"/>
+          </a:p>
+        </p:txBody>
+      </p:sp>
+      <p:sp>
+        <p:nvSpPr>
+          <p:cNvPr id="31" name="Editable path 30"/>
           <p:cNvSpPr/>
           <p:nvPr/>
         </p:nvSpPr>
@@ -8433,7 +6990,7 @@
       </p:sp>
       <p:sp>
         <p:nvSpPr>
-          <p:cNvPr id="34" name="Editable path 33"/>
+          <p:cNvPr id="32" name="Editable path 31"/>
           <p:cNvSpPr/>
           <p:nvPr/>
         </p:nvSpPr>
@@ -8499,7 +7056,7 @@
       </p:sp>
       <p:sp>
         <p:nvSpPr>
-          <p:cNvPr id="35" name="Editable path 34"/>
+          <p:cNvPr id="33" name="Editable path 32"/>
           <p:cNvSpPr/>
           <p:nvPr/>
         </p:nvSpPr>
@@ -8589,7 +7146,7 @@
       </p:sp>
       <p:sp>
         <p:nvSpPr>
-          <p:cNvPr id="36" name="Editable path 35"/>
+          <p:cNvPr id="34" name="Editable path 33"/>
           <p:cNvSpPr/>
           <p:nvPr/>
         </p:nvSpPr>
@@ -8655,7 +7212,7 @@
       </p:sp>
       <p:sp>
         <p:nvSpPr>
-          <p:cNvPr id="37" name="Editable path 36"/>
+          <p:cNvPr id="35" name="Editable path 34"/>
           <p:cNvSpPr/>
           <p:nvPr/>
         </p:nvSpPr>
@@ -8745,7 +7302,7 @@
       </p:sp>
       <p:sp>
         <p:nvSpPr>
-          <p:cNvPr id="38" name="Editable path 37"/>
+          <p:cNvPr id="36" name="Editable path 35"/>
           <p:cNvSpPr/>
           <p:nvPr/>
         </p:nvSpPr>
@@ -8811,7 +7368,7 @@
       </p:sp>
       <p:sp>
         <p:nvSpPr>
-          <p:cNvPr id="39" name="Editable path 38"/>
+          <p:cNvPr id="37" name="Editable path 36"/>
           <p:cNvSpPr/>
           <p:nvPr/>
         </p:nvSpPr>
@@ -8901,7 +7458,7 @@
       </p:sp>
       <p:sp>
         <p:nvSpPr>
-          <p:cNvPr id="40" name="Editable path 39"/>
+          <p:cNvPr id="38" name="Editable path 37"/>
           <p:cNvSpPr/>
           <p:nvPr/>
         </p:nvSpPr>
@@ -8967,7 +7524,7 @@
       </p:sp>
       <p:sp>
         <p:nvSpPr>
-          <p:cNvPr id="41" name="Editable path 40"/>
+          <p:cNvPr id="39" name="Editable path 38"/>
           <p:cNvSpPr/>
           <p:nvPr/>
         </p:nvSpPr>
@@ -9057,7 +7614,7 @@
       </p:sp>
       <p:sp>
         <p:nvSpPr>
-          <p:cNvPr id="42" name="Editable path 41"/>
+          <p:cNvPr id="40" name="Editable path 39"/>
           <p:cNvSpPr/>
           <p:nvPr/>
         </p:nvSpPr>
@@ -9123,7 +7680,7 @@
       </p:sp>
       <p:sp>
         <p:nvSpPr>
-          <p:cNvPr id="43" name="Editable path 42"/>
+          <p:cNvPr id="41" name="Editable path 40"/>
           <p:cNvSpPr/>
           <p:nvPr/>
         </p:nvSpPr>
@@ -9213,7 +7770,7 @@
       </p:sp>
       <p:sp>
         <p:nvSpPr>
-          <p:cNvPr id="44" name="Editable path 43"/>
+          <p:cNvPr id="42" name="Editable path 41"/>
           <p:cNvSpPr/>
           <p:nvPr/>
         </p:nvSpPr>
@@ -9279,7 +7836,7 @@
       </p:sp>
       <p:sp>
         <p:nvSpPr>
-          <p:cNvPr id="45" name="Editable path 44"/>
+          <p:cNvPr id="43" name="Editable path 42"/>
           <p:cNvSpPr/>
           <p:nvPr/>
         </p:nvSpPr>
@@ -9369,7 +7926,7 @@
       </p:sp>
       <p:sp>
         <p:nvSpPr>
-          <p:cNvPr id="46" name="Editable path 45"/>
+          <p:cNvPr id="44" name="Editable path 43"/>
           <p:cNvSpPr/>
           <p:nvPr/>
         </p:nvSpPr>
@@ -9435,7 +7992,7 @@
       </p:sp>
       <p:sp>
         <p:nvSpPr>
-          <p:cNvPr id="47" name="Editable path 46"/>
+          <p:cNvPr id="45" name="Editable path 44"/>
           <p:cNvSpPr/>
           <p:nvPr/>
         </p:nvSpPr>
@@ -9525,7 +8082,7 @@
       </p:sp>
       <p:sp>
         <p:nvSpPr>
-          <p:cNvPr id="48" name="Editable path 47"/>
+          <p:cNvPr id="46" name="Editable path 45"/>
           <p:cNvSpPr/>
           <p:nvPr/>
         </p:nvSpPr>
@@ -9591,7 +8148,7 @@
       </p:sp>
       <p:sp>
         <p:nvSpPr>
-          <p:cNvPr id="49" name="Editable path 48"/>
+          <p:cNvPr id="47" name="Editable path 46"/>
           <p:cNvSpPr/>
           <p:nvPr/>
         </p:nvSpPr>
@@ -9681,7 +8238,7 @@
       </p:sp>
       <p:sp>
         <p:nvSpPr>
-          <p:cNvPr id="50" name="Editable path 49"/>
+          <p:cNvPr id="48" name="Editable path 47"/>
           <p:cNvSpPr/>
           <p:nvPr/>
         </p:nvSpPr>
@@ -9747,7 +8304,7 @@
       </p:sp>
       <p:sp>
         <p:nvSpPr>
-          <p:cNvPr id="51" name="Editable path 50"/>
+          <p:cNvPr id="49" name="Editable path 48"/>
           <p:cNvSpPr/>
           <p:nvPr/>
         </p:nvSpPr>
@@ -9837,7 +8394,7 @@
       </p:sp>
       <p:sp>
         <p:nvSpPr>
-          <p:cNvPr id="52" name="Editable path 51"/>
+          <p:cNvPr id="50" name="Editable path 49"/>
           <p:cNvSpPr/>
           <p:nvPr/>
         </p:nvSpPr>
@@ -9903,7 +8460,7 @@
       </p:sp>
       <p:sp>
         <p:nvSpPr>
-          <p:cNvPr id="53" name="Editable path 52"/>
+          <p:cNvPr id="51" name="Editable path 50"/>
           <p:cNvSpPr/>
           <p:nvPr/>
         </p:nvSpPr>
@@ -9993,7 +8550,7 @@
       </p:sp>
       <p:sp>
         <p:nvSpPr>
-          <p:cNvPr id="54" name="Editable path 53"/>
+          <p:cNvPr id="52" name="Editable path 51"/>
           <p:cNvSpPr/>
           <p:nvPr/>
         </p:nvSpPr>
@@ -10059,7 +8616,7 @@
       </p:sp>
       <p:sp>
         <p:nvSpPr>
-          <p:cNvPr id="55" name="Editable path 54"/>
+          <p:cNvPr id="53" name="Editable path 52"/>
           <p:cNvSpPr/>
           <p:nvPr/>
         </p:nvSpPr>
@@ -10150,7 +8707,7 @@
       </p:sp>
       <p:sp>
         <p:nvSpPr>
-          <p:cNvPr id="56" name="Editable path 55"/>
+          <p:cNvPr id="54" name="Editable path 53"/>
           <p:cNvSpPr/>
           <p:nvPr/>
         </p:nvSpPr>
@@ -10217,7 +8774,7 @@
       </p:sp>
       <p:sp>
         <p:nvSpPr>
-          <p:cNvPr id="57" name="Editable path 56"/>
+          <p:cNvPr id="55" name="Editable path 54"/>
           <p:cNvSpPr/>
           <p:nvPr/>
         </p:nvSpPr>
@@ -10308,7 +8865,7 @@
       </p:sp>
       <p:sp>
         <p:nvSpPr>
-          <p:cNvPr id="58" name="Editable path 57"/>
+          <p:cNvPr id="56" name="Editable path 55"/>
           <p:cNvSpPr/>
           <p:nvPr/>
         </p:nvSpPr>
@@ -10373,9 +8930,325 @@
           </a:p>
         </p:txBody>
       </p:sp>
+      <p:sp>
+        <p:nvSpPr>
+          <p:cNvPr id="57" name="Editable path 56"/>
+          <p:cNvSpPr/>
+          <p:nvPr/>
+        </p:nvSpPr>
+        <p:spPr>
+          <a:xfrm>
+            <a:off x="7315200" y="3745408"/>
+            <a:ext cx="0" cy="90620"/>
+          </a:xfrm>
+          <a:custGeom>
+            <a:avLst/>
+            <a:gdLst/>
+            <a:ahLst/>
+            <a:cxnLst/>
+            <a:rect l="l" t="t" r="r" b="b"/>
+            <a:pathLst>
+              <a:path w="0" h="90620">
+                <a:moveTo>
+                  <a:pt x="0" y="0"/>
+                </a:moveTo>
+                <a:lnTo>
+                  <a:pt x="0" y="9170"/>
+                </a:lnTo>
+                <a:lnTo>
+                  <a:pt x="0" y="18045"/>
+                </a:lnTo>
+                <a:lnTo>
+                  <a:pt x="0" y="26627"/>
+                </a:lnTo>
+                <a:lnTo>
+                  <a:pt x="0" y="34914"/>
+                </a:lnTo>
+                <a:lnTo>
+                  <a:pt x="0" y="42907"/>
+                </a:lnTo>
+                <a:lnTo>
+                  <a:pt x="0" y="50606"/>
+                </a:lnTo>
+                <a:lnTo>
+                  <a:pt x="0" y="58010"/>
+                </a:lnTo>
+                <a:lnTo>
+                  <a:pt x="0" y="65121"/>
+                </a:lnTo>
+                <a:lnTo>
+                  <a:pt x="0" y="71937"/>
+                </a:lnTo>
+                <a:lnTo>
+                  <a:pt x="0" y="78459"/>
+                </a:lnTo>
+                <a:lnTo>
+                  <a:pt x="0" y="84687"/>
+                </a:lnTo>
+                <a:lnTo>
+                  <a:pt x="0" y="90620"/>
+                </a:lnTo>
+              </a:path>
+            </a:pathLst>
+          </a:custGeom>
+          <a:noFill/>
+          <a:ln w="18946">
+            <a:solidFill>
+              <a:srgbClr val="7C5AA6"/>
+            </a:solidFill>
+            <a:prstDash val="dash"/>
+          </a:ln>
+        </p:spPr>
+        <p:style>
+          <a:lnRef idx="1">
+            <a:schemeClr val="accent1"/>
+          </a:lnRef>
+          <a:fillRef idx="3">
+            <a:schemeClr val="accent1"/>
+          </a:fillRef>
+          <a:effectRef idx="2">
+            <a:schemeClr val="accent1"/>
+          </a:effectRef>
+          <a:fontRef idx="minor">
+            <a:schemeClr val="lt1"/>
+          </a:fontRef>
+        </p:style>
+        <p:txBody>
+          <a:bodyPr rtlCol="0" anchor="ctr"/>
+          <a:lstStyle/>
+          <a:p>
+            <a:pPr algn="ctr"/>
+          </a:p>
+        </p:txBody>
+      </p:sp>
+      <p:sp>
+        <p:nvSpPr>
+          <p:cNvPr id="58" name="Editable path 57"/>
+          <p:cNvSpPr/>
+          <p:nvPr/>
+        </p:nvSpPr>
+        <p:spPr>
+          <a:xfrm>
+            <a:off x="7282044" y="3769716"/>
+            <a:ext cx="66312" cy="66312"/>
+          </a:xfrm>
+          <a:custGeom>
+            <a:avLst/>
+            <a:gdLst/>
+            <a:ahLst/>
+            <a:cxnLst/>
+            <a:rect l="l" t="t" r="r" b="b"/>
+            <a:pathLst>
+              <a:path w="66312" h="66312">
+                <a:moveTo>
+                  <a:pt x="66312" y="0"/>
+                </a:moveTo>
+                <a:lnTo>
+                  <a:pt x="33156" y="66312"/>
+                </a:lnTo>
+                <a:lnTo>
+                  <a:pt x="0" y="0"/>
+                </a:lnTo>
+                <a:lnTo>
+                  <a:pt x="66312" y="0"/>
+                </a:lnTo>
+                <a:close/>
+              </a:path>
+            </a:pathLst>
+          </a:custGeom>
+          <a:solidFill>
+            <a:srgbClr val="7C5AA6"/>
+          </a:solidFill>
+          <a:ln w="18946">
+            <a:solidFill>
+              <a:srgbClr val="7C5AA6"/>
+            </a:solidFill>
+            <a:prstDash val="dash"/>
+          </a:ln>
+        </p:spPr>
+        <p:style>
+          <a:lnRef idx="1">
+            <a:schemeClr val="accent1"/>
+          </a:lnRef>
+          <a:fillRef idx="3">
+            <a:schemeClr val="accent1"/>
+          </a:fillRef>
+          <a:effectRef idx="2">
+            <a:schemeClr val="accent1"/>
+          </a:effectRef>
+          <a:fontRef idx="minor">
+            <a:schemeClr val="lt1"/>
+          </a:fontRef>
+        </p:style>
+        <p:txBody>
+          <a:bodyPr rtlCol="0" anchor="ctr"/>
+          <a:lstStyle/>
+          <a:p>
+            <a:pPr algn="ctr"/>
+          </a:p>
+        </p:txBody>
+      </p:sp>
+      <p:sp>
+        <p:nvSpPr>
+          <p:cNvPr id="59" name="Editable path 58"/>
+          <p:cNvSpPr/>
+          <p:nvPr/>
+        </p:nvSpPr>
+        <p:spPr>
+          <a:xfrm>
+            <a:off x="9570720" y="3542984"/>
+            <a:ext cx="0" cy="146522"/>
+          </a:xfrm>
+          <a:custGeom>
+            <a:avLst/>
+            <a:gdLst/>
+            <a:ahLst/>
+            <a:cxnLst/>
+            <a:rect l="l" t="t" r="r" b="b"/>
+            <a:pathLst>
+              <a:path w="0" h="146522">
+                <a:moveTo>
+                  <a:pt x="0" y="146522"/>
+                </a:moveTo>
+                <a:lnTo>
+                  <a:pt x="0" y="132694"/>
+                </a:lnTo>
+                <a:lnTo>
+                  <a:pt x="0" y="119160"/>
+                </a:lnTo>
+                <a:lnTo>
+                  <a:pt x="0" y="105920"/>
+                </a:lnTo>
+                <a:lnTo>
+                  <a:pt x="0" y="92974"/>
+                </a:lnTo>
+                <a:lnTo>
+                  <a:pt x="0" y="80323"/>
+                </a:lnTo>
+                <a:lnTo>
+                  <a:pt x="0" y="67965"/>
+                </a:lnTo>
+                <a:lnTo>
+                  <a:pt x="0" y="55902"/>
+                </a:lnTo>
+                <a:lnTo>
+                  <a:pt x="0" y="44133"/>
+                </a:lnTo>
+                <a:lnTo>
+                  <a:pt x="0" y="32659"/>
+                </a:lnTo>
+                <a:lnTo>
+                  <a:pt x="0" y="21478"/>
+                </a:lnTo>
+                <a:lnTo>
+                  <a:pt x="0" y="10592"/>
+                </a:lnTo>
+                <a:lnTo>
+                  <a:pt x="0" y="0"/>
+                </a:lnTo>
+              </a:path>
+            </a:pathLst>
+          </a:custGeom>
+          <a:noFill/>
+          <a:ln w="18946">
+            <a:solidFill>
+              <a:srgbClr val="6B7280"/>
+            </a:solidFill>
+            <a:prstDash val="dash"/>
+          </a:ln>
+        </p:spPr>
+        <p:style>
+          <a:lnRef idx="1">
+            <a:schemeClr val="accent1"/>
+          </a:lnRef>
+          <a:fillRef idx="3">
+            <a:schemeClr val="accent1"/>
+          </a:fillRef>
+          <a:effectRef idx="2">
+            <a:schemeClr val="accent1"/>
+          </a:effectRef>
+          <a:fontRef idx="minor">
+            <a:schemeClr val="lt1"/>
+          </a:fontRef>
+        </p:style>
+        <p:txBody>
+          <a:bodyPr rtlCol="0" anchor="ctr"/>
+          <a:lstStyle/>
+          <a:p>
+            <a:pPr algn="ctr"/>
+          </a:p>
+        </p:txBody>
+      </p:sp>
+      <p:sp>
+        <p:nvSpPr>
+          <p:cNvPr id="60" name="Editable path 59"/>
+          <p:cNvSpPr/>
+          <p:nvPr/>
+        </p:nvSpPr>
+        <p:spPr>
+          <a:xfrm>
+            <a:off x="9537563" y="3542984"/>
+            <a:ext cx="66313" cy="66313"/>
+          </a:xfrm>
+          <a:custGeom>
+            <a:avLst/>
+            <a:gdLst/>
+            <a:ahLst/>
+            <a:cxnLst/>
+            <a:rect l="l" t="t" r="r" b="b"/>
+            <a:pathLst>
+              <a:path w="66313" h="66313">
+                <a:moveTo>
+                  <a:pt x="0" y="66313"/>
+                </a:moveTo>
+                <a:lnTo>
+                  <a:pt x="33157" y="0"/>
+                </a:lnTo>
+                <a:lnTo>
+                  <a:pt x="66313" y="66313"/>
+                </a:lnTo>
+                <a:lnTo>
+                  <a:pt x="0" y="66313"/>
+                </a:lnTo>
+                <a:close/>
+              </a:path>
+            </a:pathLst>
+          </a:custGeom>
+          <a:solidFill>
+            <a:srgbClr val="6B7280"/>
+          </a:solidFill>
+          <a:ln w="18946">
+            <a:solidFill>
+              <a:srgbClr val="6B7280"/>
+            </a:solidFill>
+            <a:prstDash val="dash"/>
+          </a:ln>
+        </p:spPr>
+        <p:style>
+          <a:lnRef idx="1">
+            <a:schemeClr val="accent1"/>
+          </a:lnRef>
+          <a:fillRef idx="3">
+            <a:schemeClr val="accent1"/>
+          </a:fillRef>
+          <a:effectRef idx="2">
+            <a:schemeClr val="accent1"/>
+          </a:effectRef>
+          <a:fontRef idx="minor">
+            <a:schemeClr val="lt1"/>
+          </a:fontRef>
+        </p:style>
+        <p:txBody>
+          <a:bodyPr rtlCol="0" anchor="ctr"/>
+          <a:lstStyle/>
+          <a:p>
+            <a:pPr algn="ctr"/>
+          </a:p>
+        </p:txBody>
+      </p:sp>
       <p:pic>
         <p:nvPicPr>
-          <p:cNvPr id="59" name="Picture 58" descr="image.png"/>
+          <p:cNvPr id="61" name="Picture 60" descr="image.png"/>
           <p:cNvPicPr>
             <a:picLocks noChangeAspect="1"/>
           </p:cNvPicPr>
@@ -10399,7 +9272,7 @@
       </p:pic>
       <p:pic>
         <p:nvPicPr>
-          <p:cNvPr id="60" name="Picture 59" descr="image.png"/>
+          <p:cNvPr id="62" name="Picture 61" descr="image.png"/>
           <p:cNvPicPr>
             <a:picLocks noChangeAspect="1"/>
           </p:cNvPicPr>
@@ -10423,7 +9296,7 @@
       </p:pic>
       <p:pic>
         <p:nvPicPr>
-          <p:cNvPr id="61" name="Picture 60" descr="image.png"/>
+          <p:cNvPr id="63" name="Picture 62" descr="image.png"/>
           <p:cNvPicPr>
             <a:picLocks noChangeAspect="1"/>
           </p:cNvPicPr>
@@ -10447,7 +9320,7 @@
       </p:pic>
       <p:pic>
         <p:nvPicPr>
-          <p:cNvPr id="62" name="Picture 61" descr="image.png"/>
+          <p:cNvPr id="64" name="Picture 63" descr="image.png"/>
           <p:cNvPicPr>
             <a:picLocks noChangeAspect="1"/>
           </p:cNvPicPr>
@@ -10471,7 +9344,7 @@
       </p:pic>
       <p:pic>
         <p:nvPicPr>
-          <p:cNvPr id="63" name="Picture 62" descr="image.png"/>
+          <p:cNvPr id="65" name="Picture 64" descr="image.png"/>
           <p:cNvPicPr>
             <a:picLocks noChangeAspect="1"/>
           </p:cNvPicPr>
@@ -10495,7 +9368,7 @@
       </p:pic>
       <p:pic>
         <p:nvPicPr>
-          <p:cNvPr id="64" name="Picture 63" descr="image.png"/>
+          <p:cNvPr id="66" name="Picture 65" descr="image.png"/>
           <p:cNvPicPr>
             <a:picLocks noChangeAspect="1"/>
           </p:cNvPicPr>
@@ -10517,9 +9390,3946 @@
           </a:prstGeom>
         </p:spPr>
       </p:pic>
+      <p:sp>
+        <p:nvSpPr>
+          <p:cNvPr id="67" name="Editable path 60"/>
+          <p:cNvSpPr/>
+          <p:nvPr/>
+        </p:nvSpPr>
+        <p:spPr>
+          <a:xfrm>
+            <a:off x="3532997" y="1738540"/>
+            <a:ext cx="68032" cy="273918"/>
+          </a:xfrm>
+          <a:custGeom>
+            <a:avLst/>
+            <a:gdLst/>
+            <a:ahLst/>
+            <a:cxnLst/>
+            <a:rect l="l" t="t" r="r" b="b"/>
+            <a:pathLst>
+              <a:path w="68032" h="273918">
+                <a:moveTo>
+                  <a:pt x="0" y="0"/>
+                </a:moveTo>
+                <a:lnTo>
+                  <a:pt x="68032" y="0"/>
+                </a:lnTo>
+                <a:lnTo>
+                  <a:pt x="68032" y="273918"/>
+                </a:lnTo>
+                <a:lnTo>
+                  <a:pt x="0" y="273918"/>
+                </a:lnTo>
+                <a:lnTo>
+                  <a:pt x="0" y="0"/>
+                </a:lnTo>
+                <a:close/>
+              </a:path>
+            </a:pathLst>
+          </a:custGeom>
+          <a:solidFill>
+            <a:srgbClr val="EEF0F3"/>
+          </a:solidFill>
+          <a:ln w="13025">
+            <a:solidFill>
+              <a:srgbClr val="6B7280"/>
+            </a:solidFill>
+          </a:ln>
+        </p:spPr>
+        <p:style>
+          <a:lnRef idx="1">
+            <a:schemeClr val="accent1"/>
+          </a:lnRef>
+          <a:fillRef idx="3">
+            <a:schemeClr val="accent1"/>
+          </a:fillRef>
+          <a:effectRef idx="2">
+            <a:schemeClr val="accent1"/>
+          </a:effectRef>
+          <a:fontRef idx="minor">
+            <a:schemeClr val="lt1"/>
+          </a:fontRef>
+        </p:style>
+        <p:txBody>
+          <a:bodyPr rtlCol="0" anchor="ctr"/>
+          <a:lstStyle/>
+          <a:p>
+            <a:pPr algn="ctr"/>
+          </a:p>
+        </p:txBody>
+      </p:sp>
+      <p:sp>
+        <p:nvSpPr>
+          <p:cNvPr id="68" name="Editable path 61"/>
+          <p:cNvSpPr/>
+          <p:nvPr/>
+        </p:nvSpPr>
+        <p:spPr>
+          <a:xfrm>
+            <a:off x="3532997" y="1229836"/>
+            <a:ext cx="68032" cy="247830"/>
+          </a:xfrm>
+          <a:custGeom>
+            <a:avLst/>
+            <a:gdLst/>
+            <a:ahLst/>
+            <a:cxnLst/>
+            <a:rect l="l" t="t" r="r" b="b"/>
+            <a:pathLst>
+              <a:path w="68032" h="247830">
+                <a:moveTo>
+                  <a:pt x="0" y="0"/>
+                </a:moveTo>
+                <a:lnTo>
+                  <a:pt x="68032" y="0"/>
+                </a:lnTo>
+                <a:lnTo>
+                  <a:pt x="68032" y="247830"/>
+                </a:lnTo>
+                <a:lnTo>
+                  <a:pt x="0" y="247830"/>
+                </a:lnTo>
+                <a:lnTo>
+                  <a:pt x="0" y="0"/>
+                </a:lnTo>
+                <a:close/>
+              </a:path>
+            </a:pathLst>
+          </a:custGeom>
+          <a:solidFill>
+            <a:srgbClr val="EEF0F3"/>
+          </a:solidFill>
+          <a:ln w="13025">
+            <a:solidFill>
+              <a:srgbClr val="6B7280"/>
+            </a:solidFill>
+          </a:ln>
+        </p:spPr>
+        <p:style>
+          <a:lnRef idx="1">
+            <a:schemeClr val="accent1"/>
+          </a:lnRef>
+          <a:fillRef idx="3">
+            <a:schemeClr val="accent1"/>
+          </a:fillRef>
+          <a:effectRef idx="2">
+            <a:schemeClr val="accent1"/>
+          </a:effectRef>
+          <a:fontRef idx="minor">
+            <a:schemeClr val="lt1"/>
+          </a:fontRef>
+        </p:style>
+        <p:txBody>
+          <a:bodyPr rtlCol="0" anchor="ctr"/>
+          <a:lstStyle/>
+          <a:p>
+            <a:pPr algn="ctr"/>
+          </a:p>
+        </p:txBody>
+      </p:sp>
+      <p:sp>
+        <p:nvSpPr>
+          <p:cNvPr id="69" name="Editable path 62"/>
+          <p:cNvSpPr/>
+          <p:nvPr/>
+        </p:nvSpPr>
+        <p:spPr>
+          <a:xfrm>
+            <a:off x="3124809" y="1621147"/>
+            <a:ext cx="385512" cy="260874"/>
+          </a:xfrm>
+          <a:custGeom>
+            <a:avLst/>
+            <a:gdLst/>
+            <a:ahLst/>
+            <a:cxnLst/>
+            <a:rect l="l" t="t" r="r" b="b"/>
+            <a:pathLst>
+              <a:path w="385512" h="260874">
+                <a:moveTo>
+                  <a:pt x="0" y="260874"/>
+                </a:moveTo>
+                <a:lnTo>
+                  <a:pt x="136063" y="130437"/>
+                </a:lnTo>
+                <a:lnTo>
+                  <a:pt x="260787" y="52175"/>
+                </a:lnTo>
+                <a:lnTo>
+                  <a:pt x="385512" y="0"/>
+                </a:lnTo>
+              </a:path>
+            </a:pathLst>
+          </a:custGeom>
+          <a:noFill/>
+          <a:ln w="28419">
+            <a:solidFill>
+              <a:srgbClr val="FF9500"/>
+            </a:solidFill>
+          </a:ln>
+        </p:spPr>
+        <p:style>
+          <a:lnRef idx="1">
+            <a:schemeClr val="accent1"/>
+          </a:lnRef>
+          <a:fillRef idx="3">
+            <a:schemeClr val="accent1"/>
+          </a:fillRef>
+          <a:effectRef idx="2">
+            <a:schemeClr val="accent1"/>
+          </a:effectRef>
+          <a:fontRef idx="minor">
+            <a:schemeClr val="lt1"/>
+          </a:fontRef>
+        </p:style>
+        <p:txBody>
+          <a:bodyPr rtlCol="0" anchor="ctr"/>
+          <a:lstStyle/>
+          <a:p>
+            <a:pPr algn="ctr"/>
+          </a:p>
+        </p:txBody>
+      </p:sp>
+      <p:sp>
+        <p:nvSpPr>
+          <p:cNvPr id="70" name="Editable path 63"/>
+          <p:cNvSpPr/>
+          <p:nvPr/>
+        </p:nvSpPr>
+        <p:spPr>
+          <a:xfrm>
+            <a:off x="3101126" y="1858338"/>
+            <a:ext cx="47366" cy="47366"/>
+          </a:xfrm>
+          <a:custGeom>
+            <a:avLst/>
+            <a:gdLst/>
+            <a:ahLst/>
+            <a:cxnLst/>
+            <a:rect l="l" t="t" r="r" b="b"/>
+            <a:pathLst>
+              <a:path w="47366" h="47366">
+                <a:moveTo>
+                  <a:pt x="23683" y="47366"/>
+                </a:moveTo>
+                <a:lnTo>
+                  <a:pt x="25247" y="47314"/>
+                </a:lnTo>
+                <a:lnTo>
+                  <a:pt x="26796" y="47161"/>
+                </a:lnTo>
+                <a:lnTo>
+                  <a:pt x="28325" y="46907"/>
+                </a:lnTo>
+                <a:lnTo>
+                  <a:pt x="29829" y="46554"/>
+                </a:lnTo>
+                <a:lnTo>
+                  <a:pt x="31305" y="46106"/>
+                </a:lnTo>
+                <a:lnTo>
+                  <a:pt x="32746" y="45563"/>
+                </a:lnTo>
+                <a:lnTo>
+                  <a:pt x="34150" y="44928"/>
+                </a:lnTo>
+                <a:lnTo>
+                  <a:pt x="35510" y="44202"/>
+                </a:lnTo>
+                <a:lnTo>
+                  <a:pt x="36823" y="43387"/>
+                </a:lnTo>
+                <a:lnTo>
+                  <a:pt x="38083" y="42485"/>
+                </a:lnTo>
+                <a:lnTo>
+                  <a:pt x="39287" y="41499"/>
+                </a:lnTo>
+                <a:lnTo>
+                  <a:pt x="40430" y="40429"/>
+                </a:lnTo>
+                <a:lnTo>
+                  <a:pt x="41499" y="39287"/>
+                </a:lnTo>
+                <a:lnTo>
+                  <a:pt x="42486" y="38083"/>
+                </a:lnTo>
+                <a:lnTo>
+                  <a:pt x="43387" y="36822"/>
+                </a:lnTo>
+                <a:lnTo>
+                  <a:pt x="44202" y="35510"/>
+                </a:lnTo>
+                <a:lnTo>
+                  <a:pt x="44928" y="34149"/>
+                </a:lnTo>
+                <a:lnTo>
+                  <a:pt x="45564" y="32746"/>
+                </a:lnTo>
+                <a:lnTo>
+                  <a:pt x="46106" y="31304"/>
+                </a:lnTo>
+                <a:lnTo>
+                  <a:pt x="46555" y="29829"/>
+                </a:lnTo>
+                <a:lnTo>
+                  <a:pt x="46907" y="28325"/>
+                </a:lnTo>
+                <a:lnTo>
+                  <a:pt x="47161" y="26796"/>
+                </a:lnTo>
+                <a:lnTo>
+                  <a:pt x="47315" y="25247"/>
+                </a:lnTo>
+                <a:lnTo>
+                  <a:pt x="47366" y="23683"/>
+                </a:lnTo>
+                <a:lnTo>
+                  <a:pt x="47315" y="22119"/>
+                </a:lnTo>
+                <a:lnTo>
+                  <a:pt x="47161" y="20570"/>
+                </a:lnTo>
+                <a:lnTo>
+                  <a:pt x="46907" y="19041"/>
+                </a:lnTo>
+                <a:lnTo>
+                  <a:pt x="46555" y="17537"/>
+                </a:lnTo>
+                <a:lnTo>
+                  <a:pt x="46106" y="16061"/>
+                </a:lnTo>
+                <a:lnTo>
+                  <a:pt x="45564" y="14620"/>
+                </a:lnTo>
+                <a:lnTo>
+                  <a:pt x="44928" y="13217"/>
+                </a:lnTo>
+                <a:lnTo>
+                  <a:pt x="44202" y="11856"/>
+                </a:lnTo>
+                <a:lnTo>
+                  <a:pt x="43387" y="10544"/>
+                </a:lnTo>
+                <a:lnTo>
+                  <a:pt x="42486" y="9283"/>
+                </a:lnTo>
+                <a:lnTo>
+                  <a:pt x="41499" y="8079"/>
+                </a:lnTo>
+                <a:lnTo>
+                  <a:pt x="40430" y="6937"/>
+                </a:lnTo>
+                <a:lnTo>
+                  <a:pt x="39287" y="5867"/>
+                </a:lnTo>
+                <a:lnTo>
+                  <a:pt x="38083" y="4881"/>
+                </a:lnTo>
+                <a:lnTo>
+                  <a:pt x="36823" y="3979"/>
+                </a:lnTo>
+                <a:lnTo>
+                  <a:pt x="35510" y="3164"/>
+                </a:lnTo>
+                <a:lnTo>
+                  <a:pt x="34150" y="2438"/>
+                </a:lnTo>
+                <a:lnTo>
+                  <a:pt x="32746" y="1803"/>
+                </a:lnTo>
+                <a:lnTo>
+                  <a:pt x="31305" y="1260"/>
+                </a:lnTo>
+                <a:lnTo>
+                  <a:pt x="29829" y="811"/>
+                </a:lnTo>
+                <a:lnTo>
+                  <a:pt x="28325" y="459"/>
+                </a:lnTo>
+                <a:lnTo>
+                  <a:pt x="26796" y="205"/>
+                </a:lnTo>
+                <a:lnTo>
+                  <a:pt x="25247" y="52"/>
+                </a:lnTo>
+                <a:lnTo>
+                  <a:pt x="23683" y="0"/>
+                </a:lnTo>
+                <a:lnTo>
+                  <a:pt x="22119" y="52"/>
+                </a:lnTo>
+                <a:lnTo>
+                  <a:pt x="20571" y="205"/>
+                </a:lnTo>
+                <a:lnTo>
+                  <a:pt x="19042" y="459"/>
+                </a:lnTo>
+                <a:lnTo>
+                  <a:pt x="17537" y="811"/>
+                </a:lnTo>
+                <a:lnTo>
+                  <a:pt x="16062" y="1260"/>
+                </a:lnTo>
+                <a:lnTo>
+                  <a:pt x="14620" y="1803"/>
+                </a:lnTo>
+                <a:lnTo>
+                  <a:pt x="13217" y="2438"/>
+                </a:lnTo>
+                <a:lnTo>
+                  <a:pt x="11857" y="3164"/>
+                </a:lnTo>
+                <a:lnTo>
+                  <a:pt x="10544" y="3979"/>
+                </a:lnTo>
+                <a:lnTo>
+                  <a:pt x="9283" y="4881"/>
+                </a:lnTo>
+                <a:lnTo>
+                  <a:pt x="8079" y="5867"/>
+                </a:lnTo>
+                <a:lnTo>
+                  <a:pt x="6937" y="6937"/>
+                </a:lnTo>
+                <a:lnTo>
+                  <a:pt x="5867" y="8079"/>
+                </a:lnTo>
+                <a:lnTo>
+                  <a:pt x="4881" y="9283"/>
+                </a:lnTo>
+                <a:lnTo>
+                  <a:pt x="3979" y="10544"/>
+                </a:lnTo>
+                <a:lnTo>
+                  <a:pt x="3165" y="11856"/>
+                </a:lnTo>
+                <a:lnTo>
+                  <a:pt x="2439" y="13217"/>
+                </a:lnTo>
+                <a:lnTo>
+                  <a:pt x="1803" y="14620"/>
+                </a:lnTo>
+                <a:lnTo>
+                  <a:pt x="1260" y="16061"/>
+                </a:lnTo>
+                <a:lnTo>
+                  <a:pt x="812" y="17537"/>
+                </a:lnTo>
+                <a:lnTo>
+                  <a:pt x="460" y="19041"/>
+                </a:lnTo>
+                <a:lnTo>
+                  <a:pt x="206" y="20570"/>
+                </a:lnTo>
+                <a:lnTo>
+                  <a:pt x="52" y="22119"/>
+                </a:lnTo>
+                <a:lnTo>
+                  <a:pt x="0" y="23683"/>
+                </a:lnTo>
+                <a:lnTo>
+                  <a:pt x="52" y="25247"/>
+                </a:lnTo>
+                <a:lnTo>
+                  <a:pt x="206" y="26796"/>
+                </a:lnTo>
+                <a:lnTo>
+                  <a:pt x="460" y="28325"/>
+                </a:lnTo>
+                <a:lnTo>
+                  <a:pt x="812" y="29829"/>
+                </a:lnTo>
+                <a:lnTo>
+                  <a:pt x="1260" y="31304"/>
+                </a:lnTo>
+                <a:lnTo>
+                  <a:pt x="1803" y="32746"/>
+                </a:lnTo>
+                <a:lnTo>
+                  <a:pt x="2439" y="34149"/>
+                </a:lnTo>
+                <a:lnTo>
+                  <a:pt x="3165" y="35510"/>
+                </a:lnTo>
+                <a:lnTo>
+                  <a:pt x="3979" y="36822"/>
+                </a:lnTo>
+                <a:lnTo>
+                  <a:pt x="4881" y="38083"/>
+                </a:lnTo>
+                <a:lnTo>
+                  <a:pt x="5867" y="39287"/>
+                </a:lnTo>
+                <a:lnTo>
+                  <a:pt x="6937" y="40429"/>
+                </a:lnTo>
+                <a:lnTo>
+                  <a:pt x="8079" y="41499"/>
+                </a:lnTo>
+                <a:lnTo>
+                  <a:pt x="9283" y="42485"/>
+                </a:lnTo>
+                <a:lnTo>
+                  <a:pt x="10544" y="43387"/>
+                </a:lnTo>
+                <a:lnTo>
+                  <a:pt x="11857" y="44202"/>
+                </a:lnTo>
+                <a:lnTo>
+                  <a:pt x="13217" y="44928"/>
+                </a:lnTo>
+                <a:lnTo>
+                  <a:pt x="14620" y="45563"/>
+                </a:lnTo>
+                <a:lnTo>
+                  <a:pt x="16062" y="46106"/>
+                </a:lnTo>
+                <a:lnTo>
+                  <a:pt x="17537" y="46554"/>
+                </a:lnTo>
+                <a:lnTo>
+                  <a:pt x="19042" y="46907"/>
+                </a:lnTo>
+                <a:lnTo>
+                  <a:pt x="20571" y="47161"/>
+                </a:lnTo>
+                <a:lnTo>
+                  <a:pt x="22119" y="47314"/>
+                </a:lnTo>
+                <a:lnTo>
+                  <a:pt x="23683" y="47366"/>
+                </a:lnTo>
+                <a:close/>
+              </a:path>
+            </a:pathLst>
+          </a:custGeom>
+          <a:solidFill>
+            <a:srgbClr val="FF9500"/>
+          </a:solidFill>
+          <a:ln w="23682">
+            <a:solidFill>
+              <a:srgbClr val="FF9500"/>
+            </a:solidFill>
+          </a:ln>
+        </p:spPr>
+        <p:style>
+          <a:lnRef idx="1">
+            <a:schemeClr val="accent1"/>
+          </a:lnRef>
+          <a:fillRef idx="3">
+            <a:schemeClr val="accent1"/>
+          </a:fillRef>
+          <a:effectRef idx="2">
+            <a:schemeClr val="accent1"/>
+          </a:effectRef>
+          <a:fontRef idx="minor">
+            <a:schemeClr val="lt1"/>
+          </a:fontRef>
+        </p:style>
+        <p:txBody>
+          <a:bodyPr rtlCol="0" anchor="ctr"/>
+          <a:lstStyle/>
+          <a:p>
+            <a:pPr algn="ctr"/>
+          </a:p>
+        </p:txBody>
+      </p:sp>
+      <p:sp>
+        <p:nvSpPr>
+          <p:cNvPr id="71" name="Editable path 64"/>
+          <p:cNvSpPr/>
+          <p:nvPr/>
+        </p:nvSpPr>
+        <p:spPr>
+          <a:xfrm>
+            <a:off x="3237189" y="1727901"/>
+            <a:ext cx="47366" cy="47366"/>
+          </a:xfrm>
+          <a:custGeom>
+            <a:avLst/>
+            <a:gdLst/>
+            <a:ahLst/>
+            <a:cxnLst/>
+            <a:rect l="l" t="t" r="r" b="b"/>
+            <a:pathLst>
+              <a:path w="47366" h="47366">
+                <a:moveTo>
+                  <a:pt x="23683" y="47366"/>
+                </a:moveTo>
+                <a:lnTo>
+                  <a:pt x="25247" y="47314"/>
+                </a:lnTo>
+                <a:lnTo>
+                  <a:pt x="26796" y="47160"/>
+                </a:lnTo>
+                <a:lnTo>
+                  <a:pt x="28325" y="46907"/>
+                </a:lnTo>
+                <a:lnTo>
+                  <a:pt x="29829" y="46554"/>
+                </a:lnTo>
+                <a:lnTo>
+                  <a:pt x="31304" y="46106"/>
+                </a:lnTo>
+                <a:lnTo>
+                  <a:pt x="32746" y="45563"/>
+                </a:lnTo>
+                <a:lnTo>
+                  <a:pt x="34149" y="44928"/>
+                </a:lnTo>
+                <a:lnTo>
+                  <a:pt x="35510" y="44201"/>
+                </a:lnTo>
+                <a:lnTo>
+                  <a:pt x="36822" y="43387"/>
+                </a:lnTo>
+                <a:lnTo>
+                  <a:pt x="38083" y="42485"/>
+                </a:lnTo>
+                <a:lnTo>
+                  <a:pt x="39287" y="41499"/>
+                </a:lnTo>
+                <a:lnTo>
+                  <a:pt x="40429" y="40429"/>
+                </a:lnTo>
+                <a:lnTo>
+                  <a:pt x="41499" y="39287"/>
+                </a:lnTo>
+                <a:lnTo>
+                  <a:pt x="42485" y="38083"/>
+                </a:lnTo>
+                <a:lnTo>
+                  <a:pt x="43387" y="36822"/>
+                </a:lnTo>
+                <a:lnTo>
+                  <a:pt x="44202" y="35509"/>
+                </a:lnTo>
+                <a:lnTo>
+                  <a:pt x="44928" y="34149"/>
+                </a:lnTo>
+                <a:lnTo>
+                  <a:pt x="45563" y="32746"/>
+                </a:lnTo>
+                <a:lnTo>
+                  <a:pt x="46106" y="31304"/>
+                </a:lnTo>
+                <a:lnTo>
+                  <a:pt x="46555" y="29829"/>
+                </a:lnTo>
+                <a:lnTo>
+                  <a:pt x="46907" y="28325"/>
+                </a:lnTo>
+                <a:lnTo>
+                  <a:pt x="47161" y="26796"/>
+                </a:lnTo>
+                <a:lnTo>
+                  <a:pt x="47314" y="25247"/>
+                </a:lnTo>
+                <a:lnTo>
+                  <a:pt x="47366" y="23683"/>
+                </a:lnTo>
+                <a:lnTo>
+                  <a:pt x="47314" y="22119"/>
+                </a:lnTo>
+                <a:lnTo>
+                  <a:pt x="47161" y="20570"/>
+                </a:lnTo>
+                <a:lnTo>
+                  <a:pt x="46907" y="19041"/>
+                </a:lnTo>
+                <a:lnTo>
+                  <a:pt x="46555" y="17537"/>
+                </a:lnTo>
+                <a:lnTo>
+                  <a:pt x="46106" y="16061"/>
+                </a:lnTo>
+                <a:lnTo>
+                  <a:pt x="45563" y="14620"/>
+                </a:lnTo>
+                <a:lnTo>
+                  <a:pt x="44928" y="13217"/>
+                </a:lnTo>
+                <a:lnTo>
+                  <a:pt x="44202" y="11856"/>
+                </a:lnTo>
+                <a:lnTo>
+                  <a:pt x="43387" y="10544"/>
+                </a:lnTo>
+                <a:lnTo>
+                  <a:pt x="42485" y="9283"/>
+                </a:lnTo>
+                <a:lnTo>
+                  <a:pt x="41499" y="8079"/>
+                </a:lnTo>
+                <a:lnTo>
+                  <a:pt x="40429" y="6936"/>
+                </a:lnTo>
+                <a:lnTo>
+                  <a:pt x="39287" y="5867"/>
+                </a:lnTo>
+                <a:lnTo>
+                  <a:pt x="38083" y="4881"/>
+                </a:lnTo>
+                <a:lnTo>
+                  <a:pt x="36822" y="3979"/>
+                </a:lnTo>
+                <a:lnTo>
+                  <a:pt x="35510" y="3164"/>
+                </a:lnTo>
+                <a:lnTo>
+                  <a:pt x="34149" y="2438"/>
+                </a:lnTo>
+                <a:lnTo>
+                  <a:pt x="32746" y="1803"/>
+                </a:lnTo>
+                <a:lnTo>
+                  <a:pt x="31304" y="1260"/>
+                </a:lnTo>
+                <a:lnTo>
+                  <a:pt x="29829" y="811"/>
+                </a:lnTo>
+                <a:lnTo>
+                  <a:pt x="28325" y="459"/>
+                </a:lnTo>
+                <a:lnTo>
+                  <a:pt x="26796" y="205"/>
+                </a:lnTo>
+                <a:lnTo>
+                  <a:pt x="25247" y="52"/>
+                </a:lnTo>
+                <a:lnTo>
+                  <a:pt x="23683" y="0"/>
+                </a:lnTo>
+                <a:lnTo>
+                  <a:pt x="22119" y="52"/>
+                </a:lnTo>
+                <a:lnTo>
+                  <a:pt x="20570" y="205"/>
+                </a:lnTo>
+                <a:lnTo>
+                  <a:pt x="19041" y="459"/>
+                </a:lnTo>
+                <a:lnTo>
+                  <a:pt x="17537" y="811"/>
+                </a:lnTo>
+                <a:lnTo>
+                  <a:pt x="16062" y="1260"/>
+                </a:lnTo>
+                <a:lnTo>
+                  <a:pt x="14620" y="1803"/>
+                </a:lnTo>
+                <a:lnTo>
+                  <a:pt x="13217" y="2438"/>
+                </a:lnTo>
+                <a:lnTo>
+                  <a:pt x="11856" y="3164"/>
+                </a:lnTo>
+                <a:lnTo>
+                  <a:pt x="10544" y="3979"/>
+                </a:lnTo>
+                <a:lnTo>
+                  <a:pt x="9283" y="4881"/>
+                </a:lnTo>
+                <a:lnTo>
+                  <a:pt x="8079" y="5867"/>
+                </a:lnTo>
+                <a:lnTo>
+                  <a:pt x="6937" y="6936"/>
+                </a:lnTo>
+                <a:lnTo>
+                  <a:pt x="5867" y="8079"/>
+                </a:lnTo>
+                <a:lnTo>
+                  <a:pt x="4881" y="9283"/>
+                </a:lnTo>
+                <a:lnTo>
+                  <a:pt x="3979" y="10544"/>
+                </a:lnTo>
+                <a:lnTo>
+                  <a:pt x="3164" y="11856"/>
+                </a:lnTo>
+                <a:lnTo>
+                  <a:pt x="2438" y="13217"/>
+                </a:lnTo>
+                <a:lnTo>
+                  <a:pt x="1803" y="14620"/>
+                </a:lnTo>
+                <a:lnTo>
+                  <a:pt x="1260" y="16061"/>
+                </a:lnTo>
+                <a:lnTo>
+                  <a:pt x="811" y="17537"/>
+                </a:lnTo>
+                <a:lnTo>
+                  <a:pt x="459" y="19041"/>
+                </a:lnTo>
+                <a:lnTo>
+                  <a:pt x="205" y="20570"/>
+                </a:lnTo>
+                <a:lnTo>
+                  <a:pt x="52" y="22119"/>
+                </a:lnTo>
+                <a:lnTo>
+                  <a:pt x="0" y="23683"/>
+                </a:lnTo>
+                <a:lnTo>
+                  <a:pt x="52" y="25247"/>
+                </a:lnTo>
+                <a:lnTo>
+                  <a:pt x="205" y="26796"/>
+                </a:lnTo>
+                <a:lnTo>
+                  <a:pt x="459" y="28325"/>
+                </a:lnTo>
+                <a:lnTo>
+                  <a:pt x="811" y="29829"/>
+                </a:lnTo>
+                <a:lnTo>
+                  <a:pt x="1260" y="31304"/>
+                </a:lnTo>
+                <a:lnTo>
+                  <a:pt x="1803" y="32746"/>
+                </a:lnTo>
+                <a:lnTo>
+                  <a:pt x="2438" y="34149"/>
+                </a:lnTo>
+                <a:lnTo>
+                  <a:pt x="3164" y="35509"/>
+                </a:lnTo>
+                <a:lnTo>
+                  <a:pt x="3979" y="36822"/>
+                </a:lnTo>
+                <a:lnTo>
+                  <a:pt x="4881" y="38083"/>
+                </a:lnTo>
+                <a:lnTo>
+                  <a:pt x="5867" y="39287"/>
+                </a:lnTo>
+                <a:lnTo>
+                  <a:pt x="6937" y="40429"/>
+                </a:lnTo>
+                <a:lnTo>
+                  <a:pt x="8079" y="41499"/>
+                </a:lnTo>
+                <a:lnTo>
+                  <a:pt x="9283" y="42485"/>
+                </a:lnTo>
+                <a:lnTo>
+                  <a:pt x="10544" y="43387"/>
+                </a:lnTo>
+                <a:lnTo>
+                  <a:pt x="11856" y="44201"/>
+                </a:lnTo>
+                <a:lnTo>
+                  <a:pt x="13217" y="44928"/>
+                </a:lnTo>
+                <a:lnTo>
+                  <a:pt x="14620" y="45563"/>
+                </a:lnTo>
+                <a:lnTo>
+                  <a:pt x="16062" y="46106"/>
+                </a:lnTo>
+                <a:lnTo>
+                  <a:pt x="17537" y="46554"/>
+                </a:lnTo>
+                <a:lnTo>
+                  <a:pt x="19041" y="46907"/>
+                </a:lnTo>
+                <a:lnTo>
+                  <a:pt x="20570" y="47160"/>
+                </a:lnTo>
+                <a:lnTo>
+                  <a:pt x="22119" y="47314"/>
+                </a:lnTo>
+                <a:lnTo>
+                  <a:pt x="23683" y="47366"/>
+                </a:lnTo>
+                <a:close/>
+              </a:path>
+            </a:pathLst>
+          </a:custGeom>
+          <a:solidFill>
+            <a:srgbClr val="FF9500"/>
+          </a:solidFill>
+          <a:ln w="23682">
+            <a:solidFill>
+              <a:srgbClr val="FF9500"/>
+            </a:solidFill>
+          </a:ln>
+        </p:spPr>
+        <p:style>
+          <a:lnRef idx="1">
+            <a:schemeClr val="accent1"/>
+          </a:lnRef>
+          <a:fillRef idx="3">
+            <a:schemeClr val="accent1"/>
+          </a:fillRef>
+          <a:effectRef idx="2">
+            <a:schemeClr val="accent1"/>
+          </a:effectRef>
+          <a:fontRef idx="minor">
+            <a:schemeClr val="lt1"/>
+          </a:fontRef>
+        </p:style>
+        <p:txBody>
+          <a:bodyPr rtlCol="0" anchor="ctr"/>
+          <a:lstStyle/>
+          <a:p>
+            <a:pPr algn="ctr"/>
+          </a:p>
+        </p:txBody>
+      </p:sp>
+      <p:sp>
+        <p:nvSpPr>
+          <p:cNvPr id="72" name="Editable path 65"/>
+          <p:cNvSpPr/>
+          <p:nvPr/>
+        </p:nvSpPr>
+        <p:spPr>
+          <a:xfrm>
+            <a:off x="3361913" y="1649639"/>
+            <a:ext cx="47366" cy="47366"/>
+          </a:xfrm>
+          <a:custGeom>
+            <a:avLst/>
+            <a:gdLst/>
+            <a:ahLst/>
+            <a:cxnLst/>
+            <a:rect l="l" t="t" r="r" b="b"/>
+            <a:pathLst>
+              <a:path w="47366" h="47366">
+                <a:moveTo>
+                  <a:pt x="23683" y="47366"/>
+                </a:moveTo>
+                <a:lnTo>
+                  <a:pt x="25247" y="47314"/>
+                </a:lnTo>
+                <a:lnTo>
+                  <a:pt x="26796" y="47160"/>
+                </a:lnTo>
+                <a:lnTo>
+                  <a:pt x="28325" y="46906"/>
+                </a:lnTo>
+                <a:lnTo>
+                  <a:pt x="29829" y="46554"/>
+                </a:lnTo>
+                <a:lnTo>
+                  <a:pt x="31304" y="46106"/>
+                </a:lnTo>
+                <a:lnTo>
+                  <a:pt x="32746" y="45563"/>
+                </a:lnTo>
+                <a:lnTo>
+                  <a:pt x="34149" y="44927"/>
+                </a:lnTo>
+                <a:lnTo>
+                  <a:pt x="35510" y="44201"/>
+                </a:lnTo>
+                <a:lnTo>
+                  <a:pt x="36822" y="43386"/>
+                </a:lnTo>
+                <a:lnTo>
+                  <a:pt x="38083" y="42485"/>
+                </a:lnTo>
+                <a:lnTo>
+                  <a:pt x="39287" y="41498"/>
+                </a:lnTo>
+                <a:lnTo>
+                  <a:pt x="40429" y="40429"/>
+                </a:lnTo>
+                <a:lnTo>
+                  <a:pt x="41499" y="39286"/>
+                </a:lnTo>
+                <a:lnTo>
+                  <a:pt x="42485" y="38083"/>
+                </a:lnTo>
+                <a:lnTo>
+                  <a:pt x="43387" y="36822"/>
+                </a:lnTo>
+                <a:lnTo>
+                  <a:pt x="44202" y="35509"/>
+                </a:lnTo>
+                <a:lnTo>
+                  <a:pt x="44928" y="34149"/>
+                </a:lnTo>
+                <a:lnTo>
+                  <a:pt x="45563" y="32746"/>
+                </a:lnTo>
+                <a:lnTo>
+                  <a:pt x="46106" y="31304"/>
+                </a:lnTo>
+                <a:lnTo>
+                  <a:pt x="46555" y="29829"/>
+                </a:lnTo>
+                <a:lnTo>
+                  <a:pt x="46907" y="28324"/>
+                </a:lnTo>
+                <a:lnTo>
+                  <a:pt x="47161" y="26795"/>
+                </a:lnTo>
+                <a:lnTo>
+                  <a:pt x="47314" y="25247"/>
+                </a:lnTo>
+                <a:lnTo>
+                  <a:pt x="47366" y="23683"/>
+                </a:lnTo>
+                <a:lnTo>
+                  <a:pt x="47314" y="22118"/>
+                </a:lnTo>
+                <a:lnTo>
+                  <a:pt x="47161" y="20570"/>
+                </a:lnTo>
+                <a:lnTo>
+                  <a:pt x="46907" y="19041"/>
+                </a:lnTo>
+                <a:lnTo>
+                  <a:pt x="46555" y="17536"/>
+                </a:lnTo>
+                <a:lnTo>
+                  <a:pt x="46106" y="16061"/>
+                </a:lnTo>
+                <a:lnTo>
+                  <a:pt x="45563" y="14620"/>
+                </a:lnTo>
+                <a:lnTo>
+                  <a:pt x="44928" y="13216"/>
+                </a:lnTo>
+                <a:lnTo>
+                  <a:pt x="44202" y="11856"/>
+                </a:lnTo>
+                <a:lnTo>
+                  <a:pt x="43387" y="10543"/>
+                </a:lnTo>
+                <a:lnTo>
+                  <a:pt x="42485" y="9283"/>
+                </a:lnTo>
+                <a:lnTo>
+                  <a:pt x="41499" y="8079"/>
+                </a:lnTo>
+                <a:lnTo>
+                  <a:pt x="40429" y="6936"/>
+                </a:lnTo>
+                <a:lnTo>
+                  <a:pt x="39287" y="5867"/>
+                </a:lnTo>
+                <a:lnTo>
+                  <a:pt x="38083" y="4880"/>
+                </a:lnTo>
+                <a:lnTo>
+                  <a:pt x="36822" y="3979"/>
+                </a:lnTo>
+                <a:lnTo>
+                  <a:pt x="35510" y="3164"/>
+                </a:lnTo>
+                <a:lnTo>
+                  <a:pt x="34149" y="2438"/>
+                </a:lnTo>
+                <a:lnTo>
+                  <a:pt x="32746" y="1802"/>
+                </a:lnTo>
+                <a:lnTo>
+                  <a:pt x="31304" y="1260"/>
+                </a:lnTo>
+                <a:lnTo>
+                  <a:pt x="29829" y="811"/>
+                </a:lnTo>
+                <a:lnTo>
+                  <a:pt x="28325" y="459"/>
+                </a:lnTo>
+                <a:lnTo>
+                  <a:pt x="26796" y="205"/>
+                </a:lnTo>
+                <a:lnTo>
+                  <a:pt x="25247" y="51"/>
+                </a:lnTo>
+                <a:lnTo>
+                  <a:pt x="23683" y="0"/>
+                </a:lnTo>
+                <a:lnTo>
+                  <a:pt x="22119" y="51"/>
+                </a:lnTo>
+                <a:lnTo>
+                  <a:pt x="20570" y="205"/>
+                </a:lnTo>
+                <a:lnTo>
+                  <a:pt x="19041" y="459"/>
+                </a:lnTo>
+                <a:lnTo>
+                  <a:pt x="17537" y="811"/>
+                </a:lnTo>
+                <a:lnTo>
+                  <a:pt x="16062" y="1260"/>
+                </a:lnTo>
+                <a:lnTo>
+                  <a:pt x="14620" y="1802"/>
+                </a:lnTo>
+                <a:lnTo>
+                  <a:pt x="13217" y="2438"/>
+                </a:lnTo>
+                <a:lnTo>
+                  <a:pt x="11857" y="3164"/>
+                </a:lnTo>
+                <a:lnTo>
+                  <a:pt x="10544" y="3979"/>
+                </a:lnTo>
+                <a:lnTo>
+                  <a:pt x="9283" y="4880"/>
+                </a:lnTo>
+                <a:lnTo>
+                  <a:pt x="8079" y="5867"/>
+                </a:lnTo>
+                <a:lnTo>
+                  <a:pt x="6937" y="6936"/>
+                </a:lnTo>
+                <a:lnTo>
+                  <a:pt x="5867" y="8079"/>
+                </a:lnTo>
+                <a:lnTo>
+                  <a:pt x="4881" y="9283"/>
+                </a:lnTo>
+                <a:lnTo>
+                  <a:pt x="3979" y="10543"/>
+                </a:lnTo>
+                <a:lnTo>
+                  <a:pt x="3164" y="11856"/>
+                </a:lnTo>
+                <a:lnTo>
+                  <a:pt x="2438" y="13216"/>
+                </a:lnTo>
+                <a:lnTo>
+                  <a:pt x="1803" y="14620"/>
+                </a:lnTo>
+                <a:lnTo>
+                  <a:pt x="1260" y="16061"/>
+                </a:lnTo>
+                <a:lnTo>
+                  <a:pt x="812" y="17536"/>
+                </a:lnTo>
+                <a:lnTo>
+                  <a:pt x="459" y="19041"/>
+                </a:lnTo>
+                <a:lnTo>
+                  <a:pt x="205" y="20570"/>
+                </a:lnTo>
+                <a:lnTo>
+                  <a:pt x="52" y="22118"/>
+                </a:lnTo>
+                <a:lnTo>
+                  <a:pt x="0" y="23683"/>
+                </a:lnTo>
+                <a:lnTo>
+                  <a:pt x="52" y="25247"/>
+                </a:lnTo>
+                <a:lnTo>
+                  <a:pt x="205" y="26795"/>
+                </a:lnTo>
+                <a:lnTo>
+                  <a:pt x="459" y="28324"/>
+                </a:lnTo>
+                <a:lnTo>
+                  <a:pt x="812" y="29829"/>
+                </a:lnTo>
+                <a:lnTo>
+                  <a:pt x="1260" y="31304"/>
+                </a:lnTo>
+                <a:lnTo>
+                  <a:pt x="1803" y="32746"/>
+                </a:lnTo>
+                <a:lnTo>
+                  <a:pt x="2438" y="34149"/>
+                </a:lnTo>
+                <a:lnTo>
+                  <a:pt x="3164" y="35509"/>
+                </a:lnTo>
+                <a:lnTo>
+                  <a:pt x="3979" y="36822"/>
+                </a:lnTo>
+                <a:lnTo>
+                  <a:pt x="4881" y="38083"/>
+                </a:lnTo>
+                <a:lnTo>
+                  <a:pt x="5867" y="39286"/>
+                </a:lnTo>
+                <a:lnTo>
+                  <a:pt x="6937" y="40429"/>
+                </a:lnTo>
+                <a:lnTo>
+                  <a:pt x="8079" y="41498"/>
+                </a:lnTo>
+                <a:lnTo>
+                  <a:pt x="9283" y="42485"/>
+                </a:lnTo>
+                <a:lnTo>
+                  <a:pt x="10544" y="43386"/>
+                </a:lnTo>
+                <a:lnTo>
+                  <a:pt x="11857" y="44201"/>
+                </a:lnTo>
+                <a:lnTo>
+                  <a:pt x="13217" y="44927"/>
+                </a:lnTo>
+                <a:lnTo>
+                  <a:pt x="14620" y="45563"/>
+                </a:lnTo>
+                <a:lnTo>
+                  <a:pt x="16062" y="46106"/>
+                </a:lnTo>
+                <a:lnTo>
+                  <a:pt x="17537" y="46554"/>
+                </a:lnTo>
+                <a:lnTo>
+                  <a:pt x="19041" y="46906"/>
+                </a:lnTo>
+                <a:lnTo>
+                  <a:pt x="20570" y="47160"/>
+                </a:lnTo>
+                <a:lnTo>
+                  <a:pt x="22119" y="47314"/>
+                </a:lnTo>
+                <a:lnTo>
+                  <a:pt x="23683" y="47366"/>
+                </a:lnTo>
+                <a:close/>
+              </a:path>
+            </a:pathLst>
+          </a:custGeom>
+          <a:solidFill>
+            <a:srgbClr val="FF9500"/>
+          </a:solidFill>
+          <a:ln w="23682">
+            <a:solidFill>
+              <a:srgbClr val="FF9500"/>
+            </a:solidFill>
+          </a:ln>
+        </p:spPr>
+        <p:style>
+          <a:lnRef idx="1">
+            <a:schemeClr val="accent1"/>
+          </a:lnRef>
+          <a:fillRef idx="3">
+            <a:schemeClr val="accent1"/>
+          </a:fillRef>
+          <a:effectRef idx="2">
+            <a:schemeClr val="accent1"/>
+          </a:effectRef>
+          <a:fontRef idx="minor">
+            <a:schemeClr val="lt1"/>
+          </a:fontRef>
+        </p:style>
+        <p:txBody>
+          <a:bodyPr rtlCol="0" anchor="ctr"/>
+          <a:lstStyle/>
+          <a:p>
+            <a:pPr algn="ctr"/>
+          </a:p>
+        </p:txBody>
+      </p:sp>
+      <p:sp>
+        <p:nvSpPr>
+          <p:cNvPr id="73" name="Editable path 66"/>
+          <p:cNvSpPr/>
+          <p:nvPr/>
+        </p:nvSpPr>
+        <p:spPr>
+          <a:xfrm>
+            <a:off x="3486637" y="1597464"/>
+            <a:ext cx="47366" cy="47366"/>
+          </a:xfrm>
+          <a:custGeom>
+            <a:avLst/>
+            <a:gdLst/>
+            <a:ahLst/>
+            <a:cxnLst/>
+            <a:rect l="l" t="t" r="r" b="b"/>
+            <a:pathLst>
+              <a:path w="47366" h="47366">
+                <a:moveTo>
+                  <a:pt x="23683" y="47366"/>
+                </a:moveTo>
+                <a:lnTo>
+                  <a:pt x="25247" y="47314"/>
+                </a:lnTo>
+                <a:lnTo>
+                  <a:pt x="26796" y="47160"/>
+                </a:lnTo>
+                <a:lnTo>
+                  <a:pt x="28325" y="46906"/>
+                </a:lnTo>
+                <a:lnTo>
+                  <a:pt x="29829" y="46554"/>
+                </a:lnTo>
+                <a:lnTo>
+                  <a:pt x="31305" y="46106"/>
+                </a:lnTo>
+                <a:lnTo>
+                  <a:pt x="32746" y="45563"/>
+                </a:lnTo>
+                <a:lnTo>
+                  <a:pt x="34149" y="44927"/>
+                </a:lnTo>
+                <a:lnTo>
+                  <a:pt x="35510" y="44201"/>
+                </a:lnTo>
+                <a:lnTo>
+                  <a:pt x="36823" y="43387"/>
+                </a:lnTo>
+                <a:lnTo>
+                  <a:pt x="38083" y="42485"/>
+                </a:lnTo>
+                <a:lnTo>
+                  <a:pt x="39287" y="41499"/>
+                </a:lnTo>
+                <a:lnTo>
+                  <a:pt x="40430" y="40429"/>
+                </a:lnTo>
+                <a:lnTo>
+                  <a:pt x="41499" y="39287"/>
+                </a:lnTo>
+                <a:lnTo>
+                  <a:pt x="42486" y="38083"/>
+                </a:lnTo>
+                <a:lnTo>
+                  <a:pt x="43387" y="36822"/>
+                </a:lnTo>
+                <a:lnTo>
+                  <a:pt x="44202" y="35509"/>
+                </a:lnTo>
+                <a:lnTo>
+                  <a:pt x="44928" y="34149"/>
+                </a:lnTo>
+                <a:lnTo>
+                  <a:pt x="45563" y="32746"/>
+                </a:lnTo>
+                <a:lnTo>
+                  <a:pt x="46106" y="31304"/>
+                </a:lnTo>
+                <a:lnTo>
+                  <a:pt x="46555" y="29829"/>
+                </a:lnTo>
+                <a:lnTo>
+                  <a:pt x="46907" y="28325"/>
+                </a:lnTo>
+                <a:lnTo>
+                  <a:pt x="47161" y="26796"/>
+                </a:lnTo>
+                <a:lnTo>
+                  <a:pt x="47315" y="25247"/>
+                </a:lnTo>
+                <a:lnTo>
+                  <a:pt x="47366" y="23683"/>
+                </a:lnTo>
+                <a:lnTo>
+                  <a:pt x="47315" y="22119"/>
+                </a:lnTo>
+                <a:lnTo>
+                  <a:pt x="47161" y="20570"/>
+                </a:lnTo>
+                <a:lnTo>
+                  <a:pt x="46907" y="19041"/>
+                </a:lnTo>
+                <a:lnTo>
+                  <a:pt x="46555" y="17537"/>
+                </a:lnTo>
+                <a:lnTo>
+                  <a:pt x="46106" y="16061"/>
+                </a:lnTo>
+                <a:lnTo>
+                  <a:pt x="45563" y="14620"/>
+                </a:lnTo>
+                <a:lnTo>
+                  <a:pt x="44928" y="13217"/>
+                </a:lnTo>
+                <a:lnTo>
+                  <a:pt x="44202" y="11856"/>
+                </a:lnTo>
+                <a:lnTo>
+                  <a:pt x="43387" y="10543"/>
+                </a:lnTo>
+                <a:lnTo>
+                  <a:pt x="42486" y="9283"/>
+                </a:lnTo>
+                <a:lnTo>
+                  <a:pt x="41499" y="8079"/>
+                </a:lnTo>
+                <a:lnTo>
+                  <a:pt x="40430" y="6936"/>
+                </a:lnTo>
+                <a:lnTo>
+                  <a:pt x="39287" y="5867"/>
+                </a:lnTo>
+                <a:lnTo>
+                  <a:pt x="38083" y="4881"/>
+                </a:lnTo>
+                <a:lnTo>
+                  <a:pt x="36823" y="3979"/>
+                </a:lnTo>
+                <a:lnTo>
+                  <a:pt x="35510" y="3164"/>
+                </a:lnTo>
+                <a:lnTo>
+                  <a:pt x="34149" y="2438"/>
+                </a:lnTo>
+                <a:lnTo>
+                  <a:pt x="32746" y="1803"/>
+                </a:lnTo>
+                <a:lnTo>
+                  <a:pt x="31305" y="1260"/>
+                </a:lnTo>
+                <a:lnTo>
+                  <a:pt x="29829" y="811"/>
+                </a:lnTo>
+                <a:lnTo>
+                  <a:pt x="28325" y="459"/>
+                </a:lnTo>
+                <a:lnTo>
+                  <a:pt x="26796" y="205"/>
+                </a:lnTo>
+                <a:lnTo>
+                  <a:pt x="25247" y="51"/>
+                </a:lnTo>
+                <a:lnTo>
+                  <a:pt x="23683" y="0"/>
+                </a:lnTo>
+                <a:lnTo>
+                  <a:pt x="22119" y="51"/>
+                </a:lnTo>
+                <a:lnTo>
+                  <a:pt x="20570" y="205"/>
+                </a:lnTo>
+                <a:lnTo>
+                  <a:pt x="19041" y="459"/>
+                </a:lnTo>
+                <a:lnTo>
+                  <a:pt x="17537" y="811"/>
+                </a:lnTo>
+                <a:lnTo>
+                  <a:pt x="16062" y="1260"/>
+                </a:lnTo>
+                <a:lnTo>
+                  <a:pt x="14620" y="1803"/>
+                </a:lnTo>
+                <a:lnTo>
+                  <a:pt x="13217" y="2438"/>
+                </a:lnTo>
+                <a:lnTo>
+                  <a:pt x="11857" y="3164"/>
+                </a:lnTo>
+                <a:lnTo>
+                  <a:pt x="10544" y="3979"/>
+                </a:lnTo>
+                <a:lnTo>
+                  <a:pt x="9283" y="4881"/>
+                </a:lnTo>
+                <a:lnTo>
+                  <a:pt x="8079" y="5867"/>
+                </a:lnTo>
+                <a:lnTo>
+                  <a:pt x="6937" y="6936"/>
+                </a:lnTo>
+                <a:lnTo>
+                  <a:pt x="5867" y="8079"/>
+                </a:lnTo>
+                <a:lnTo>
+                  <a:pt x="4881" y="9283"/>
+                </a:lnTo>
+                <a:lnTo>
+                  <a:pt x="3979" y="10543"/>
+                </a:lnTo>
+                <a:lnTo>
+                  <a:pt x="3165" y="11856"/>
+                </a:lnTo>
+                <a:lnTo>
+                  <a:pt x="2438" y="13217"/>
+                </a:lnTo>
+                <a:lnTo>
+                  <a:pt x="1803" y="14620"/>
+                </a:lnTo>
+                <a:lnTo>
+                  <a:pt x="1260" y="16061"/>
+                </a:lnTo>
+                <a:lnTo>
+                  <a:pt x="812" y="17537"/>
+                </a:lnTo>
+                <a:lnTo>
+                  <a:pt x="460" y="19041"/>
+                </a:lnTo>
+                <a:lnTo>
+                  <a:pt x="206" y="20570"/>
+                </a:lnTo>
+                <a:lnTo>
+                  <a:pt x="52" y="22119"/>
+                </a:lnTo>
+                <a:lnTo>
+                  <a:pt x="0" y="23683"/>
+                </a:lnTo>
+                <a:lnTo>
+                  <a:pt x="52" y="25247"/>
+                </a:lnTo>
+                <a:lnTo>
+                  <a:pt x="206" y="26796"/>
+                </a:lnTo>
+                <a:lnTo>
+                  <a:pt x="460" y="28325"/>
+                </a:lnTo>
+                <a:lnTo>
+                  <a:pt x="812" y="29829"/>
+                </a:lnTo>
+                <a:lnTo>
+                  <a:pt x="1260" y="31304"/>
+                </a:lnTo>
+                <a:lnTo>
+                  <a:pt x="1803" y="32746"/>
+                </a:lnTo>
+                <a:lnTo>
+                  <a:pt x="2438" y="34149"/>
+                </a:lnTo>
+                <a:lnTo>
+                  <a:pt x="3165" y="35509"/>
+                </a:lnTo>
+                <a:lnTo>
+                  <a:pt x="3979" y="36822"/>
+                </a:lnTo>
+                <a:lnTo>
+                  <a:pt x="4881" y="38083"/>
+                </a:lnTo>
+                <a:lnTo>
+                  <a:pt x="5867" y="39287"/>
+                </a:lnTo>
+                <a:lnTo>
+                  <a:pt x="6937" y="40429"/>
+                </a:lnTo>
+                <a:lnTo>
+                  <a:pt x="8079" y="41499"/>
+                </a:lnTo>
+                <a:lnTo>
+                  <a:pt x="9283" y="42485"/>
+                </a:lnTo>
+                <a:lnTo>
+                  <a:pt x="10544" y="43387"/>
+                </a:lnTo>
+                <a:lnTo>
+                  <a:pt x="11857" y="44201"/>
+                </a:lnTo>
+                <a:lnTo>
+                  <a:pt x="13217" y="44927"/>
+                </a:lnTo>
+                <a:lnTo>
+                  <a:pt x="14620" y="45563"/>
+                </a:lnTo>
+                <a:lnTo>
+                  <a:pt x="16062" y="46106"/>
+                </a:lnTo>
+                <a:lnTo>
+                  <a:pt x="17537" y="46554"/>
+                </a:lnTo>
+                <a:lnTo>
+                  <a:pt x="19041" y="46906"/>
+                </a:lnTo>
+                <a:lnTo>
+                  <a:pt x="20570" y="47160"/>
+                </a:lnTo>
+                <a:lnTo>
+                  <a:pt x="22119" y="47314"/>
+                </a:lnTo>
+                <a:lnTo>
+                  <a:pt x="23683" y="47366"/>
+                </a:lnTo>
+                <a:close/>
+              </a:path>
+            </a:pathLst>
+          </a:custGeom>
+          <a:solidFill>
+            <a:srgbClr val="FF9500"/>
+          </a:solidFill>
+          <a:ln w="23682">
+            <a:solidFill>
+              <a:srgbClr val="FF9500"/>
+            </a:solidFill>
+          </a:ln>
+        </p:spPr>
+        <p:style>
+          <a:lnRef idx="1">
+            <a:schemeClr val="accent1"/>
+          </a:lnRef>
+          <a:fillRef idx="3">
+            <a:schemeClr val="accent1"/>
+          </a:fillRef>
+          <a:effectRef idx="2">
+            <a:schemeClr val="accent1"/>
+          </a:effectRef>
+          <a:fontRef idx="minor">
+            <a:schemeClr val="lt1"/>
+          </a:fontRef>
+        </p:style>
+        <p:txBody>
+          <a:bodyPr rtlCol="0" anchor="ctr"/>
+          <a:lstStyle/>
+          <a:p>
+            <a:pPr algn="ctr"/>
+          </a:p>
+        </p:txBody>
+      </p:sp>
+      <p:sp>
+        <p:nvSpPr>
+          <p:cNvPr id="74" name="Editable path 67"/>
+          <p:cNvSpPr/>
+          <p:nvPr/>
+        </p:nvSpPr>
+        <p:spPr>
+          <a:xfrm>
+            <a:off x="3215518" y="1595059"/>
+            <a:ext cx="45354" cy="156525"/>
+          </a:xfrm>
+          <a:custGeom>
+            <a:avLst/>
+            <a:gdLst/>
+            <a:ahLst/>
+            <a:cxnLst/>
+            <a:rect l="l" t="t" r="r" b="b"/>
+            <a:pathLst>
+              <a:path w="45354" h="156525">
+                <a:moveTo>
+                  <a:pt x="45354" y="156525"/>
+                </a:moveTo>
+                <a:lnTo>
+                  <a:pt x="0" y="0"/>
+                </a:lnTo>
+              </a:path>
+            </a:pathLst>
+          </a:custGeom>
+          <a:noFill/>
+          <a:ln w="14209">
+            <a:solidFill>
+              <a:srgbClr val="FF9500"/>
+            </a:solidFill>
+          </a:ln>
+        </p:spPr>
+        <p:style>
+          <a:lnRef idx="1">
+            <a:schemeClr val="accent1"/>
+          </a:lnRef>
+          <a:fillRef idx="3">
+            <a:schemeClr val="accent1"/>
+          </a:fillRef>
+          <a:effectRef idx="2">
+            <a:schemeClr val="accent1"/>
+          </a:effectRef>
+          <a:fontRef idx="minor">
+            <a:schemeClr val="lt1"/>
+          </a:fontRef>
+        </p:style>
+        <p:txBody>
+          <a:bodyPr rtlCol="0" anchor="ctr"/>
+          <a:lstStyle/>
+          <a:p>
+            <a:pPr algn="ctr"/>
+          </a:p>
+        </p:txBody>
+      </p:sp>
+      <p:sp>
+        <p:nvSpPr>
+          <p:cNvPr id="75" name="Editable path 68"/>
+          <p:cNvSpPr/>
+          <p:nvPr/>
+        </p:nvSpPr>
+        <p:spPr>
+          <a:xfrm>
+            <a:off x="3340242" y="1673322"/>
+            <a:ext cx="45354" cy="156524"/>
+          </a:xfrm>
+          <a:custGeom>
+            <a:avLst/>
+            <a:gdLst/>
+            <a:ahLst/>
+            <a:cxnLst/>
+            <a:rect l="l" t="t" r="r" b="b"/>
+            <a:pathLst>
+              <a:path w="45354" h="156524">
+                <a:moveTo>
+                  <a:pt x="45354" y="0"/>
+                </a:moveTo>
+                <a:lnTo>
+                  <a:pt x="0" y="156524"/>
+                </a:lnTo>
+              </a:path>
+            </a:pathLst>
+          </a:custGeom>
+          <a:noFill/>
+          <a:ln w="14209">
+            <a:solidFill>
+              <a:srgbClr val="FF9500"/>
+            </a:solidFill>
+          </a:ln>
+        </p:spPr>
+        <p:style>
+          <a:lnRef idx="1">
+            <a:schemeClr val="accent1"/>
+          </a:lnRef>
+          <a:fillRef idx="3">
+            <a:schemeClr val="accent1"/>
+          </a:fillRef>
+          <a:effectRef idx="2">
+            <a:schemeClr val="accent1"/>
+          </a:effectRef>
+          <a:fontRef idx="minor">
+            <a:schemeClr val="lt1"/>
+          </a:fontRef>
+        </p:style>
+        <p:txBody>
+          <a:bodyPr rtlCol="0" anchor="ctr"/>
+          <a:lstStyle/>
+          <a:p>
+            <a:pPr algn="ctr"/>
+          </a:p>
+        </p:txBody>
+      </p:sp>
+      <p:sp>
+        <p:nvSpPr>
+          <p:cNvPr id="76" name="Editable path 69"/>
+          <p:cNvSpPr/>
+          <p:nvPr/>
+        </p:nvSpPr>
+        <p:spPr>
+          <a:xfrm>
+            <a:off x="3623706" y="1360273"/>
+            <a:ext cx="408188" cy="260874"/>
+          </a:xfrm>
+          <a:custGeom>
+            <a:avLst/>
+            <a:gdLst/>
+            <a:ahLst/>
+            <a:cxnLst/>
+            <a:rect l="l" t="t" r="r" b="b"/>
+            <a:pathLst>
+              <a:path w="408188" h="260874">
+                <a:moveTo>
+                  <a:pt x="408188" y="0"/>
+                </a:moveTo>
+                <a:lnTo>
+                  <a:pt x="272125" y="130437"/>
+                </a:lnTo>
+                <a:lnTo>
+                  <a:pt x="124724" y="234786"/>
+                </a:lnTo>
+                <a:lnTo>
+                  <a:pt x="0" y="260874"/>
+                </a:lnTo>
+              </a:path>
+            </a:pathLst>
+          </a:custGeom>
+          <a:noFill/>
+          <a:ln w="28419">
+            <a:solidFill>
+              <a:srgbClr val="0ABAB5"/>
+            </a:solidFill>
+          </a:ln>
+        </p:spPr>
+        <p:style>
+          <a:lnRef idx="1">
+            <a:schemeClr val="accent1"/>
+          </a:lnRef>
+          <a:fillRef idx="3">
+            <a:schemeClr val="accent1"/>
+          </a:fillRef>
+          <a:effectRef idx="2">
+            <a:schemeClr val="accent1"/>
+          </a:effectRef>
+          <a:fontRef idx="minor">
+            <a:schemeClr val="lt1"/>
+          </a:fontRef>
+        </p:style>
+        <p:txBody>
+          <a:bodyPr rtlCol="0" anchor="ctr"/>
+          <a:lstStyle/>
+          <a:p>
+            <a:pPr algn="ctr"/>
+          </a:p>
+        </p:txBody>
+      </p:sp>
+      <p:sp>
+        <p:nvSpPr>
+          <p:cNvPr id="77" name="Editable path 70"/>
+          <p:cNvSpPr/>
+          <p:nvPr/>
+        </p:nvSpPr>
+        <p:spPr>
+          <a:xfrm>
+            <a:off x="4008211" y="1336590"/>
+            <a:ext cx="47366" cy="47366"/>
+          </a:xfrm>
+          <a:custGeom>
+            <a:avLst/>
+            <a:gdLst/>
+            <a:ahLst/>
+            <a:cxnLst/>
+            <a:rect l="l" t="t" r="r" b="b"/>
+            <a:pathLst>
+              <a:path w="47366" h="47366">
+                <a:moveTo>
+                  <a:pt x="23683" y="47366"/>
+                </a:moveTo>
+                <a:lnTo>
+                  <a:pt x="25247" y="47314"/>
+                </a:lnTo>
+                <a:lnTo>
+                  <a:pt x="26796" y="47160"/>
+                </a:lnTo>
+                <a:lnTo>
+                  <a:pt x="28325" y="46906"/>
+                </a:lnTo>
+                <a:lnTo>
+                  <a:pt x="29829" y="46554"/>
+                </a:lnTo>
+                <a:lnTo>
+                  <a:pt x="31304" y="46106"/>
+                </a:lnTo>
+                <a:lnTo>
+                  <a:pt x="32746" y="45563"/>
+                </a:lnTo>
+                <a:lnTo>
+                  <a:pt x="34149" y="44927"/>
+                </a:lnTo>
+                <a:lnTo>
+                  <a:pt x="35510" y="44201"/>
+                </a:lnTo>
+                <a:lnTo>
+                  <a:pt x="36822" y="43386"/>
+                </a:lnTo>
+                <a:lnTo>
+                  <a:pt x="38083" y="42485"/>
+                </a:lnTo>
+                <a:lnTo>
+                  <a:pt x="39287" y="41498"/>
+                </a:lnTo>
+                <a:lnTo>
+                  <a:pt x="40429" y="40429"/>
+                </a:lnTo>
+                <a:lnTo>
+                  <a:pt x="41499" y="39287"/>
+                </a:lnTo>
+                <a:lnTo>
+                  <a:pt x="42485" y="38083"/>
+                </a:lnTo>
+                <a:lnTo>
+                  <a:pt x="43387" y="36822"/>
+                </a:lnTo>
+                <a:lnTo>
+                  <a:pt x="44202" y="35509"/>
+                </a:lnTo>
+                <a:lnTo>
+                  <a:pt x="44928" y="34149"/>
+                </a:lnTo>
+                <a:lnTo>
+                  <a:pt x="45563" y="32746"/>
+                </a:lnTo>
+                <a:lnTo>
+                  <a:pt x="46106" y="31304"/>
+                </a:lnTo>
+                <a:lnTo>
+                  <a:pt x="46555" y="29829"/>
+                </a:lnTo>
+                <a:lnTo>
+                  <a:pt x="46907" y="28324"/>
+                </a:lnTo>
+                <a:lnTo>
+                  <a:pt x="47161" y="26795"/>
+                </a:lnTo>
+                <a:lnTo>
+                  <a:pt x="47314" y="25247"/>
+                </a:lnTo>
+                <a:lnTo>
+                  <a:pt x="47366" y="23683"/>
+                </a:lnTo>
+                <a:lnTo>
+                  <a:pt x="47314" y="22119"/>
+                </a:lnTo>
+                <a:lnTo>
+                  <a:pt x="47161" y="20570"/>
+                </a:lnTo>
+                <a:lnTo>
+                  <a:pt x="46907" y="19041"/>
+                </a:lnTo>
+                <a:lnTo>
+                  <a:pt x="46555" y="17536"/>
+                </a:lnTo>
+                <a:lnTo>
+                  <a:pt x="46106" y="16061"/>
+                </a:lnTo>
+                <a:lnTo>
+                  <a:pt x="45563" y="14620"/>
+                </a:lnTo>
+                <a:lnTo>
+                  <a:pt x="44928" y="13216"/>
+                </a:lnTo>
+                <a:lnTo>
+                  <a:pt x="44202" y="11856"/>
+                </a:lnTo>
+                <a:lnTo>
+                  <a:pt x="43387" y="10543"/>
+                </a:lnTo>
+                <a:lnTo>
+                  <a:pt x="42485" y="9283"/>
+                </a:lnTo>
+                <a:lnTo>
+                  <a:pt x="41499" y="8079"/>
+                </a:lnTo>
+                <a:lnTo>
+                  <a:pt x="40429" y="6936"/>
+                </a:lnTo>
+                <a:lnTo>
+                  <a:pt x="39287" y="5867"/>
+                </a:lnTo>
+                <a:lnTo>
+                  <a:pt x="38083" y="4880"/>
+                </a:lnTo>
+                <a:lnTo>
+                  <a:pt x="36822" y="3979"/>
+                </a:lnTo>
+                <a:lnTo>
+                  <a:pt x="35510" y="3164"/>
+                </a:lnTo>
+                <a:lnTo>
+                  <a:pt x="34149" y="2438"/>
+                </a:lnTo>
+                <a:lnTo>
+                  <a:pt x="32746" y="1802"/>
+                </a:lnTo>
+                <a:lnTo>
+                  <a:pt x="31304" y="1260"/>
+                </a:lnTo>
+                <a:lnTo>
+                  <a:pt x="29829" y="811"/>
+                </a:lnTo>
+                <a:lnTo>
+                  <a:pt x="28325" y="459"/>
+                </a:lnTo>
+                <a:lnTo>
+                  <a:pt x="26796" y="205"/>
+                </a:lnTo>
+                <a:lnTo>
+                  <a:pt x="25247" y="51"/>
+                </a:lnTo>
+                <a:lnTo>
+                  <a:pt x="23683" y="0"/>
+                </a:lnTo>
+                <a:lnTo>
+                  <a:pt x="22119" y="51"/>
+                </a:lnTo>
+                <a:lnTo>
+                  <a:pt x="20570" y="205"/>
+                </a:lnTo>
+                <a:lnTo>
+                  <a:pt x="19041" y="459"/>
+                </a:lnTo>
+                <a:lnTo>
+                  <a:pt x="17537" y="811"/>
+                </a:lnTo>
+                <a:lnTo>
+                  <a:pt x="16062" y="1260"/>
+                </a:lnTo>
+                <a:lnTo>
+                  <a:pt x="14620" y="1802"/>
+                </a:lnTo>
+                <a:lnTo>
+                  <a:pt x="13217" y="2438"/>
+                </a:lnTo>
+                <a:lnTo>
+                  <a:pt x="11856" y="3164"/>
+                </a:lnTo>
+                <a:lnTo>
+                  <a:pt x="10544" y="3979"/>
+                </a:lnTo>
+                <a:lnTo>
+                  <a:pt x="9283" y="4880"/>
+                </a:lnTo>
+                <a:lnTo>
+                  <a:pt x="8079" y="5867"/>
+                </a:lnTo>
+                <a:lnTo>
+                  <a:pt x="6937" y="6936"/>
+                </a:lnTo>
+                <a:lnTo>
+                  <a:pt x="5867" y="8079"/>
+                </a:lnTo>
+                <a:lnTo>
+                  <a:pt x="4881" y="9283"/>
+                </a:lnTo>
+                <a:lnTo>
+                  <a:pt x="3979" y="10543"/>
+                </a:lnTo>
+                <a:lnTo>
+                  <a:pt x="3164" y="11856"/>
+                </a:lnTo>
+                <a:lnTo>
+                  <a:pt x="2438" y="13216"/>
+                </a:lnTo>
+                <a:lnTo>
+                  <a:pt x="1803" y="14620"/>
+                </a:lnTo>
+                <a:lnTo>
+                  <a:pt x="1260" y="16061"/>
+                </a:lnTo>
+                <a:lnTo>
+                  <a:pt x="811" y="17536"/>
+                </a:lnTo>
+                <a:lnTo>
+                  <a:pt x="459" y="19041"/>
+                </a:lnTo>
+                <a:lnTo>
+                  <a:pt x="205" y="20570"/>
+                </a:lnTo>
+                <a:lnTo>
+                  <a:pt x="52" y="22119"/>
+                </a:lnTo>
+                <a:lnTo>
+                  <a:pt x="0" y="23683"/>
+                </a:lnTo>
+                <a:lnTo>
+                  <a:pt x="52" y="25247"/>
+                </a:lnTo>
+                <a:lnTo>
+                  <a:pt x="205" y="26795"/>
+                </a:lnTo>
+                <a:lnTo>
+                  <a:pt x="459" y="28324"/>
+                </a:lnTo>
+                <a:lnTo>
+                  <a:pt x="811" y="29829"/>
+                </a:lnTo>
+                <a:lnTo>
+                  <a:pt x="1260" y="31304"/>
+                </a:lnTo>
+                <a:lnTo>
+                  <a:pt x="1803" y="32746"/>
+                </a:lnTo>
+                <a:lnTo>
+                  <a:pt x="2438" y="34149"/>
+                </a:lnTo>
+                <a:lnTo>
+                  <a:pt x="3164" y="35509"/>
+                </a:lnTo>
+                <a:lnTo>
+                  <a:pt x="3979" y="36822"/>
+                </a:lnTo>
+                <a:lnTo>
+                  <a:pt x="4881" y="38083"/>
+                </a:lnTo>
+                <a:lnTo>
+                  <a:pt x="5867" y="39287"/>
+                </a:lnTo>
+                <a:lnTo>
+                  <a:pt x="6937" y="40429"/>
+                </a:lnTo>
+                <a:lnTo>
+                  <a:pt x="8079" y="41498"/>
+                </a:lnTo>
+                <a:lnTo>
+                  <a:pt x="9283" y="42485"/>
+                </a:lnTo>
+                <a:lnTo>
+                  <a:pt x="10544" y="43386"/>
+                </a:lnTo>
+                <a:lnTo>
+                  <a:pt x="11856" y="44201"/>
+                </a:lnTo>
+                <a:lnTo>
+                  <a:pt x="13217" y="44927"/>
+                </a:lnTo>
+                <a:lnTo>
+                  <a:pt x="14620" y="45563"/>
+                </a:lnTo>
+                <a:lnTo>
+                  <a:pt x="16062" y="46106"/>
+                </a:lnTo>
+                <a:lnTo>
+                  <a:pt x="17537" y="46554"/>
+                </a:lnTo>
+                <a:lnTo>
+                  <a:pt x="19041" y="46906"/>
+                </a:lnTo>
+                <a:lnTo>
+                  <a:pt x="20570" y="47160"/>
+                </a:lnTo>
+                <a:lnTo>
+                  <a:pt x="22119" y="47314"/>
+                </a:lnTo>
+                <a:lnTo>
+                  <a:pt x="23683" y="47366"/>
+                </a:lnTo>
+                <a:close/>
+              </a:path>
+            </a:pathLst>
+          </a:custGeom>
+          <a:solidFill>
+            <a:srgbClr val="0ABAB5"/>
+          </a:solidFill>
+          <a:ln w="23682">
+            <a:solidFill>
+              <a:srgbClr val="0ABAB5"/>
+            </a:solidFill>
+          </a:ln>
+        </p:spPr>
+        <p:style>
+          <a:lnRef idx="1">
+            <a:schemeClr val="accent1"/>
+          </a:lnRef>
+          <a:fillRef idx="3">
+            <a:schemeClr val="accent1"/>
+          </a:fillRef>
+          <a:effectRef idx="2">
+            <a:schemeClr val="accent1"/>
+          </a:effectRef>
+          <a:fontRef idx="minor">
+            <a:schemeClr val="lt1"/>
+          </a:fontRef>
+        </p:style>
+        <p:txBody>
+          <a:bodyPr rtlCol="0" anchor="ctr"/>
+          <a:lstStyle/>
+          <a:p>
+            <a:pPr algn="ctr"/>
+          </a:p>
+        </p:txBody>
+      </p:sp>
+      <p:sp>
+        <p:nvSpPr>
+          <p:cNvPr id="78" name="Editable path 71"/>
+          <p:cNvSpPr/>
+          <p:nvPr/>
+        </p:nvSpPr>
+        <p:spPr>
+          <a:xfrm>
+            <a:off x="3872148" y="1467027"/>
+            <a:ext cx="47366" cy="47366"/>
+          </a:xfrm>
+          <a:custGeom>
+            <a:avLst/>
+            <a:gdLst/>
+            <a:ahLst/>
+            <a:cxnLst/>
+            <a:rect l="l" t="t" r="r" b="b"/>
+            <a:pathLst>
+              <a:path w="47366" h="47366">
+                <a:moveTo>
+                  <a:pt x="23683" y="47366"/>
+                </a:moveTo>
+                <a:lnTo>
+                  <a:pt x="25247" y="47314"/>
+                </a:lnTo>
+                <a:lnTo>
+                  <a:pt x="26796" y="47160"/>
+                </a:lnTo>
+                <a:lnTo>
+                  <a:pt x="28325" y="46906"/>
+                </a:lnTo>
+                <a:lnTo>
+                  <a:pt x="29830" y="46554"/>
+                </a:lnTo>
+                <a:lnTo>
+                  <a:pt x="31305" y="46106"/>
+                </a:lnTo>
+                <a:lnTo>
+                  <a:pt x="32746" y="45563"/>
+                </a:lnTo>
+                <a:lnTo>
+                  <a:pt x="34150" y="44927"/>
+                </a:lnTo>
+                <a:lnTo>
+                  <a:pt x="35510" y="44201"/>
+                </a:lnTo>
+                <a:lnTo>
+                  <a:pt x="36823" y="43387"/>
+                </a:lnTo>
+                <a:lnTo>
+                  <a:pt x="38083" y="42485"/>
+                </a:lnTo>
+                <a:lnTo>
+                  <a:pt x="39287" y="41499"/>
+                </a:lnTo>
+                <a:lnTo>
+                  <a:pt x="40430" y="40429"/>
+                </a:lnTo>
+                <a:lnTo>
+                  <a:pt x="41499" y="39287"/>
+                </a:lnTo>
+                <a:lnTo>
+                  <a:pt x="42486" y="38083"/>
+                </a:lnTo>
+                <a:lnTo>
+                  <a:pt x="43387" y="36822"/>
+                </a:lnTo>
+                <a:lnTo>
+                  <a:pt x="44202" y="35509"/>
+                </a:lnTo>
+                <a:lnTo>
+                  <a:pt x="44928" y="34149"/>
+                </a:lnTo>
+                <a:lnTo>
+                  <a:pt x="45564" y="32746"/>
+                </a:lnTo>
+                <a:lnTo>
+                  <a:pt x="46107" y="31304"/>
+                </a:lnTo>
+                <a:lnTo>
+                  <a:pt x="46555" y="29829"/>
+                </a:lnTo>
+                <a:lnTo>
+                  <a:pt x="46907" y="28324"/>
+                </a:lnTo>
+                <a:lnTo>
+                  <a:pt x="47161" y="26796"/>
+                </a:lnTo>
+                <a:lnTo>
+                  <a:pt x="47315" y="25247"/>
+                </a:lnTo>
+                <a:lnTo>
+                  <a:pt x="47366" y="23683"/>
+                </a:lnTo>
+                <a:lnTo>
+                  <a:pt x="47315" y="22119"/>
+                </a:lnTo>
+                <a:lnTo>
+                  <a:pt x="47161" y="20570"/>
+                </a:lnTo>
+                <a:lnTo>
+                  <a:pt x="46907" y="19041"/>
+                </a:lnTo>
+                <a:lnTo>
+                  <a:pt x="46555" y="17537"/>
+                </a:lnTo>
+                <a:lnTo>
+                  <a:pt x="46107" y="16061"/>
+                </a:lnTo>
+                <a:lnTo>
+                  <a:pt x="45564" y="14620"/>
+                </a:lnTo>
+                <a:lnTo>
+                  <a:pt x="44928" y="13216"/>
+                </a:lnTo>
+                <a:lnTo>
+                  <a:pt x="44202" y="11856"/>
+                </a:lnTo>
+                <a:lnTo>
+                  <a:pt x="43387" y="10543"/>
+                </a:lnTo>
+                <a:lnTo>
+                  <a:pt x="42486" y="9283"/>
+                </a:lnTo>
+                <a:lnTo>
+                  <a:pt x="41499" y="8079"/>
+                </a:lnTo>
+                <a:lnTo>
+                  <a:pt x="40430" y="6936"/>
+                </a:lnTo>
+                <a:lnTo>
+                  <a:pt x="39287" y="5867"/>
+                </a:lnTo>
+                <a:lnTo>
+                  <a:pt x="38083" y="4880"/>
+                </a:lnTo>
+                <a:lnTo>
+                  <a:pt x="36823" y="3979"/>
+                </a:lnTo>
+                <a:lnTo>
+                  <a:pt x="35510" y="3164"/>
+                </a:lnTo>
+                <a:lnTo>
+                  <a:pt x="34150" y="2438"/>
+                </a:lnTo>
+                <a:lnTo>
+                  <a:pt x="32746" y="1803"/>
+                </a:lnTo>
+                <a:lnTo>
+                  <a:pt x="31305" y="1260"/>
+                </a:lnTo>
+                <a:lnTo>
+                  <a:pt x="29830" y="811"/>
+                </a:lnTo>
+                <a:lnTo>
+                  <a:pt x="28325" y="459"/>
+                </a:lnTo>
+                <a:lnTo>
+                  <a:pt x="26796" y="205"/>
+                </a:lnTo>
+                <a:lnTo>
+                  <a:pt x="25247" y="51"/>
+                </a:lnTo>
+                <a:lnTo>
+                  <a:pt x="23683" y="0"/>
+                </a:lnTo>
+                <a:lnTo>
+                  <a:pt x="22119" y="51"/>
+                </a:lnTo>
+                <a:lnTo>
+                  <a:pt x="20571" y="205"/>
+                </a:lnTo>
+                <a:lnTo>
+                  <a:pt x="19042" y="459"/>
+                </a:lnTo>
+                <a:lnTo>
+                  <a:pt x="17537" y="811"/>
+                </a:lnTo>
+                <a:lnTo>
+                  <a:pt x="16062" y="1260"/>
+                </a:lnTo>
+                <a:lnTo>
+                  <a:pt x="14620" y="1803"/>
+                </a:lnTo>
+                <a:lnTo>
+                  <a:pt x="13217" y="2438"/>
+                </a:lnTo>
+                <a:lnTo>
+                  <a:pt x="11857" y="3164"/>
+                </a:lnTo>
+                <a:lnTo>
+                  <a:pt x="10544" y="3979"/>
+                </a:lnTo>
+                <a:lnTo>
+                  <a:pt x="9283" y="4880"/>
+                </a:lnTo>
+                <a:lnTo>
+                  <a:pt x="8080" y="5867"/>
+                </a:lnTo>
+                <a:lnTo>
+                  <a:pt x="6937" y="6936"/>
+                </a:lnTo>
+                <a:lnTo>
+                  <a:pt x="5868" y="8079"/>
+                </a:lnTo>
+                <a:lnTo>
+                  <a:pt x="4881" y="9283"/>
+                </a:lnTo>
+                <a:lnTo>
+                  <a:pt x="3980" y="10543"/>
+                </a:lnTo>
+                <a:lnTo>
+                  <a:pt x="3165" y="11856"/>
+                </a:lnTo>
+                <a:lnTo>
+                  <a:pt x="2439" y="13216"/>
+                </a:lnTo>
+                <a:lnTo>
+                  <a:pt x="1803" y="14620"/>
+                </a:lnTo>
+                <a:lnTo>
+                  <a:pt x="1260" y="16061"/>
+                </a:lnTo>
+                <a:lnTo>
+                  <a:pt x="812" y="17537"/>
+                </a:lnTo>
+                <a:lnTo>
+                  <a:pt x="460" y="19041"/>
+                </a:lnTo>
+                <a:lnTo>
+                  <a:pt x="206" y="20570"/>
+                </a:lnTo>
+                <a:lnTo>
+                  <a:pt x="52" y="22119"/>
+                </a:lnTo>
+                <a:lnTo>
+                  <a:pt x="0" y="23683"/>
+                </a:lnTo>
+                <a:lnTo>
+                  <a:pt x="52" y="25247"/>
+                </a:lnTo>
+                <a:lnTo>
+                  <a:pt x="206" y="26796"/>
+                </a:lnTo>
+                <a:lnTo>
+                  <a:pt x="460" y="28324"/>
+                </a:lnTo>
+                <a:lnTo>
+                  <a:pt x="812" y="29829"/>
+                </a:lnTo>
+                <a:lnTo>
+                  <a:pt x="1260" y="31304"/>
+                </a:lnTo>
+                <a:lnTo>
+                  <a:pt x="1803" y="32746"/>
+                </a:lnTo>
+                <a:lnTo>
+                  <a:pt x="2439" y="34149"/>
+                </a:lnTo>
+                <a:lnTo>
+                  <a:pt x="3165" y="35509"/>
+                </a:lnTo>
+                <a:lnTo>
+                  <a:pt x="3980" y="36822"/>
+                </a:lnTo>
+                <a:lnTo>
+                  <a:pt x="4881" y="38083"/>
+                </a:lnTo>
+                <a:lnTo>
+                  <a:pt x="5868" y="39287"/>
+                </a:lnTo>
+                <a:lnTo>
+                  <a:pt x="6937" y="40429"/>
+                </a:lnTo>
+                <a:lnTo>
+                  <a:pt x="8080" y="41499"/>
+                </a:lnTo>
+                <a:lnTo>
+                  <a:pt x="9283" y="42485"/>
+                </a:lnTo>
+                <a:lnTo>
+                  <a:pt x="10544" y="43387"/>
+                </a:lnTo>
+                <a:lnTo>
+                  <a:pt x="11857" y="44201"/>
+                </a:lnTo>
+                <a:lnTo>
+                  <a:pt x="13217" y="44927"/>
+                </a:lnTo>
+                <a:lnTo>
+                  <a:pt x="14620" y="45563"/>
+                </a:lnTo>
+                <a:lnTo>
+                  <a:pt x="16062" y="46106"/>
+                </a:lnTo>
+                <a:lnTo>
+                  <a:pt x="17537" y="46554"/>
+                </a:lnTo>
+                <a:lnTo>
+                  <a:pt x="19042" y="46906"/>
+                </a:lnTo>
+                <a:lnTo>
+                  <a:pt x="20571" y="47160"/>
+                </a:lnTo>
+                <a:lnTo>
+                  <a:pt x="22119" y="47314"/>
+                </a:lnTo>
+                <a:lnTo>
+                  <a:pt x="23683" y="47366"/>
+                </a:lnTo>
+                <a:close/>
+              </a:path>
+            </a:pathLst>
+          </a:custGeom>
+          <a:solidFill>
+            <a:srgbClr val="0ABAB5"/>
+          </a:solidFill>
+          <a:ln w="23682">
+            <a:solidFill>
+              <a:srgbClr val="0ABAB5"/>
+            </a:solidFill>
+          </a:ln>
+        </p:spPr>
+        <p:style>
+          <a:lnRef idx="1">
+            <a:schemeClr val="accent1"/>
+          </a:lnRef>
+          <a:fillRef idx="3">
+            <a:schemeClr val="accent1"/>
+          </a:fillRef>
+          <a:effectRef idx="2">
+            <a:schemeClr val="accent1"/>
+          </a:effectRef>
+          <a:fontRef idx="minor">
+            <a:schemeClr val="lt1"/>
+          </a:fontRef>
+        </p:style>
+        <p:txBody>
+          <a:bodyPr rtlCol="0" anchor="ctr"/>
+          <a:lstStyle/>
+          <a:p>
+            <a:pPr algn="ctr"/>
+          </a:p>
+        </p:txBody>
+      </p:sp>
+      <p:sp>
+        <p:nvSpPr>
+          <p:cNvPr id="79" name="Editable path 72"/>
+          <p:cNvSpPr/>
+          <p:nvPr/>
+        </p:nvSpPr>
+        <p:spPr>
+          <a:xfrm>
+            <a:off x="3724747" y="1571376"/>
+            <a:ext cx="47366" cy="47366"/>
+          </a:xfrm>
+          <a:custGeom>
+            <a:avLst/>
+            <a:gdLst/>
+            <a:ahLst/>
+            <a:cxnLst/>
+            <a:rect l="l" t="t" r="r" b="b"/>
+            <a:pathLst>
+              <a:path w="47366" h="47366">
+                <a:moveTo>
+                  <a:pt x="23683" y="47366"/>
+                </a:moveTo>
+                <a:lnTo>
+                  <a:pt x="25247" y="47315"/>
+                </a:lnTo>
+                <a:lnTo>
+                  <a:pt x="26796" y="47161"/>
+                </a:lnTo>
+                <a:lnTo>
+                  <a:pt x="28325" y="46907"/>
+                </a:lnTo>
+                <a:lnTo>
+                  <a:pt x="29829" y="46555"/>
+                </a:lnTo>
+                <a:lnTo>
+                  <a:pt x="31304" y="46106"/>
+                </a:lnTo>
+                <a:lnTo>
+                  <a:pt x="32746" y="45564"/>
+                </a:lnTo>
+                <a:lnTo>
+                  <a:pt x="34149" y="44928"/>
+                </a:lnTo>
+                <a:lnTo>
+                  <a:pt x="35510" y="44202"/>
+                </a:lnTo>
+                <a:lnTo>
+                  <a:pt x="36822" y="43387"/>
+                </a:lnTo>
+                <a:lnTo>
+                  <a:pt x="38083" y="42486"/>
+                </a:lnTo>
+                <a:lnTo>
+                  <a:pt x="39287" y="41499"/>
+                </a:lnTo>
+                <a:lnTo>
+                  <a:pt x="40429" y="40430"/>
+                </a:lnTo>
+                <a:lnTo>
+                  <a:pt x="41499" y="39287"/>
+                </a:lnTo>
+                <a:lnTo>
+                  <a:pt x="42485" y="38083"/>
+                </a:lnTo>
+                <a:lnTo>
+                  <a:pt x="43387" y="36823"/>
+                </a:lnTo>
+                <a:lnTo>
+                  <a:pt x="44202" y="35510"/>
+                </a:lnTo>
+                <a:lnTo>
+                  <a:pt x="44928" y="34150"/>
+                </a:lnTo>
+                <a:lnTo>
+                  <a:pt x="45563" y="32746"/>
+                </a:lnTo>
+                <a:lnTo>
+                  <a:pt x="46106" y="31305"/>
+                </a:lnTo>
+                <a:lnTo>
+                  <a:pt x="46555" y="29830"/>
+                </a:lnTo>
+                <a:lnTo>
+                  <a:pt x="46907" y="28325"/>
+                </a:lnTo>
+                <a:lnTo>
+                  <a:pt x="47161" y="26796"/>
+                </a:lnTo>
+                <a:lnTo>
+                  <a:pt x="47314" y="25248"/>
+                </a:lnTo>
+                <a:lnTo>
+                  <a:pt x="47366" y="23683"/>
+                </a:lnTo>
+                <a:lnTo>
+                  <a:pt x="47314" y="22119"/>
+                </a:lnTo>
+                <a:lnTo>
+                  <a:pt x="47161" y="20571"/>
+                </a:lnTo>
+                <a:lnTo>
+                  <a:pt x="46907" y="19042"/>
+                </a:lnTo>
+                <a:lnTo>
+                  <a:pt x="46555" y="17537"/>
+                </a:lnTo>
+                <a:lnTo>
+                  <a:pt x="46106" y="16062"/>
+                </a:lnTo>
+                <a:lnTo>
+                  <a:pt x="45563" y="14620"/>
+                </a:lnTo>
+                <a:lnTo>
+                  <a:pt x="44928" y="13217"/>
+                </a:lnTo>
+                <a:lnTo>
+                  <a:pt x="44202" y="11857"/>
+                </a:lnTo>
+                <a:lnTo>
+                  <a:pt x="43387" y="10544"/>
+                </a:lnTo>
+                <a:lnTo>
+                  <a:pt x="42485" y="9283"/>
+                </a:lnTo>
+                <a:lnTo>
+                  <a:pt x="41499" y="8080"/>
+                </a:lnTo>
+                <a:lnTo>
+                  <a:pt x="40429" y="6937"/>
+                </a:lnTo>
+                <a:lnTo>
+                  <a:pt x="39287" y="5868"/>
+                </a:lnTo>
+                <a:lnTo>
+                  <a:pt x="38083" y="4881"/>
+                </a:lnTo>
+                <a:lnTo>
+                  <a:pt x="36822" y="3980"/>
+                </a:lnTo>
+                <a:lnTo>
+                  <a:pt x="35510" y="3165"/>
+                </a:lnTo>
+                <a:lnTo>
+                  <a:pt x="34149" y="2439"/>
+                </a:lnTo>
+                <a:lnTo>
+                  <a:pt x="32746" y="1803"/>
+                </a:lnTo>
+                <a:lnTo>
+                  <a:pt x="31304" y="1260"/>
+                </a:lnTo>
+                <a:lnTo>
+                  <a:pt x="29829" y="812"/>
+                </a:lnTo>
+                <a:lnTo>
+                  <a:pt x="28325" y="460"/>
+                </a:lnTo>
+                <a:lnTo>
+                  <a:pt x="26796" y="206"/>
+                </a:lnTo>
+                <a:lnTo>
+                  <a:pt x="25247" y="52"/>
+                </a:lnTo>
+                <a:lnTo>
+                  <a:pt x="23683" y="0"/>
+                </a:lnTo>
+                <a:lnTo>
+                  <a:pt x="22119" y="52"/>
+                </a:lnTo>
+                <a:lnTo>
+                  <a:pt x="20570" y="206"/>
+                </a:lnTo>
+                <a:lnTo>
+                  <a:pt x="19041" y="460"/>
+                </a:lnTo>
+                <a:lnTo>
+                  <a:pt x="17537" y="812"/>
+                </a:lnTo>
+                <a:lnTo>
+                  <a:pt x="16062" y="1260"/>
+                </a:lnTo>
+                <a:lnTo>
+                  <a:pt x="14620" y="1803"/>
+                </a:lnTo>
+                <a:lnTo>
+                  <a:pt x="13217" y="2439"/>
+                </a:lnTo>
+                <a:lnTo>
+                  <a:pt x="11856" y="3165"/>
+                </a:lnTo>
+                <a:lnTo>
+                  <a:pt x="10544" y="3980"/>
+                </a:lnTo>
+                <a:lnTo>
+                  <a:pt x="9283" y="4881"/>
+                </a:lnTo>
+                <a:lnTo>
+                  <a:pt x="8079" y="5868"/>
+                </a:lnTo>
+                <a:lnTo>
+                  <a:pt x="6937" y="6937"/>
+                </a:lnTo>
+                <a:lnTo>
+                  <a:pt x="5867" y="8080"/>
+                </a:lnTo>
+                <a:lnTo>
+                  <a:pt x="4881" y="9283"/>
+                </a:lnTo>
+                <a:lnTo>
+                  <a:pt x="3979" y="10544"/>
+                </a:lnTo>
+                <a:lnTo>
+                  <a:pt x="3164" y="11857"/>
+                </a:lnTo>
+                <a:lnTo>
+                  <a:pt x="2438" y="13217"/>
+                </a:lnTo>
+                <a:lnTo>
+                  <a:pt x="1803" y="14620"/>
+                </a:lnTo>
+                <a:lnTo>
+                  <a:pt x="1260" y="16062"/>
+                </a:lnTo>
+                <a:lnTo>
+                  <a:pt x="811" y="17537"/>
+                </a:lnTo>
+                <a:lnTo>
+                  <a:pt x="459" y="19042"/>
+                </a:lnTo>
+                <a:lnTo>
+                  <a:pt x="205" y="20571"/>
+                </a:lnTo>
+                <a:lnTo>
+                  <a:pt x="52" y="22119"/>
+                </a:lnTo>
+                <a:lnTo>
+                  <a:pt x="0" y="23683"/>
+                </a:lnTo>
+                <a:lnTo>
+                  <a:pt x="52" y="25248"/>
+                </a:lnTo>
+                <a:lnTo>
+                  <a:pt x="205" y="26796"/>
+                </a:lnTo>
+                <a:lnTo>
+                  <a:pt x="459" y="28325"/>
+                </a:lnTo>
+                <a:lnTo>
+                  <a:pt x="811" y="29830"/>
+                </a:lnTo>
+                <a:lnTo>
+                  <a:pt x="1260" y="31305"/>
+                </a:lnTo>
+                <a:lnTo>
+                  <a:pt x="1803" y="32746"/>
+                </a:lnTo>
+                <a:lnTo>
+                  <a:pt x="2438" y="34150"/>
+                </a:lnTo>
+                <a:lnTo>
+                  <a:pt x="3164" y="35510"/>
+                </a:lnTo>
+                <a:lnTo>
+                  <a:pt x="3979" y="36823"/>
+                </a:lnTo>
+                <a:lnTo>
+                  <a:pt x="4881" y="38083"/>
+                </a:lnTo>
+                <a:lnTo>
+                  <a:pt x="5867" y="39287"/>
+                </a:lnTo>
+                <a:lnTo>
+                  <a:pt x="6937" y="40430"/>
+                </a:lnTo>
+                <a:lnTo>
+                  <a:pt x="8079" y="41499"/>
+                </a:lnTo>
+                <a:lnTo>
+                  <a:pt x="9283" y="42486"/>
+                </a:lnTo>
+                <a:lnTo>
+                  <a:pt x="10544" y="43387"/>
+                </a:lnTo>
+                <a:lnTo>
+                  <a:pt x="11856" y="44202"/>
+                </a:lnTo>
+                <a:lnTo>
+                  <a:pt x="13217" y="44928"/>
+                </a:lnTo>
+                <a:lnTo>
+                  <a:pt x="14620" y="45564"/>
+                </a:lnTo>
+                <a:lnTo>
+                  <a:pt x="16062" y="46106"/>
+                </a:lnTo>
+                <a:lnTo>
+                  <a:pt x="17537" y="46555"/>
+                </a:lnTo>
+                <a:lnTo>
+                  <a:pt x="19041" y="46907"/>
+                </a:lnTo>
+                <a:lnTo>
+                  <a:pt x="20570" y="47161"/>
+                </a:lnTo>
+                <a:lnTo>
+                  <a:pt x="22119" y="47315"/>
+                </a:lnTo>
+                <a:lnTo>
+                  <a:pt x="23683" y="47366"/>
+                </a:lnTo>
+                <a:close/>
+              </a:path>
+            </a:pathLst>
+          </a:custGeom>
+          <a:solidFill>
+            <a:srgbClr val="0ABAB5"/>
+          </a:solidFill>
+          <a:ln w="23682">
+            <a:solidFill>
+              <a:srgbClr val="0ABAB5"/>
+            </a:solidFill>
+          </a:ln>
+        </p:spPr>
+        <p:style>
+          <a:lnRef idx="1">
+            <a:schemeClr val="accent1"/>
+          </a:lnRef>
+          <a:fillRef idx="3">
+            <a:schemeClr val="accent1"/>
+          </a:fillRef>
+          <a:effectRef idx="2">
+            <a:schemeClr val="accent1"/>
+          </a:effectRef>
+          <a:fontRef idx="minor">
+            <a:schemeClr val="lt1"/>
+          </a:fontRef>
+        </p:style>
+        <p:txBody>
+          <a:bodyPr rtlCol="0" anchor="ctr"/>
+          <a:lstStyle/>
+          <a:p>
+            <a:pPr algn="ctr"/>
+          </a:p>
+        </p:txBody>
+      </p:sp>
+      <p:sp>
+        <p:nvSpPr>
+          <p:cNvPr id="80" name="Editable path 73"/>
+          <p:cNvSpPr/>
+          <p:nvPr/>
+        </p:nvSpPr>
+        <p:spPr>
+          <a:xfrm>
+            <a:off x="3600023" y="1597464"/>
+            <a:ext cx="47366" cy="47366"/>
+          </a:xfrm>
+          <a:custGeom>
+            <a:avLst/>
+            <a:gdLst/>
+            <a:ahLst/>
+            <a:cxnLst/>
+            <a:rect l="l" t="t" r="r" b="b"/>
+            <a:pathLst>
+              <a:path w="47366" h="47366">
+                <a:moveTo>
+                  <a:pt x="23683" y="47366"/>
+                </a:moveTo>
+                <a:lnTo>
+                  <a:pt x="25247" y="47314"/>
+                </a:lnTo>
+                <a:lnTo>
+                  <a:pt x="26796" y="47160"/>
+                </a:lnTo>
+                <a:lnTo>
+                  <a:pt x="28325" y="46906"/>
+                </a:lnTo>
+                <a:lnTo>
+                  <a:pt x="29829" y="46554"/>
+                </a:lnTo>
+                <a:lnTo>
+                  <a:pt x="31304" y="46106"/>
+                </a:lnTo>
+                <a:lnTo>
+                  <a:pt x="32746" y="45563"/>
+                </a:lnTo>
+                <a:lnTo>
+                  <a:pt x="34149" y="44927"/>
+                </a:lnTo>
+                <a:lnTo>
+                  <a:pt x="35509" y="44201"/>
+                </a:lnTo>
+                <a:lnTo>
+                  <a:pt x="36822" y="43387"/>
+                </a:lnTo>
+                <a:lnTo>
+                  <a:pt x="38083" y="42485"/>
+                </a:lnTo>
+                <a:lnTo>
+                  <a:pt x="39287" y="41499"/>
+                </a:lnTo>
+                <a:lnTo>
+                  <a:pt x="40429" y="40429"/>
+                </a:lnTo>
+                <a:lnTo>
+                  <a:pt x="41499" y="39287"/>
+                </a:lnTo>
+                <a:lnTo>
+                  <a:pt x="42485" y="38083"/>
+                </a:lnTo>
+                <a:lnTo>
+                  <a:pt x="43387" y="36822"/>
+                </a:lnTo>
+                <a:lnTo>
+                  <a:pt x="44202" y="35509"/>
+                </a:lnTo>
+                <a:lnTo>
+                  <a:pt x="44928" y="34149"/>
+                </a:lnTo>
+                <a:lnTo>
+                  <a:pt x="45563" y="32746"/>
+                </a:lnTo>
+                <a:lnTo>
+                  <a:pt x="46106" y="31304"/>
+                </a:lnTo>
+                <a:lnTo>
+                  <a:pt x="46554" y="29829"/>
+                </a:lnTo>
+                <a:lnTo>
+                  <a:pt x="46907" y="28325"/>
+                </a:lnTo>
+                <a:lnTo>
+                  <a:pt x="47160" y="26796"/>
+                </a:lnTo>
+                <a:lnTo>
+                  <a:pt x="47314" y="25247"/>
+                </a:lnTo>
+                <a:lnTo>
+                  <a:pt x="47366" y="23683"/>
+                </a:lnTo>
+                <a:lnTo>
+                  <a:pt x="47314" y="22119"/>
+                </a:lnTo>
+                <a:lnTo>
+                  <a:pt x="47160" y="20570"/>
+                </a:lnTo>
+                <a:lnTo>
+                  <a:pt x="46907" y="19041"/>
+                </a:lnTo>
+                <a:lnTo>
+                  <a:pt x="46554" y="17537"/>
+                </a:lnTo>
+                <a:lnTo>
+                  <a:pt x="46106" y="16061"/>
+                </a:lnTo>
+                <a:lnTo>
+                  <a:pt x="45563" y="14620"/>
+                </a:lnTo>
+                <a:lnTo>
+                  <a:pt x="44928" y="13217"/>
+                </a:lnTo>
+                <a:lnTo>
+                  <a:pt x="44202" y="11856"/>
+                </a:lnTo>
+                <a:lnTo>
+                  <a:pt x="43387" y="10543"/>
+                </a:lnTo>
+                <a:lnTo>
+                  <a:pt x="42485" y="9283"/>
+                </a:lnTo>
+                <a:lnTo>
+                  <a:pt x="41499" y="8079"/>
+                </a:lnTo>
+                <a:lnTo>
+                  <a:pt x="40429" y="6936"/>
+                </a:lnTo>
+                <a:lnTo>
+                  <a:pt x="39287" y="5867"/>
+                </a:lnTo>
+                <a:lnTo>
+                  <a:pt x="38083" y="4881"/>
+                </a:lnTo>
+                <a:lnTo>
+                  <a:pt x="36822" y="3979"/>
+                </a:lnTo>
+                <a:lnTo>
+                  <a:pt x="35509" y="3164"/>
+                </a:lnTo>
+                <a:lnTo>
+                  <a:pt x="34149" y="2438"/>
+                </a:lnTo>
+                <a:lnTo>
+                  <a:pt x="32746" y="1803"/>
+                </a:lnTo>
+                <a:lnTo>
+                  <a:pt x="31304" y="1260"/>
+                </a:lnTo>
+                <a:lnTo>
+                  <a:pt x="29829" y="811"/>
+                </a:lnTo>
+                <a:lnTo>
+                  <a:pt x="28325" y="459"/>
+                </a:lnTo>
+                <a:lnTo>
+                  <a:pt x="26796" y="205"/>
+                </a:lnTo>
+                <a:lnTo>
+                  <a:pt x="25247" y="51"/>
+                </a:lnTo>
+                <a:lnTo>
+                  <a:pt x="23683" y="0"/>
+                </a:lnTo>
+                <a:lnTo>
+                  <a:pt x="22119" y="51"/>
+                </a:lnTo>
+                <a:lnTo>
+                  <a:pt x="20570" y="205"/>
+                </a:lnTo>
+                <a:lnTo>
+                  <a:pt x="19041" y="459"/>
+                </a:lnTo>
+                <a:lnTo>
+                  <a:pt x="17537" y="811"/>
+                </a:lnTo>
+                <a:lnTo>
+                  <a:pt x="16061" y="1260"/>
+                </a:lnTo>
+                <a:lnTo>
+                  <a:pt x="14620" y="1803"/>
+                </a:lnTo>
+                <a:lnTo>
+                  <a:pt x="13217" y="2438"/>
+                </a:lnTo>
+                <a:lnTo>
+                  <a:pt x="11856" y="3164"/>
+                </a:lnTo>
+                <a:lnTo>
+                  <a:pt x="10544" y="3979"/>
+                </a:lnTo>
+                <a:lnTo>
+                  <a:pt x="9283" y="4881"/>
+                </a:lnTo>
+                <a:lnTo>
+                  <a:pt x="8079" y="5867"/>
+                </a:lnTo>
+                <a:lnTo>
+                  <a:pt x="6936" y="6936"/>
+                </a:lnTo>
+                <a:lnTo>
+                  <a:pt x="5867" y="8079"/>
+                </a:lnTo>
+                <a:lnTo>
+                  <a:pt x="4881" y="9283"/>
+                </a:lnTo>
+                <a:lnTo>
+                  <a:pt x="3979" y="10543"/>
+                </a:lnTo>
+                <a:lnTo>
+                  <a:pt x="3164" y="11856"/>
+                </a:lnTo>
+                <a:lnTo>
+                  <a:pt x="2438" y="13217"/>
+                </a:lnTo>
+                <a:lnTo>
+                  <a:pt x="1803" y="14620"/>
+                </a:lnTo>
+                <a:lnTo>
+                  <a:pt x="1260" y="16061"/>
+                </a:lnTo>
+                <a:lnTo>
+                  <a:pt x="811" y="17537"/>
+                </a:lnTo>
+                <a:lnTo>
+                  <a:pt x="459" y="19041"/>
+                </a:lnTo>
+                <a:lnTo>
+                  <a:pt x="205" y="20570"/>
+                </a:lnTo>
+                <a:lnTo>
+                  <a:pt x="52" y="22119"/>
+                </a:lnTo>
+                <a:lnTo>
+                  <a:pt x="0" y="23683"/>
+                </a:lnTo>
+                <a:lnTo>
+                  <a:pt x="52" y="25247"/>
+                </a:lnTo>
+                <a:lnTo>
+                  <a:pt x="205" y="26796"/>
+                </a:lnTo>
+                <a:lnTo>
+                  <a:pt x="459" y="28325"/>
+                </a:lnTo>
+                <a:lnTo>
+                  <a:pt x="811" y="29829"/>
+                </a:lnTo>
+                <a:lnTo>
+                  <a:pt x="1260" y="31304"/>
+                </a:lnTo>
+                <a:lnTo>
+                  <a:pt x="1803" y="32746"/>
+                </a:lnTo>
+                <a:lnTo>
+                  <a:pt x="2438" y="34149"/>
+                </a:lnTo>
+                <a:lnTo>
+                  <a:pt x="3164" y="35509"/>
+                </a:lnTo>
+                <a:lnTo>
+                  <a:pt x="3979" y="36822"/>
+                </a:lnTo>
+                <a:lnTo>
+                  <a:pt x="4881" y="38083"/>
+                </a:lnTo>
+                <a:lnTo>
+                  <a:pt x="5867" y="39287"/>
+                </a:lnTo>
+                <a:lnTo>
+                  <a:pt x="6936" y="40429"/>
+                </a:lnTo>
+                <a:lnTo>
+                  <a:pt x="8079" y="41499"/>
+                </a:lnTo>
+                <a:lnTo>
+                  <a:pt x="9283" y="42485"/>
+                </a:lnTo>
+                <a:lnTo>
+                  <a:pt x="10544" y="43387"/>
+                </a:lnTo>
+                <a:lnTo>
+                  <a:pt x="11856" y="44201"/>
+                </a:lnTo>
+                <a:lnTo>
+                  <a:pt x="13217" y="44927"/>
+                </a:lnTo>
+                <a:lnTo>
+                  <a:pt x="14620" y="45563"/>
+                </a:lnTo>
+                <a:lnTo>
+                  <a:pt x="16061" y="46106"/>
+                </a:lnTo>
+                <a:lnTo>
+                  <a:pt x="17537" y="46554"/>
+                </a:lnTo>
+                <a:lnTo>
+                  <a:pt x="19041" y="46906"/>
+                </a:lnTo>
+                <a:lnTo>
+                  <a:pt x="20570" y="47160"/>
+                </a:lnTo>
+                <a:lnTo>
+                  <a:pt x="22119" y="47314"/>
+                </a:lnTo>
+                <a:lnTo>
+                  <a:pt x="23683" y="47366"/>
+                </a:lnTo>
+                <a:close/>
+              </a:path>
+            </a:pathLst>
+          </a:custGeom>
+          <a:solidFill>
+            <a:srgbClr val="0ABAB5"/>
+          </a:solidFill>
+          <a:ln w="23682">
+            <a:solidFill>
+              <a:srgbClr val="0ABAB5"/>
+            </a:solidFill>
+          </a:ln>
+        </p:spPr>
+        <p:style>
+          <a:lnRef idx="1">
+            <a:schemeClr val="accent1"/>
+          </a:lnRef>
+          <a:fillRef idx="3">
+            <a:schemeClr val="accent1"/>
+          </a:fillRef>
+          <a:effectRef idx="2">
+            <a:schemeClr val="accent1"/>
+          </a:effectRef>
+          <a:fontRef idx="minor">
+            <a:schemeClr val="lt1"/>
+          </a:fontRef>
+        </p:style>
+        <p:txBody>
+          <a:bodyPr rtlCol="0" anchor="ctr"/>
+          <a:lstStyle/>
+          <a:p>
+            <a:pPr algn="ctr"/>
+          </a:p>
+        </p:txBody>
+      </p:sp>
+      <p:sp>
+        <p:nvSpPr>
+          <p:cNvPr id="81" name="Editable path 74"/>
+          <p:cNvSpPr/>
+          <p:nvPr/>
+        </p:nvSpPr>
+        <p:spPr>
+          <a:xfrm>
+            <a:off x="3850477" y="1334185"/>
+            <a:ext cx="45354" cy="156525"/>
+          </a:xfrm>
+          <a:custGeom>
+            <a:avLst/>
+            <a:gdLst/>
+            <a:ahLst/>
+            <a:cxnLst/>
+            <a:rect l="l" t="t" r="r" b="b"/>
+            <a:pathLst>
+              <a:path w="45354" h="156525">
+                <a:moveTo>
+                  <a:pt x="45354" y="156525"/>
+                </a:moveTo>
+                <a:lnTo>
+                  <a:pt x="0" y="0"/>
+                </a:lnTo>
+              </a:path>
+            </a:pathLst>
+          </a:custGeom>
+          <a:noFill/>
+          <a:ln w="14209">
+            <a:solidFill>
+              <a:srgbClr val="0ABAB5"/>
+            </a:solidFill>
+          </a:ln>
+        </p:spPr>
+        <p:style>
+          <a:lnRef idx="1">
+            <a:schemeClr val="accent1"/>
+          </a:lnRef>
+          <a:fillRef idx="3">
+            <a:schemeClr val="accent1"/>
+          </a:fillRef>
+          <a:effectRef idx="2">
+            <a:schemeClr val="accent1"/>
+          </a:effectRef>
+          <a:fontRef idx="minor">
+            <a:schemeClr val="lt1"/>
+          </a:fontRef>
+        </p:style>
+        <p:txBody>
+          <a:bodyPr rtlCol="0" anchor="ctr"/>
+          <a:lstStyle/>
+          <a:p>
+            <a:pPr algn="ctr"/>
+          </a:p>
+        </p:txBody>
+      </p:sp>
+      <p:sp>
+        <p:nvSpPr>
+          <p:cNvPr id="82" name="Editable path 75"/>
+          <p:cNvSpPr/>
+          <p:nvPr/>
+        </p:nvSpPr>
+        <p:spPr>
+          <a:xfrm>
+            <a:off x="3703076" y="1595059"/>
+            <a:ext cx="45354" cy="156525"/>
+          </a:xfrm>
+          <a:custGeom>
+            <a:avLst/>
+            <a:gdLst/>
+            <a:ahLst/>
+            <a:cxnLst/>
+            <a:rect l="l" t="t" r="r" b="b"/>
+            <a:pathLst>
+              <a:path w="45354" h="156525">
+                <a:moveTo>
+                  <a:pt x="45354" y="0"/>
+                </a:moveTo>
+                <a:lnTo>
+                  <a:pt x="0" y="156525"/>
+                </a:lnTo>
+              </a:path>
+            </a:pathLst>
+          </a:custGeom>
+          <a:noFill/>
+          <a:ln w="14209">
+            <a:solidFill>
+              <a:srgbClr val="0ABAB5"/>
+            </a:solidFill>
+          </a:ln>
+        </p:spPr>
+        <p:style>
+          <a:lnRef idx="1">
+            <a:schemeClr val="accent1"/>
+          </a:lnRef>
+          <a:fillRef idx="3">
+            <a:schemeClr val="accent1"/>
+          </a:fillRef>
+          <a:effectRef idx="2">
+            <a:schemeClr val="accent1"/>
+          </a:effectRef>
+          <a:fontRef idx="minor">
+            <a:schemeClr val="lt1"/>
+          </a:fontRef>
+        </p:style>
+        <p:txBody>
+          <a:bodyPr rtlCol="0" anchor="ctr"/>
+          <a:lstStyle/>
+          <a:p>
+            <a:pPr algn="ctr"/>
+          </a:p>
+        </p:txBody>
+      </p:sp>
+      <p:sp>
+        <p:nvSpPr>
+          <p:cNvPr id="83" name="Editable path 76"/>
+          <p:cNvSpPr/>
+          <p:nvPr/>
+        </p:nvSpPr>
+        <p:spPr>
+          <a:xfrm>
+            <a:off x="3510321" y="1621147"/>
+            <a:ext cx="113385" cy="0"/>
+          </a:xfrm>
+          <a:custGeom>
+            <a:avLst/>
+            <a:gdLst/>
+            <a:ahLst/>
+            <a:cxnLst/>
+            <a:rect l="l" t="t" r="r" b="b"/>
+            <a:pathLst>
+              <a:path w="113385" h="0">
+                <a:moveTo>
+                  <a:pt x="0" y="0"/>
+                </a:moveTo>
+                <a:lnTo>
+                  <a:pt x="113385" y="0"/>
+                </a:lnTo>
+              </a:path>
+            </a:pathLst>
+          </a:custGeom>
+          <a:noFill/>
+          <a:ln w="56839">
+            <a:solidFill>
+              <a:srgbClr val="FF9500"/>
+            </a:solidFill>
+          </a:ln>
+        </p:spPr>
+        <p:style>
+          <a:lnRef idx="1">
+            <a:schemeClr val="accent1"/>
+          </a:lnRef>
+          <a:fillRef idx="3">
+            <a:schemeClr val="accent1"/>
+          </a:fillRef>
+          <a:effectRef idx="2">
+            <a:schemeClr val="accent1"/>
+          </a:effectRef>
+          <a:fontRef idx="minor">
+            <a:schemeClr val="lt1"/>
+          </a:fontRef>
+        </p:style>
+        <p:txBody>
+          <a:bodyPr rtlCol="0" anchor="ctr"/>
+          <a:lstStyle/>
+          <a:p>
+            <a:pPr algn="ctr"/>
+          </a:p>
+        </p:txBody>
+      </p:sp>
+      <p:sp>
+        <p:nvSpPr>
+          <p:cNvPr id="84" name="Editable path 77"/>
+          <p:cNvSpPr/>
+          <p:nvPr/>
+        </p:nvSpPr>
+        <p:spPr>
+          <a:xfrm>
+            <a:off x="4788773" y="1738540"/>
+            <a:ext cx="68032" cy="273918"/>
+          </a:xfrm>
+          <a:custGeom>
+            <a:avLst/>
+            <a:gdLst/>
+            <a:ahLst/>
+            <a:cxnLst/>
+            <a:rect l="l" t="t" r="r" b="b"/>
+            <a:pathLst>
+              <a:path w="68032" h="273918">
+                <a:moveTo>
+                  <a:pt x="0" y="0"/>
+                </a:moveTo>
+                <a:lnTo>
+                  <a:pt x="68032" y="0"/>
+                </a:lnTo>
+                <a:lnTo>
+                  <a:pt x="68032" y="273918"/>
+                </a:lnTo>
+                <a:lnTo>
+                  <a:pt x="0" y="273918"/>
+                </a:lnTo>
+                <a:lnTo>
+                  <a:pt x="0" y="0"/>
+                </a:lnTo>
+                <a:close/>
+              </a:path>
+            </a:pathLst>
+          </a:custGeom>
+          <a:solidFill>
+            <a:srgbClr val="EEF0F3"/>
+          </a:solidFill>
+          <a:ln w="13025">
+            <a:solidFill>
+              <a:srgbClr val="6B7280"/>
+            </a:solidFill>
+          </a:ln>
+        </p:spPr>
+        <p:style>
+          <a:lnRef idx="1">
+            <a:schemeClr val="accent1"/>
+          </a:lnRef>
+          <a:fillRef idx="3">
+            <a:schemeClr val="accent1"/>
+          </a:fillRef>
+          <a:effectRef idx="2">
+            <a:schemeClr val="accent1"/>
+          </a:effectRef>
+          <a:fontRef idx="minor">
+            <a:schemeClr val="lt1"/>
+          </a:fontRef>
+        </p:style>
+        <p:txBody>
+          <a:bodyPr rtlCol="0" anchor="ctr"/>
+          <a:lstStyle/>
+          <a:p>
+            <a:pPr algn="ctr"/>
+          </a:p>
+        </p:txBody>
+      </p:sp>
+      <p:sp>
+        <p:nvSpPr>
+          <p:cNvPr id="85" name="Editable path 78"/>
+          <p:cNvSpPr/>
+          <p:nvPr/>
+        </p:nvSpPr>
+        <p:spPr>
+          <a:xfrm>
+            <a:off x="4788773" y="1229836"/>
+            <a:ext cx="68032" cy="247830"/>
+          </a:xfrm>
+          <a:custGeom>
+            <a:avLst/>
+            <a:gdLst/>
+            <a:ahLst/>
+            <a:cxnLst/>
+            <a:rect l="l" t="t" r="r" b="b"/>
+            <a:pathLst>
+              <a:path w="68032" h="247830">
+                <a:moveTo>
+                  <a:pt x="0" y="0"/>
+                </a:moveTo>
+                <a:lnTo>
+                  <a:pt x="68032" y="0"/>
+                </a:lnTo>
+                <a:lnTo>
+                  <a:pt x="68032" y="247830"/>
+                </a:lnTo>
+                <a:lnTo>
+                  <a:pt x="0" y="247830"/>
+                </a:lnTo>
+                <a:lnTo>
+                  <a:pt x="0" y="0"/>
+                </a:lnTo>
+                <a:close/>
+              </a:path>
+            </a:pathLst>
+          </a:custGeom>
+          <a:solidFill>
+            <a:srgbClr val="EEF0F3"/>
+          </a:solidFill>
+          <a:ln w="13025">
+            <a:solidFill>
+              <a:srgbClr val="6B7280"/>
+            </a:solidFill>
+          </a:ln>
+        </p:spPr>
+        <p:style>
+          <a:lnRef idx="1">
+            <a:schemeClr val="accent1"/>
+          </a:lnRef>
+          <a:fillRef idx="3">
+            <a:schemeClr val="accent1"/>
+          </a:fillRef>
+          <a:effectRef idx="2">
+            <a:schemeClr val="accent1"/>
+          </a:effectRef>
+          <a:fontRef idx="minor">
+            <a:schemeClr val="lt1"/>
+          </a:fontRef>
+        </p:style>
+        <p:txBody>
+          <a:bodyPr rtlCol="0" anchor="ctr"/>
+          <a:lstStyle/>
+          <a:p>
+            <a:pPr algn="ctr"/>
+          </a:p>
+        </p:txBody>
+      </p:sp>
+      <p:sp>
+        <p:nvSpPr>
+          <p:cNvPr id="86" name="Editable path 79"/>
+          <p:cNvSpPr/>
+          <p:nvPr/>
+        </p:nvSpPr>
+        <p:spPr>
+          <a:xfrm>
+            <a:off x="4579010" y="1709844"/>
+            <a:ext cx="56693" cy="57392"/>
+          </a:xfrm>
+          <a:custGeom>
+            <a:avLst/>
+            <a:gdLst/>
+            <a:ahLst/>
+            <a:cxnLst/>
+            <a:rect l="l" t="t" r="r" b="b"/>
+            <a:pathLst>
+              <a:path w="56693" h="57392">
+                <a:moveTo>
+                  <a:pt x="0" y="0"/>
+                </a:moveTo>
+                <a:lnTo>
+                  <a:pt x="56693" y="0"/>
+                </a:lnTo>
+                <a:lnTo>
+                  <a:pt x="56693" y="57392"/>
+                </a:lnTo>
+                <a:lnTo>
+                  <a:pt x="0" y="57392"/>
+                </a:lnTo>
+                <a:lnTo>
+                  <a:pt x="0" y="0"/>
+                </a:lnTo>
+                <a:close/>
+              </a:path>
+            </a:pathLst>
+          </a:custGeom>
+          <a:solidFill>
+            <a:srgbClr val="FFF5C8"/>
+          </a:solidFill>
+          <a:ln w="14209">
+            <a:solidFill>
+              <a:srgbClr val="FF9500"/>
+            </a:solidFill>
+          </a:ln>
+        </p:spPr>
+        <p:style>
+          <a:lnRef idx="1">
+            <a:schemeClr val="accent1"/>
+          </a:lnRef>
+          <a:fillRef idx="3">
+            <a:schemeClr val="accent1"/>
+          </a:fillRef>
+          <a:effectRef idx="2">
+            <a:schemeClr val="accent1"/>
+          </a:effectRef>
+          <a:fontRef idx="minor">
+            <a:schemeClr val="lt1"/>
+          </a:fontRef>
+        </p:style>
+        <p:txBody>
+          <a:bodyPr rtlCol="0" anchor="ctr"/>
+          <a:lstStyle/>
+          <a:p>
+            <a:pPr algn="ctr"/>
+          </a:p>
+        </p:txBody>
+      </p:sp>
+      <p:sp>
+        <p:nvSpPr>
+          <p:cNvPr id="87" name="Editable path 80"/>
+          <p:cNvSpPr/>
+          <p:nvPr/>
+        </p:nvSpPr>
+        <p:spPr>
+          <a:xfrm>
+            <a:off x="4692396" y="1618538"/>
+            <a:ext cx="56692" cy="57392"/>
+          </a:xfrm>
+          <a:custGeom>
+            <a:avLst/>
+            <a:gdLst/>
+            <a:ahLst/>
+            <a:cxnLst/>
+            <a:rect l="l" t="t" r="r" b="b"/>
+            <a:pathLst>
+              <a:path w="56692" h="57392">
+                <a:moveTo>
+                  <a:pt x="0" y="0"/>
+                </a:moveTo>
+                <a:lnTo>
+                  <a:pt x="56692" y="0"/>
+                </a:lnTo>
+                <a:lnTo>
+                  <a:pt x="56692" y="57392"/>
+                </a:lnTo>
+                <a:lnTo>
+                  <a:pt x="0" y="57392"/>
+                </a:lnTo>
+                <a:lnTo>
+                  <a:pt x="0" y="0"/>
+                </a:lnTo>
+                <a:close/>
+              </a:path>
+            </a:pathLst>
+          </a:custGeom>
+          <a:solidFill>
+            <a:srgbClr val="FFF5C8"/>
+          </a:solidFill>
+          <a:ln w="14209">
+            <a:solidFill>
+              <a:srgbClr val="FF9500"/>
+            </a:solidFill>
+          </a:ln>
+        </p:spPr>
+        <p:style>
+          <a:lnRef idx="1">
+            <a:schemeClr val="accent1"/>
+          </a:lnRef>
+          <a:fillRef idx="3">
+            <a:schemeClr val="accent1"/>
+          </a:fillRef>
+          <a:effectRef idx="2">
+            <a:schemeClr val="accent1"/>
+          </a:effectRef>
+          <a:fontRef idx="minor">
+            <a:schemeClr val="lt1"/>
+          </a:fontRef>
+        </p:style>
+        <p:txBody>
+          <a:bodyPr rtlCol="0" anchor="ctr"/>
+          <a:lstStyle/>
+          <a:p>
+            <a:pPr algn="ctr"/>
+          </a:p>
+        </p:txBody>
+      </p:sp>
+      <p:sp>
+        <p:nvSpPr>
+          <p:cNvPr id="88" name="Editable path 81"/>
+          <p:cNvSpPr/>
+          <p:nvPr/>
+        </p:nvSpPr>
+        <p:spPr>
+          <a:xfrm>
+            <a:off x="4805781" y="1579407"/>
+            <a:ext cx="56693" cy="57392"/>
+          </a:xfrm>
+          <a:custGeom>
+            <a:avLst/>
+            <a:gdLst/>
+            <a:ahLst/>
+            <a:cxnLst/>
+            <a:rect l="l" t="t" r="r" b="b"/>
+            <a:pathLst>
+              <a:path w="56693" h="57392">
+                <a:moveTo>
+                  <a:pt x="0" y="0"/>
+                </a:moveTo>
+                <a:lnTo>
+                  <a:pt x="56693" y="0"/>
+                </a:lnTo>
+                <a:lnTo>
+                  <a:pt x="56693" y="57392"/>
+                </a:lnTo>
+                <a:lnTo>
+                  <a:pt x="0" y="57392"/>
+                </a:lnTo>
+                <a:lnTo>
+                  <a:pt x="0" y="0"/>
+                </a:lnTo>
+                <a:close/>
+              </a:path>
+            </a:pathLst>
+          </a:custGeom>
+          <a:solidFill>
+            <a:srgbClr val="FFF5C8"/>
+          </a:solidFill>
+          <a:ln w="14209">
+            <a:solidFill>
+              <a:srgbClr val="FF9500"/>
+            </a:solidFill>
+          </a:ln>
+        </p:spPr>
+        <p:style>
+          <a:lnRef idx="1">
+            <a:schemeClr val="accent1"/>
+          </a:lnRef>
+          <a:fillRef idx="3">
+            <a:schemeClr val="accent1"/>
+          </a:fillRef>
+          <a:effectRef idx="2">
+            <a:schemeClr val="accent1"/>
+          </a:effectRef>
+          <a:fontRef idx="minor">
+            <a:schemeClr val="lt1"/>
+          </a:fontRef>
+        </p:style>
+        <p:txBody>
+          <a:bodyPr rtlCol="0" anchor="ctr"/>
+          <a:lstStyle/>
+          <a:p>
+            <a:pPr algn="ctr"/>
+          </a:p>
+        </p:txBody>
+      </p:sp>
+      <p:sp>
+        <p:nvSpPr>
+          <p:cNvPr id="89" name="Editable path 82"/>
+          <p:cNvSpPr/>
+          <p:nvPr/>
+        </p:nvSpPr>
+        <p:spPr>
+          <a:xfrm>
+            <a:off x="4919167" y="1553319"/>
+            <a:ext cx="56693" cy="57393"/>
+          </a:xfrm>
+          <a:custGeom>
+            <a:avLst/>
+            <a:gdLst/>
+            <a:ahLst/>
+            <a:cxnLst/>
+            <a:rect l="l" t="t" r="r" b="b"/>
+            <a:pathLst>
+              <a:path w="56693" h="57393">
+                <a:moveTo>
+                  <a:pt x="0" y="0"/>
+                </a:moveTo>
+                <a:lnTo>
+                  <a:pt x="56693" y="0"/>
+                </a:lnTo>
+                <a:lnTo>
+                  <a:pt x="56693" y="57393"/>
+                </a:lnTo>
+                <a:lnTo>
+                  <a:pt x="0" y="57393"/>
+                </a:lnTo>
+                <a:lnTo>
+                  <a:pt x="0" y="0"/>
+                </a:lnTo>
+                <a:close/>
+              </a:path>
+            </a:pathLst>
+          </a:custGeom>
+          <a:solidFill>
+            <a:srgbClr val="FFF5C8"/>
+          </a:solidFill>
+          <a:ln w="14209">
+            <a:solidFill>
+              <a:srgbClr val="FF9500"/>
+            </a:solidFill>
+          </a:ln>
+        </p:spPr>
+        <p:style>
+          <a:lnRef idx="1">
+            <a:schemeClr val="accent1"/>
+          </a:lnRef>
+          <a:fillRef idx="3">
+            <a:schemeClr val="accent1"/>
+          </a:fillRef>
+          <a:effectRef idx="2">
+            <a:schemeClr val="accent1"/>
+          </a:effectRef>
+          <a:fontRef idx="minor">
+            <a:schemeClr val="lt1"/>
+          </a:fontRef>
+        </p:style>
+        <p:txBody>
+          <a:bodyPr rtlCol="0" anchor="ctr"/>
+          <a:lstStyle/>
+          <a:p>
+            <a:pPr algn="ctr"/>
+          </a:p>
+        </p:txBody>
+      </p:sp>
+      <p:sp>
+        <p:nvSpPr>
+          <p:cNvPr id="90" name="Editable path 83"/>
+          <p:cNvSpPr/>
+          <p:nvPr/>
+        </p:nvSpPr>
+        <p:spPr>
+          <a:xfrm>
+            <a:off x="5032552" y="1527232"/>
+            <a:ext cx="56693" cy="57393"/>
+          </a:xfrm>
+          <a:custGeom>
+            <a:avLst/>
+            <a:gdLst/>
+            <a:ahLst/>
+            <a:cxnLst/>
+            <a:rect l="l" t="t" r="r" b="b"/>
+            <a:pathLst>
+              <a:path w="56693" h="57393">
+                <a:moveTo>
+                  <a:pt x="0" y="0"/>
+                </a:moveTo>
+                <a:lnTo>
+                  <a:pt x="56693" y="0"/>
+                </a:lnTo>
+                <a:lnTo>
+                  <a:pt x="56693" y="57393"/>
+                </a:lnTo>
+                <a:lnTo>
+                  <a:pt x="0" y="57393"/>
+                </a:lnTo>
+                <a:lnTo>
+                  <a:pt x="0" y="0"/>
+                </a:lnTo>
+                <a:close/>
+              </a:path>
+            </a:pathLst>
+          </a:custGeom>
+          <a:solidFill>
+            <a:srgbClr val="FFF5C8"/>
+          </a:solidFill>
+          <a:ln w="14209">
+            <a:solidFill>
+              <a:srgbClr val="FF9500"/>
+            </a:solidFill>
+          </a:ln>
+        </p:spPr>
+        <p:style>
+          <a:lnRef idx="1">
+            <a:schemeClr val="accent1"/>
+          </a:lnRef>
+          <a:fillRef idx="3">
+            <a:schemeClr val="accent1"/>
+          </a:fillRef>
+          <a:effectRef idx="2">
+            <a:schemeClr val="accent1"/>
+          </a:effectRef>
+          <a:fontRef idx="minor">
+            <a:schemeClr val="lt1"/>
+          </a:fontRef>
+        </p:style>
+        <p:txBody>
+          <a:bodyPr rtlCol="0" anchor="ctr"/>
+          <a:lstStyle/>
+          <a:p>
+            <a:pPr algn="ctr"/>
+          </a:p>
+        </p:txBody>
+      </p:sp>
+      <p:sp>
+        <p:nvSpPr>
+          <p:cNvPr id="91" name="Editable path 84"/>
+          <p:cNvSpPr/>
+          <p:nvPr/>
+        </p:nvSpPr>
+        <p:spPr>
+          <a:xfrm>
+            <a:off x="4380585" y="1360273"/>
+            <a:ext cx="907085" cy="521748"/>
+          </a:xfrm>
+          <a:custGeom>
+            <a:avLst/>
+            <a:gdLst/>
+            <a:ahLst/>
+            <a:cxnLst/>
+            <a:rect l="l" t="t" r="r" b="b"/>
+            <a:pathLst>
+              <a:path w="907085" h="521748">
+                <a:moveTo>
+                  <a:pt x="0" y="521748"/>
+                </a:moveTo>
+                <a:lnTo>
+                  <a:pt x="113386" y="469573"/>
+                </a:lnTo>
+                <a:lnTo>
+                  <a:pt x="226772" y="378267"/>
+                </a:lnTo>
+                <a:lnTo>
+                  <a:pt x="340157" y="286961"/>
+                </a:lnTo>
+                <a:lnTo>
+                  <a:pt x="453543" y="247830"/>
+                </a:lnTo>
+                <a:lnTo>
+                  <a:pt x="566928" y="221743"/>
+                </a:lnTo>
+                <a:lnTo>
+                  <a:pt x="680314" y="195655"/>
+                </a:lnTo>
+                <a:lnTo>
+                  <a:pt x="793700" y="117393"/>
+                </a:lnTo>
+                <a:lnTo>
+                  <a:pt x="907085" y="0"/>
+                </a:lnTo>
+              </a:path>
+            </a:pathLst>
+          </a:custGeom>
+          <a:noFill/>
+          <a:ln w="28419">
+            <a:solidFill>
+              <a:srgbClr val="7C5AA6"/>
+            </a:solidFill>
+            <a:prstDash val="dash"/>
+          </a:ln>
+        </p:spPr>
+        <p:style>
+          <a:lnRef idx="1">
+            <a:schemeClr val="accent1"/>
+          </a:lnRef>
+          <a:fillRef idx="3">
+            <a:schemeClr val="accent1"/>
+          </a:fillRef>
+          <a:effectRef idx="2">
+            <a:schemeClr val="accent1"/>
+          </a:effectRef>
+          <a:fontRef idx="minor">
+            <a:schemeClr val="lt1"/>
+          </a:fontRef>
+        </p:style>
+        <p:txBody>
+          <a:bodyPr rtlCol="0" anchor="ctr"/>
+          <a:lstStyle/>
+          <a:p>
+            <a:pPr algn="ctr"/>
+          </a:p>
+        </p:txBody>
+      </p:sp>
+      <p:sp>
+        <p:nvSpPr>
+          <p:cNvPr id="92" name="Editable path 85"/>
+          <p:cNvSpPr/>
+          <p:nvPr/>
+        </p:nvSpPr>
+        <p:spPr>
+          <a:xfrm>
+            <a:off x="4607357" y="1555928"/>
+            <a:ext cx="453542" cy="182612"/>
+          </a:xfrm>
+          <a:custGeom>
+            <a:avLst/>
+            <a:gdLst/>
+            <a:ahLst/>
+            <a:cxnLst/>
+            <a:rect l="l" t="t" r="r" b="b"/>
+            <a:pathLst>
+              <a:path w="453542" h="182612">
+                <a:moveTo>
+                  <a:pt x="0" y="182612"/>
+                </a:moveTo>
+                <a:lnTo>
+                  <a:pt x="113385" y="91306"/>
+                </a:lnTo>
+                <a:lnTo>
+                  <a:pt x="226771" y="52175"/>
+                </a:lnTo>
+                <a:lnTo>
+                  <a:pt x="340156" y="26088"/>
+                </a:lnTo>
+                <a:lnTo>
+                  <a:pt x="453542" y="0"/>
+                </a:lnTo>
+              </a:path>
+            </a:pathLst>
+          </a:custGeom>
+          <a:noFill/>
+          <a:ln w="40261">
+            <a:solidFill>
+              <a:srgbClr val="FF9500"/>
+            </a:solidFill>
+          </a:ln>
+        </p:spPr>
+        <p:style>
+          <a:lnRef idx="1">
+            <a:schemeClr val="accent1"/>
+          </a:lnRef>
+          <a:fillRef idx="3">
+            <a:schemeClr val="accent1"/>
+          </a:fillRef>
+          <a:effectRef idx="2">
+            <a:schemeClr val="accent1"/>
+          </a:effectRef>
+          <a:fontRef idx="minor">
+            <a:schemeClr val="lt1"/>
+          </a:fontRef>
+        </p:style>
+        <p:txBody>
+          <a:bodyPr rtlCol="0" anchor="ctr"/>
+          <a:lstStyle/>
+          <a:p>
+            <a:pPr algn="ctr"/>
+          </a:p>
+        </p:txBody>
+      </p:sp>
       <p:pic>
         <p:nvPicPr>
-          <p:cNvPr id="65" name="Picture 64" descr="image.png"/>
+          <p:cNvPr id="93" name="Picture 92" descr="image.png"/>
           <p:cNvPicPr>
             <a:picLocks noChangeAspect="1"/>
           </p:cNvPicPr>
@@ -10543,7 +13353,7 @@
       </p:pic>
       <p:sp>
         <p:nvSpPr>
-          <p:cNvPr id="66" name="Editable path 58"/>
+          <p:cNvPr id="94" name="Editable path 86"/>
           <p:cNvSpPr/>
           <p:nvPr/>
         </p:nvSpPr>
@@ -10602,7 +13412,7 @@
       </p:sp>
       <p:sp>
         <p:nvSpPr>
-          <p:cNvPr id="67" name="Editable path 59"/>
+          <p:cNvPr id="95" name="Editable path 87"/>
           <p:cNvSpPr/>
           <p:nvPr/>
         </p:nvSpPr>
@@ -10661,7 +13471,7 @@
       </p:sp>
       <p:sp>
         <p:nvSpPr>
-          <p:cNvPr id="68" name="Editable path 60"/>
+          <p:cNvPr id="96" name="Editable path 88"/>
           <p:cNvSpPr/>
           <p:nvPr/>
         </p:nvSpPr>
@@ -10720,7 +13530,7 @@
       </p:sp>
       <p:sp>
         <p:nvSpPr>
-          <p:cNvPr id="69" name="Editable path 61"/>
+          <p:cNvPr id="97" name="Editable path 89"/>
           <p:cNvSpPr/>
           <p:nvPr/>
         </p:nvSpPr>
@@ -10779,7 +13589,7 @@
       </p:sp>
       <p:sp>
         <p:nvSpPr>
-          <p:cNvPr id="70" name="Editable path 62"/>
+          <p:cNvPr id="98" name="Editable path 90"/>
           <p:cNvSpPr/>
           <p:nvPr/>
         </p:nvSpPr>
@@ -10838,7 +13648,7 @@
       </p:sp>
       <p:sp>
         <p:nvSpPr>
-          <p:cNvPr id="71" name="Editable path 63"/>
+          <p:cNvPr id="99" name="Editable path 91"/>
           <p:cNvSpPr/>
           <p:nvPr/>
         </p:nvSpPr>
@@ -10897,7 +13707,7 @@
       </p:sp>
       <p:sp>
         <p:nvSpPr>
-          <p:cNvPr id="72" name="Editable path 64"/>
+          <p:cNvPr id="100" name="Editable path 92"/>
           <p:cNvSpPr/>
           <p:nvPr/>
         </p:nvSpPr>
@@ -10956,7 +13766,7 @@
       </p:sp>
       <p:sp>
         <p:nvSpPr>
-          <p:cNvPr id="73" name="Editable path 65"/>
+          <p:cNvPr id="101" name="Editable path 93"/>
           <p:cNvSpPr/>
           <p:nvPr/>
         </p:nvSpPr>
@@ -11015,7 +13825,7 @@
       </p:sp>
       <p:sp>
         <p:nvSpPr>
-          <p:cNvPr id="74" name="Editable path 66"/>
+          <p:cNvPr id="102" name="Editable path 94"/>
           <p:cNvSpPr/>
           <p:nvPr/>
         </p:nvSpPr>
@@ -11074,7 +13884,7 @@
       </p:sp>
       <p:sp>
         <p:nvSpPr>
-          <p:cNvPr id="75" name="Editable path 67"/>
+          <p:cNvPr id="103" name="Editable path 95"/>
           <p:cNvSpPr/>
           <p:nvPr/>
         </p:nvSpPr>
@@ -11133,7 +13943,7 @@
       </p:sp>
       <p:sp>
         <p:nvSpPr>
-          <p:cNvPr id="76" name="Editable path 68"/>
+          <p:cNvPr id="104" name="Editable path 96"/>
           <p:cNvSpPr/>
           <p:nvPr/>
         </p:nvSpPr>
@@ -11192,7 +14002,7 @@
       </p:sp>
       <p:sp>
         <p:nvSpPr>
-          <p:cNvPr id="77" name="Editable path 69"/>
+          <p:cNvPr id="105" name="Editable path 97"/>
           <p:cNvSpPr/>
           <p:nvPr/>
         </p:nvSpPr>
@@ -11251,7 +14061,7 @@
       </p:sp>
       <p:sp>
         <p:nvSpPr>
-          <p:cNvPr id="78" name="Editable path 70"/>
+          <p:cNvPr id="106" name="Editable path 98"/>
           <p:cNvSpPr/>
           <p:nvPr/>
         </p:nvSpPr>
@@ -11596,7 +14406,7 @@
       </p:sp>
       <p:sp>
         <p:nvSpPr>
-          <p:cNvPr id="79" name="Editable path 71"/>
+          <p:cNvPr id="107" name="Editable path 99"/>
           <p:cNvSpPr/>
           <p:nvPr/>
         </p:nvSpPr>
@@ -11941,7 +14751,7 @@
       </p:sp>
       <p:sp>
         <p:nvSpPr>
-          <p:cNvPr id="80" name="Editable path 72"/>
+          <p:cNvPr id="108" name="Editable path 100"/>
           <p:cNvSpPr/>
           <p:nvPr/>
         </p:nvSpPr>
@@ -12286,7 +15096,7 @@
       </p:sp>
       <p:sp>
         <p:nvSpPr>
-          <p:cNvPr id="81" name="Editable path 73"/>
+          <p:cNvPr id="109" name="Editable path 101"/>
           <p:cNvSpPr/>
           <p:nvPr/>
         </p:nvSpPr>
@@ -12631,7 +15441,7 @@
       </p:sp>
       <p:sp>
         <p:nvSpPr>
-          <p:cNvPr id="82" name="Editable path 74"/>
+          <p:cNvPr id="110" name="Editable path 102"/>
           <p:cNvSpPr/>
           <p:nvPr/>
         </p:nvSpPr>
@@ -12976,7 +15786,7 @@
       </p:sp>
       <p:sp>
         <p:nvSpPr>
-          <p:cNvPr id="83" name="Editable path 75"/>
+          <p:cNvPr id="111" name="Editable path 103"/>
           <p:cNvSpPr/>
           <p:nvPr/>
         </p:nvSpPr>
@@ -13321,7 +16131,7 @@
       </p:sp>
       <p:sp>
         <p:nvSpPr>
-          <p:cNvPr id="84" name="Editable path 76"/>
+          <p:cNvPr id="112" name="Editable path 104"/>
           <p:cNvSpPr/>
           <p:nvPr/>
         </p:nvSpPr>
@@ -13666,7 +16476,7 @@
       </p:sp>
       <p:pic>
         <p:nvPicPr>
-          <p:cNvPr id="85" name="Picture 84" descr="image.png"/>
+          <p:cNvPr id="113" name="Picture 112" descr="image.png"/>
           <p:cNvPicPr>
             <a:picLocks noChangeAspect="1"/>
           </p:cNvPicPr>
@@ -13690,7 +16500,7 @@
       </p:pic>
       <p:sp>
         <p:nvSpPr>
-          <p:cNvPr id="86" name="Editable path 77"/>
+          <p:cNvPr id="114" name="Editable path 105"/>
           <p:cNvSpPr/>
           <p:nvPr/>
         </p:nvSpPr>
@@ -13749,7 +16559,7 @@
       </p:sp>
       <p:sp>
         <p:nvSpPr>
-          <p:cNvPr id="87" name="Editable path 78"/>
+          <p:cNvPr id="115" name="Editable path 106"/>
           <p:cNvSpPr/>
           <p:nvPr/>
         </p:nvSpPr>
@@ -13808,7 +16618,7 @@
       </p:sp>
       <p:sp>
         <p:nvSpPr>
-          <p:cNvPr id="88" name="Editable path 79"/>
+          <p:cNvPr id="116" name="Editable path 107"/>
           <p:cNvSpPr/>
           <p:nvPr/>
         </p:nvSpPr>
@@ -13867,7 +16677,7 @@
       </p:sp>
       <p:sp>
         <p:nvSpPr>
-          <p:cNvPr id="89" name="Editable path 80"/>
+          <p:cNvPr id="117" name="Editable path 108"/>
           <p:cNvSpPr/>
           <p:nvPr/>
         </p:nvSpPr>
@@ -13926,7 +16736,7 @@
       </p:sp>
       <p:sp>
         <p:nvSpPr>
-          <p:cNvPr id="90" name="Editable path 81"/>
+          <p:cNvPr id="118" name="Editable path 109"/>
           <p:cNvSpPr/>
           <p:nvPr/>
         </p:nvSpPr>
@@ -13985,7 +16795,7 @@
       </p:sp>
       <p:sp>
         <p:nvSpPr>
-          <p:cNvPr id="91" name="Editable path 82"/>
+          <p:cNvPr id="119" name="Editable path 110"/>
           <p:cNvSpPr/>
           <p:nvPr/>
         </p:nvSpPr>
@@ -14044,7 +16854,7 @@
       </p:sp>
       <p:sp>
         <p:nvSpPr>
-          <p:cNvPr id="92" name="Editable path 83"/>
+          <p:cNvPr id="120" name="Editable path 111"/>
           <p:cNvSpPr/>
           <p:nvPr/>
         </p:nvSpPr>
@@ -14103,7 +16913,7 @@
       </p:sp>
       <p:sp>
         <p:nvSpPr>
-          <p:cNvPr id="93" name="Editable path 84"/>
+          <p:cNvPr id="121" name="Editable path 112"/>
           <p:cNvSpPr/>
           <p:nvPr/>
         </p:nvSpPr>
@@ -14162,7 +16972,7 @@
       </p:sp>
       <p:sp>
         <p:nvSpPr>
-          <p:cNvPr id="94" name="Editable path 85"/>
+          <p:cNvPr id="122" name="Editable path 113"/>
           <p:cNvSpPr/>
           <p:nvPr/>
         </p:nvSpPr>
@@ -14221,7 +17031,7 @@
       </p:sp>
       <p:sp>
         <p:nvSpPr>
-          <p:cNvPr id="95" name="Editable path 86"/>
+          <p:cNvPr id="123" name="Editable path 114"/>
           <p:cNvSpPr/>
           <p:nvPr/>
         </p:nvSpPr>
@@ -14280,7 +17090,7 @@
       </p:sp>
       <p:sp>
         <p:nvSpPr>
-          <p:cNvPr id="96" name="Editable path 87"/>
+          <p:cNvPr id="124" name="Editable path 115"/>
           <p:cNvSpPr/>
           <p:nvPr/>
         </p:nvSpPr>
@@ -14339,7 +17149,7 @@
       </p:sp>
       <p:sp>
         <p:nvSpPr>
-          <p:cNvPr id="97" name="Editable path 88"/>
+          <p:cNvPr id="125" name="Editable path 116"/>
           <p:cNvSpPr/>
           <p:nvPr/>
         </p:nvSpPr>
@@ -14398,7 +17208,7 @@
       </p:sp>
       <p:sp>
         <p:nvSpPr>
-          <p:cNvPr id="98" name="Editable path 89"/>
+          <p:cNvPr id="126" name="Editable path 117"/>
           <p:cNvSpPr/>
           <p:nvPr/>
         </p:nvSpPr>
@@ -14743,7 +17553,7 @@
       </p:sp>
       <p:sp>
         <p:nvSpPr>
-          <p:cNvPr id="99" name="Editable path 90"/>
+          <p:cNvPr id="127" name="Editable path 118"/>
           <p:cNvSpPr/>
           <p:nvPr/>
         </p:nvSpPr>
@@ -15088,7 +17898,7 @@
       </p:sp>
       <p:sp>
         <p:nvSpPr>
-          <p:cNvPr id="100" name="Editable path 91"/>
+          <p:cNvPr id="128" name="Editable path 119"/>
           <p:cNvSpPr/>
           <p:nvPr/>
         </p:nvSpPr>
@@ -15433,7 +18243,7 @@
       </p:sp>
       <p:sp>
         <p:nvSpPr>
-          <p:cNvPr id="101" name="Editable path 92"/>
+          <p:cNvPr id="129" name="Editable path 120"/>
           <p:cNvSpPr/>
           <p:nvPr/>
         </p:nvSpPr>
@@ -15778,7 +18588,7 @@
       </p:sp>
       <p:sp>
         <p:nvSpPr>
-          <p:cNvPr id="102" name="Editable path 93"/>
+          <p:cNvPr id="130" name="Editable path 121"/>
           <p:cNvSpPr/>
           <p:nvPr/>
         </p:nvSpPr>
@@ -16123,7 +18933,7 @@
       </p:sp>
       <p:sp>
         <p:nvSpPr>
-          <p:cNvPr id="103" name="Editable path 94"/>
+          <p:cNvPr id="131" name="Editable path 122"/>
           <p:cNvSpPr/>
           <p:nvPr/>
         </p:nvSpPr>
@@ -16468,7 +19278,7 @@
       </p:sp>
       <p:sp>
         <p:nvSpPr>
-          <p:cNvPr id="104" name="Editable path 95"/>
+          <p:cNvPr id="132" name="Editable path 123"/>
           <p:cNvSpPr/>
           <p:nvPr/>
         </p:nvSpPr>
@@ -16811,9 +19621,33 @@
           </a:p>
         </p:txBody>
       </p:sp>
-      <p:sp>
-        <p:nvSpPr>
-          <p:cNvPr id="105" name="TextBox 104"/>
+      <p:pic>
+        <p:nvPicPr>
+          <p:cNvPr id="133" name="Picture 132" descr="image.png"/>
+          <p:cNvPicPr>
+            <a:picLocks noChangeAspect="1"/>
+          </p:cNvPicPr>
+          <p:nvPr/>
+        </p:nvPicPr>
+        <p:blipFill>
+          <a:blip r:embed="rId10"/>
+          <a:stretch>
+            <a:fillRect/>
+          </a:stretch>
+        </p:blipFill>
+        <p:spPr>
+          <a:xfrm>
+            <a:off x="6247166" y="4226161"/>
+            <a:ext cx="1709347" cy="961507"/>
+          </a:xfrm>
+          <a:prstGeom prst="rect">
+            <a:avLst/>
+          </a:prstGeom>
+        </p:spPr>
+      </p:pic>
+      <p:sp>
+        <p:nvSpPr>
+          <p:cNvPr id="134" name="TextBox 133"/>
           <p:cNvSpPr txBox="1"/>
           <p:nvPr/>
         </p:nvSpPr>
@@ -16855,7 +19689,7 @@
       </p:sp>
       <p:sp>
         <p:nvSpPr>
-          <p:cNvPr id="106" name="TextBox 105"/>
+          <p:cNvPr id="135" name="TextBox 134"/>
           <p:cNvSpPr txBox="1"/>
           <p:nvPr/>
         </p:nvSpPr>
@@ -16897,7 +19731,7 @@
       </p:sp>
       <p:sp>
         <p:nvSpPr>
-          <p:cNvPr id="107" name="TextBox 106"/>
+          <p:cNvPr id="136" name="TextBox 135"/>
           <p:cNvSpPr txBox="1"/>
           <p:nvPr/>
         </p:nvSpPr>
@@ -16939,7 +19773,7 @@
       </p:sp>
       <p:sp>
         <p:nvSpPr>
-          <p:cNvPr id="108" name="TextBox 107"/>
+          <p:cNvPr id="137" name="TextBox 136"/>
           <p:cNvSpPr txBox="1"/>
           <p:nvPr/>
         </p:nvSpPr>
@@ -16981,7 +19815,7 @@
       </p:sp>
       <p:sp>
         <p:nvSpPr>
-          <p:cNvPr id="109" name="TextBox 108"/>
+          <p:cNvPr id="138" name="TextBox 137"/>
           <p:cNvSpPr txBox="1"/>
           <p:nvPr/>
         </p:nvSpPr>
@@ -17023,7 +19857,7 @@
       </p:sp>
       <p:sp>
         <p:nvSpPr>
-          <p:cNvPr id="110" name="TextBox 109"/>
+          <p:cNvPr id="139" name="TextBox 138"/>
           <p:cNvSpPr txBox="1"/>
           <p:nvPr/>
         </p:nvSpPr>
@@ -17065,7 +19899,7 @@
       </p:sp>
       <p:sp>
         <p:nvSpPr>
-          <p:cNvPr id="111" name="TextBox 110"/>
+          <p:cNvPr id="140" name="TextBox 139"/>
           <p:cNvSpPr txBox="1"/>
           <p:nvPr/>
         </p:nvSpPr>
@@ -17107,7 +19941,7 @@
       </p:sp>
       <p:sp>
         <p:nvSpPr>
-          <p:cNvPr id="112" name="TextBox 111"/>
+          <p:cNvPr id="141" name="TextBox 140"/>
           <p:cNvSpPr txBox="1"/>
           <p:nvPr/>
         </p:nvSpPr>
@@ -17149,7 +19983,7 @@
       </p:sp>
       <p:sp>
         <p:nvSpPr>
-          <p:cNvPr id="113" name="TextBox 112"/>
+          <p:cNvPr id="142" name="TextBox 141"/>
           <p:cNvSpPr txBox="1"/>
           <p:nvPr/>
         </p:nvSpPr>
@@ -17191,7 +20025,7 @@
       </p:sp>
       <p:sp>
         <p:nvSpPr>
-          <p:cNvPr id="114" name="TextBox 113"/>
+          <p:cNvPr id="143" name="TextBox 142"/>
           <p:cNvSpPr txBox="1"/>
           <p:nvPr/>
         </p:nvSpPr>
@@ -17233,14 +20067,14 @@
       </p:sp>
       <p:sp>
         <p:nvSpPr>
-          <p:cNvPr id="115" name="TextBox 114"/>
+          <p:cNvPr id="144" name="TextBox 143"/>
           <p:cNvSpPr txBox="1"/>
           <p:nvPr/>
         </p:nvSpPr>
         <p:spPr>
           <a:xfrm>
-            <a:off x="3404163" y="543524"/>
-            <a:ext cx="1647803" cy="213146"/>
+            <a:off x="3576605" y="543524"/>
+            <a:ext cx="1303037" cy="213146"/>
           </a:xfrm>
           <a:prstGeom prst="rect">
             <a:avLst/>
@@ -17268,21 +20102,21 @@
                 </a:solidFill>
                 <a:latin typeface="Times New Roman"/>
               </a:rPr>
-              <a:t>Object / hand targets</a:t>
+              <a:t>Shared planning</a:t>
             </a:r>
           </a:p>
         </p:txBody>
       </p:sp>
       <p:sp>
         <p:nvSpPr>
-          <p:cNvPr id="116" name="TextBox 115"/>
+          <p:cNvPr id="145" name="TextBox 144"/>
           <p:cNvSpPr txBox="1"/>
           <p:nvPr/>
         </p:nvSpPr>
         <p:spPr>
           <a:xfrm>
-            <a:off x="3469292" y="1579812"/>
-            <a:ext cx="1514905" cy="198937"/>
+            <a:off x="3138181" y="2146769"/>
+            <a:ext cx="916119" cy="187569"/>
           </a:xfrm>
           <a:prstGeom prst="rect">
             <a:avLst/>
@@ -17304,27 +20138,27 @@
               </a:spcAft>
             </a:pPr>
             <a:r>
-              <a:rPr sz="1305" b="0" i="0">
+              <a:rPr sz="1230" b="0" i="0">
                 <a:solidFill>
-                  <a:srgbClr val="2B2B2B"/>
+                  <a:srgbClr val="7C5AA6"/>
                 </a:solidFill>
                 <a:latin typeface="Times New Roman"/>
               </a:rPr>
-              <a:t>SE(3) path / pose goal</a:t>
+              <a:t>RRT-Connect</a:t>
             </a:r>
           </a:p>
         </p:txBody>
       </p:sp>
       <p:sp>
         <p:nvSpPr>
-          <p:cNvPr id="117" name="TextBox 116"/>
+          <p:cNvPr id="146" name="TextBox 145"/>
           <p:cNvSpPr txBox="1"/>
           <p:nvPr/>
         </p:nvSpPr>
         <p:spPr>
           <a:xfrm>
-            <a:off x="3637848" y="2097314"/>
-            <a:ext cx="190884" cy="284195"/>
+            <a:off x="4420045" y="2146769"/>
+            <a:ext cx="864225" cy="187569"/>
           </a:xfrm>
           <a:prstGeom prst="rect">
             <a:avLst/>
@@ -17346,27 +20180,27 @@
               </a:spcAft>
             </a:pPr>
             <a:r>
-              <a:rPr sz="1864" b="0" i="1">
+              <a:rPr sz="1230" b="0" i="0">
                 <a:solidFill>
                   <a:srgbClr val="7C5AA6"/>
                 </a:solidFill>
                 <a:latin typeface="Times New Roman"/>
               </a:rPr>
-              <a:t>T</a:t>
+              <a:t>MPC · 10 Hz</a:t>
             </a:r>
           </a:p>
         </p:txBody>
       </p:sp>
       <p:sp>
         <p:nvSpPr>
-          <p:cNvPr id="118" name="TextBox 117"/>
+          <p:cNvPr id="147" name="TextBox 146"/>
           <p:cNvSpPr txBox="1"/>
           <p:nvPr/>
         </p:nvSpPr>
         <p:spPr>
           <a:xfrm>
-            <a:off x="3818642" y="2071998"/>
-            <a:ext cx="124335" cy="198937"/>
+            <a:off x="3436542" y="2467265"/>
+            <a:ext cx="1088394" cy="173359"/>
           </a:xfrm>
           <a:prstGeom prst="rect">
             <a:avLst/>
@@ -17388,27 +20222,27 @@
               </a:spcAft>
             </a:pPr>
             <a:r>
-              <a:rPr sz="1305" b="0" i="0">
+              <a:rPr sz="1137" b="0" i="0">
                 <a:solidFill>
                   <a:srgbClr val="7C5AA6"/>
                 </a:solidFill>
                 <a:latin typeface="Times New Roman"/>
               </a:rPr>
-              <a:t>*</a:t>
+              <a:t>Spatial schedule: |</a:t>
             </a:r>
           </a:p>
         </p:txBody>
       </p:sp>
       <p:sp>
         <p:nvSpPr>
-          <p:cNvPr id="119" name="TextBox 118"/>
+          <p:cNvPr id="148" name="TextBox 147"/>
           <p:cNvSpPr txBox="1"/>
           <p:nvPr/>
         </p:nvSpPr>
         <p:spPr>
           <a:xfrm>
-            <a:off x="3769525" y="2218092"/>
-            <a:ext cx="170422" cy="198937"/>
+            <a:off x="4488939" y="2467265"/>
+            <a:ext cx="126697" cy="173359"/>
           </a:xfrm>
           <a:prstGeom prst="rect">
             <a:avLst/>
@@ -17430,27 +20264,27 @@
               </a:spcAft>
             </a:pPr>
             <a:r>
-              <a:rPr sz="1305" b="0" i="1">
+              <a:rPr sz="1137" b="0" i="1">
                 <a:solidFill>
                   <a:srgbClr val="7C5AA6"/>
                 </a:solidFill>
                 <a:latin typeface="Times New Roman"/>
               </a:rPr>
-              <a:t>ih</a:t>
+              <a:t>ϕ</a:t>
             </a:r>
           </a:p>
         </p:txBody>
       </p:sp>
       <p:sp>
         <p:nvSpPr>
-          <p:cNvPr id="120" name="TextBox 119"/>
+          <p:cNvPr id="149" name="TextBox 148"/>
           <p:cNvSpPr txBox="1"/>
           <p:nvPr/>
         </p:nvSpPr>
         <p:spPr>
           <a:xfrm>
-            <a:off x="3970104" y="2097314"/>
-            <a:ext cx="221436" cy="284195"/>
+            <a:off x="4579890" y="2467265"/>
+            <a:ext cx="351147" cy="173359"/>
           </a:xfrm>
           <a:prstGeom prst="rect">
             <a:avLst/>
@@ -17472,27 +20306,27 @@
               </a:spcAft>
             </a:pPr>
             <a:r>
-              <a:rPr sz="1864" b="0" i="0">
+              <a:rPr sz="1137" b="0" i="0">
                 <a:solidFill>
                   <a:srgbClr val="7C5AA6"/>
                 </a:solidFill>
                 <a:latin typeface="Times New Roman"/>
               </a:rPr>
-              <a:t>=</a:t>
+              <a:t>|≤90</a:t>
             </a:r>
           </a:p>
         </p:txBody>
       </p:sp>
       <p:sp>
         <p:nvSpPr>
-          <p:cNvPr id="121" name="TextBox 120"/>
+          <p:cNvPr id="150" name="TextBox 149"/>
           <p:cNvSpPr txBox="1"/>
           <p:nvPr/>
         </p:nvSpPr>
         <p:spPr>
           <a:xfrm>
-            <a:off x="4166530" y="2097314"/>
-            <a:ext cx="190884" cy="284195"/>
+            <a:off x="4912069" y="2452715"/>
+            <a:ext cx="60675" cy="121351"/>
           </a:xfrm>
           <a:prstGeom prst="rect">
             <a:avLst/>
@@ -17514,27 +20348,27 @@
               </a:spcAft>
             </a:pPr>
             <a:r>
-              <a:rPr sz="1864" b="0" i="1">
+              <a:rPr sz="796" b="0" i="0">
                 <a:solidFill>
                   <a:srgbClr val="7C5AA6"/>
                 </a:solidFill>
                 <a:latin typeface="Times New Roman"/>
               </a:rPr>
-              <a:t>T</a:t>
+              <a:t>∘</a:t>
             </a:r>
           </a:p>
         </p:txBody>
       </p:sp>
       <p:sp>
         <p:nvSpPr>
-          <p:cNvPr id="122" name="TextBox 121"/>
+          <p:cNvPr id="151" name="TextBox 150"/>
           <p:cNvSpPr txBox="1"/>
           <p:nvPr/>
         </p:nvSpPr>
         <p:spPr>
           <a:xfrm>
-            <a:off x="4347324" y="2071998"/>
-            <a:ext cx="124335" cy="198937"/>
+            <a:off x="3463926" y="3072749"/>
+            <a:ext cx="1522460" cy="184727"/>
           </a:xfrm>
           <a:prstGeom prst="rect">
             <a:avLst/>
@@ -17556,314 +20390,20 @@
               </a:spcAft>
             </a:pPr>
             <a:r>
-              <a:rPr sz="1305" b="0" i="0">
+              <a:rPr sz="1212" b="1" i="0">
                 <a:solidFill>
-                  <a:srgbClr val="7C5AA6"/>
+                  <a:srgbClr val="6B7280"/>
                 </a:solidFill>
                 <a:latin typeface="Times New Roman"/>
               </a:rPr>
-              <a:t>*</a:t>
+              <a:t>Acquisition supervisor</a:t>
             </a:r>
           </a:p>
         </p:txBody>
       </p:sp>
       <p:sp>
         <p:nvSpPr>
-          <p:cNvPr id="123" name="TextBox 122"/>
-          <p:cNvSpPr txBox="1"/>
-          <p:nvPr/>
-        </p:nvSpPr>
-        <p:spPr>
-          <a:xfrm>
-            <a:off x="4298207" y="2218092"/>
-            <a:ext cx="161139" cy="198937"/>
-          </a:xfrm>
-          <a:prstGeom prst="rect">
-            <a:avLst/>
-          </a:prstGeom>
-          <a:noFill/>
-        </p:spPr>
-        <p:txBody>
-          <a:bodyPr wrap="none" lIns="0" rIns="0" tIns="0" bIns="0">
-            <a:spAutoFit/>
-          </a:bodyPr>
-          <a:lstStyle/>
-          <a:p>
-            <a:pPr>
-              <a:spcBef>
-                <a:spcPts val="0"/>
-              </a:spcBef>
-              <a:spcAft>
-                <a:spcPts val="0"/>
-              </a:spcAft>
-            </a:pPr>
-            <a:r>
-              <a:rPr sz="1305" b="0" i="1">
-                <a:solidFill>
-                  <a:srgbClr val="7C5AA6"/>
-                </a:solidFill>
-                <a:latin typeface="Times New Roman"/>
-              </a:rPr>
-              <a:t>O</a:t>
-            </a:r>
-          </a:p>
-        </p:txBody>
-      </p:sp>
-      <p:sp>
-        <p:nvSpPr>
-          <p:cNvPr id="124" name="TextBox 123"/>
-          <p:cNvSpPr txBox="1"/>
-          <p:nvPr/>
-        </p:nvSpPr>
-        <p:spPr>
-          <a:xfrm>
-            <a:off x="4629912" y="2042547"/>
-            <a:ext cx="82890" cy="284195"/>
-          </a:xfrm>
-          <a:prstGeom prst="rect">
-            <a:avLst/>
-          </a:prstGeom>
-          <a:noFill/>
-        </p:spPr>
-        <p:txBody>
-          <a:bodyPr wrap="none" lIns="0" rIns="0" tIns="0" bIns="0">
-            <a:spAutoFit/>
-          </a:bodyPr>
-          <a:lstStyle/>
-          <a:p>
-            <a:pPr>
-              <a:spcBef>
-                <a:spcPts val="0"/>
-              </a:spcBef>
-              <a:spcAft>
-                <a:spcPts val="0"/>
-              </a:spcAft>
-            </a:pPr>
-            <a:r>
-              <a:rPr sz="1864" b="0" i="0">
-                <a:solidFill>
-                  <a:srgbClr val="7C5AA6"/>
-                </a:solidFill>
-                <a:latin typeface="Times New Roman"/>
-              </a:rPr>
-              <a:t>̄</a:t>
-            </a:r>
-          </a:p>
-        </p:txBody>
-      </p:sp>
-      <p:sp>
-        <p:nvSpPr>
-          <p:cNvPr id="125" name="TextBox 124"/>
-          <p:cNvSpPr txBox="1"/>
-          <p:nvPr/>
-        </p:nvSpPr>
-        <p:spPr>
-          <a:xfrm>
-            <a:off x="4493087" y="2097314"/>
-            <a:ext cx="190884" cy="284195"/>
-          </a:xfrm>
-          <a:prstGeom prst="rect">
-            <a:avLst/>
-          </a:prstGeom>
-          <a:noFill/>
-        </p:spPr>
-        <p:txBody>
-          <a:bodyPr wrap="none" lIns="0" rIns="0" tIns="0" bIns="0">
-            <a:spAutoFit/>
-          </a:bodyPr>
-          <a:lstStyle/>
-          <a:p>
-            <a:pPr>
-              <a:spcBef>
-                <a:spcPts val="0"/>
-              </a:spcBef>
-              <a:spcAft>
-                <a:spcPts val="0"/>
-              </a:spcAft>
-            </a:pPr>
-            <a:r>
-              <a:rPr sz="1864" b="0" i="1">
-                <a:solidFill>
-                  <a:srgbClr val="7C5AA6"/>
-                </a:solidFill>
-                <a:latin typeface="Times New Roman"/>
-              </a:rPr>
-              <a:t>T</a:t>
-            </a:r>
-          </a:p>
-        </p:txBody>
-      </p:sp>
-      <p:sp>
-        <p:nvSpPr>
-          <p:cNvPr id="126" name="TextBox 125"/>
-          <p:cNvSpPr txBox="1"/>
-          <p:nvPr/>
-        </p:nvSpPr>
-        <p:spPr>
-          <a:xfrm>
-            <a:off x="4632546" y="2186786"/>
-            <a:ext cx="170422" cy="198937"/>
-          </a:xfrm>
-          <a:prstGeom prst="rect">
-            <a:avLst/>
-          </a:prstGeom>
-          <a:noFill/>
-        </p:spPr>
-        <p:txBody>
-          <a:bodyPr wrap="none" lIns="0" rIns="0" tIns="0" bIns="0">
-            <a:spAutoFit/>
-          </a:bodyPr>
-          <a:lstStyle/>
-          <a:p>
-            <a:pPr>
-              <a:spcBef>
-                <a:spcPts val="0"/>
-              </a:spcBef>
-              <a:spcAft>
-                <a:spcPts val="0"/>
-              </a:spcAft>
-            </a:pPr>
-            <a:r>
-              <a:rPr sz="1305" b="0" i="1">
-                <a:solidFill>
-                  <a:srgbClr val="7C5AA6"/>
-                </a:solidFill>
-                <a:latin typeface="Times New Roman"/>
-              </a:rPr>
-              <a:t>ih</a:t>
-            </a:r>
-          </a:p>
-        </p:txBody>
-      </p:sp>
-      <p:sp>
-        <p:nvSpPr>
-          <p:cNvPr id="127" name="TextBox 126"/>
-          <p:cNvSpPr txBox="1"/>
-          <p:nvPr/>
-        </p:nvSpPr>
-        <p:spPr>
-          <a:xfrm>
-            <a:off x="3571239" y="2614787"/>
-            <a:ext cx="1311990" cy="198937"/>
-          </a:xfrm>
-          <a:prstGeom prst="rect">
-            <a:avLst/>
-          </a:prstGeom>
-          <a:noFill/>
-        </p:spPr>
-        <p:txBody>
-          <a:bodyPr wrap="none" lIns="0" rIns="0" tIns="0" bIns="0">
-            <a:spAutoFit/>
-          </a:bodyPr>
-          <a:lstStyle/>
-          <a:p>
-            <a:pPr>
-              <a:spcBef>
-                <a:spcPts val="0"/>
-              </a:spcBef>
-              <a:spcAft>
-                <a:spcPts val="0"/>
-              </a:spcAft>
-            </a:pPr>
-            <a:r>
-              <a:rPr sz="1305" b="0" i="0">
-                <a:solidFill>
-                  <a:srgbClr val="2B2B2B"/>
-                </a:solidFill>
-                <a:latin typeface="Times New Roman"/>
-              </a:rPr>
-              <a:t>Measured-progress</a:t>
-            </a:r>
-          </a:p>
-        </p:txBody>
-      </p:sp>
-      <p:sp>
-        <p:nvSpPr>
-          <p:cNvPr id="128" name="TextBox 127"/>
-          <p:cNvSpPr txBox="1"/>
-          <p:nvPr/>
-        </p:nvSpPr>
-        <p:spPr>
-          <a:xfrm>
-            <a:off x="3865426" y="2781271"/>
-            <a:ext cx="722804" cy="198937"/>
-          </a:xfrm>
-          <a:prstGeom prst="rect">
-            <a:avLst/>
-          </a:prstGeom>
-          <a:noFill/>
-        </p:spPr>
-        <p:txBody>
-          <a:bodyPr wrap="none" lIns="0" rIns="0" tIns="0" bIns="0">
-            <a:spAutoFit/>
-          </a:bodyPr>
-          <a:lstStyle/>
-          <a:p>
-            <a:pPr>
-              <a:spcBef>
-                <a:spcPts val="0"/>
-              </a:spcBef>
-              <a:spcAft>
-                <a:spcPts val="0"/>
-              </a:spcAft>
-            </a:pPr>
-            <a:r>
-              <a:rPr sz="1305" b="0" i="0">
-                <a:solidFill>
-                  <a:srgbClr val="2B2B2B"/>
-                </a:solidFill>
-                <a:latin typeface="Times New Roman"/>
-              </a:rPr>
-              <a:t>lookahead</a:t>
-            </a:r>
-          </a:p>
-        </p:txBody>
-      </p:sp>
-      <p:sp>
-        <p:nvSpPr>
-          <p:cNvPr id="129" name="TextBox 128"/>
-          <p:cNvSpPr txBox="1"/>
-          <p:nvPr/>
-        </p:nvSpPr>
-        <p:spPr>
-          <a:xfrm>
-            <a:off x="3374745" y="3238604"/>
-            <a:ext cx="1700106" cy="184727"/>
-          </a:xfrm>
-          <a:prstGeom prst="rect">
-            <a:avLst/>
-          </a:prstGeom>
-          <a:noFill/>
-        </p:spPr>
-        <p:txBody>
-          <a:bodyPr wrap="none" lIns="0" rIns="0" tIns="0" bIns="0">
-            <a:spAutoFit/>
-          </a:bodyPr>
-          <a:lstStyle/>
-          <a:p>
-            <a:pPr>
-              <a:spcBef>
-                <a:spcPts val="0"/>
-              </a:spcBef>
-              <a:spcAft>
-                <a:spcPts val="0"/>
-              </a:spcAft>
-            </a:pPr>
-            <a:r>
-              <a:rPr sz="1212" b="0" i="0">
-                <a:solidFill>
-                  <a:srgbClr val="2B2B2B"/>
-                </a:solidFill>
-                <a:latin typeface="Times New Roman"/>
-              </a:rPr>
-              <a:t>Object pose + hand targets</a:t>
-            </a:r>
-          </a:p>
-        </p:txBody>
-      </p:sp>
-      <p:sp>
-        <p:nvSpPr>
-          <p:cNvPr id="130" name="TextBox 129"/>
+          <p:cNvPr id="152" name="TextBox 151"/>
           <p:cNvSpPr txBox="1"/>
           <p:nvPr/>
         </p:nvSpPr>
@@ -17905,7 +20445,7 @@
       </p:sp>
       <p:sp>
         <p:nvSpPr>
-          <p:cNvPr id="131" name="TextBox 130"/>
+          <p:cNvPr id="153" name="TextBox 152"/>
           <p:cNvSpPr txBox="1"/>
           <p:nvPr/>
         </p:nvSpPr>
@@ -17947,7 +20487,7 @@
       </p:sp>
       <p:sp>
         <p:nvSpPr>
-          <p:cNvPr id="132" name="TextBox 131"/>
+          <p:cNvPr id="154" name="TextBox 153"/>
           <p:cNvSpPr txBox="1"/>
           <p:nvPr/>
         </p:nvSpPr>
@@ -17989,7 +20529,7 @@
       </p:sp>
       <p:sp>
         <p:nvSpPr>
-          <p:cNvPr id="133" name="TextBox 132"/>
+          <p:cNvPr id="155" name="TextBox 154"/>
           <p:cNvSpPr txBox="1"/>
           <p:nvPr/>
         </p:nvSpPr>
@@ -18031,7 +20571,7 @@
       </p:sp>
       <p:sp>
         <p:nvSpPr>
-          <p:cNvPr id="134" name="TextBox 133"/>
+          <p:cNvPr id="156" name="TextBox 155"/>
           <p:cNvSpPr txBox="1"/>
           <p:nvPr/>
         </p:nvSpPr>
@@ -18073,7 +20613,7 @@
       </p:sp>
       <p:sp>
         <p:nvSpPr>
-          <p:cNvPr id="135" name="TextBox 134"/>
+          <p:cNvPr id="157" name="TextBox 156"/>
           <p:cNvSpPr txBox="1"/>
           <p:nvPr/>
         </p:nvSpPr>
@@ -18115,7 +20655,7 @@
       </p:sp>
       <p:sp>
         <p:nvSpPr>
-          <p:cNvPr id="136" name="TextBox 135"/>
+          <p:cNvPr id="158" name="TextBox 157"/>
           <p:cNvSpPr txBox="1"/>
           <p:nvPr/>
         </p:nvSpPr>
@@ -18157,7 +20697,7 @@
       </p:sp>
       <p:sp>
         <p:nvSpPr>
-          <p:cNvPr id="137" name="TextBox 136"/>
+          <p:cNvPr id="159" name="TextBox 158"/>
           <p:cNvSpPr txBox="1"/>
           <p:nvPr/>
         </p:nvSpPr>
@@ -18199,7 +20739,7 @@
       </p:sp>
       <p:sp>
         <p:nvSpPr>
-          <p:cNvPr id="138" name="TextBox 137"/>
+          <p:cNvPr id="160" name="TextBox 159"/>
           <p:cNvSpPr txBox="1"/>
           <p:nvPr/>
         </p:nvSpPr>
@@ -18241,7 +20781,7 @@
       </p:sp>
       <p:sp>
         <p:nvSpPr>
-          <p:cNvPr id="139" name="TextBox 138"/>
+          <p:cNvPr id="161" name="TextBox 160"/>
           <p:cNvSpPr txBox="1"/>
           <p:nvPr/>
         </p:nvSpPr>
@@ -18283,7 +20823,7 @@
       </p:sp>
       <p:sp>
         <p:nvSpPr>
-          <p:cNvPr id="140" name="TextBox 139"/>
+          <p:cNvPr id="162" name="TextBox 161"/>
           <p:cNvSpPr txBox="1"/>
           <p:nvPr/>
         </p:nvSpPr>
@@ -18325,7 +20865,7 @@
       </p:sp>
       <p:sp>
         <p:nvSpPr>
-          <p:cNvPr id="141" name="TextBox 140"/>
+          <p:cNvPr id="163" name="TextBox 162"/>
           <p:cNvSpPr txBox="1"/>
           <p:nvPr/>
         </p:nvSpPr>
@@ -18367,7 +20907,7 @@
       </p:sp>
       <p:sp>
         <p:nvSpPr>
-          <p:cNvPr id="142" name="TextBox 141"/>
+          <p:cNvPr id="164" name="TextBox 163"/>
           <p:cNvSpPr txBox="1"/>
           <p:nvPr/>
         </p:nvSpPr>
@@ -18409,7 +20949,7 @@
       </p:sp>
       <p:sp>
         <p:nvSpPr>
-          <p:cNvPr id="143" name="TextBox 142"/>
+          <p:cNvPr id="165" name="TextBox 164"/>
           <p:cNvSpPr txBox="1"/>
           <p:nvPr/>
         </p:nvSpPr>
@@ -18451,7 +20991,7 @@
       </p:sp>
       <p:sp>
         <p:nvSpPr>
-          <p:cNvPr id="144" name="TextBox 143"/>
+          <p:cNvPr id="166" name="TextBox 165"/>
           <p:cNvSpPr txBox="1"/>
           <p:nvPr/>
         </p:nvSpPr>
@@ -18493,7 +21033,7 @@
       </p:sp>
       <p:sp>
         <p:nvSpPr>
-          <p:cNvPr id="145" name="TextBox 144"/>
+          <p:cNvPr id="167" name="TextBox 166"/>
           <p:cNvSpPr txBox="1"/>
           <p:nvPr/>
         </p:nvSpPr>
@@ -18535,7 +21075,7 @@
       </p:sp>
       <p:sp>
         <p:nvSpPr>
-          <p:cNvPr id="146" name="TextBox 145"/>
+          <p:cNvPr id="168" name="TextBox 167"/>
           <p:cNvSpPr txBox="1"/>
           <p:nvPr/>
         </p:nvSpPr>
@@ -18577,7 +21117,7 @@
       </p:sp>
       <p:sp>
         <p:nvSpPr>
-          <p:cNvPr id="147" name="TextBox 146"/>
+          <p:cNvPr id="169" name="TextBox 168"/>
           <p:cNvSpPr txBox="1"/>
           <p:nvPr/>
         </p:nvSpPr>
@@ -18619,7 +21159,7 @@
       </p:sp>
       <p:sp>
         <p:nvSpPr>
-          <p:cNvPr id="148" name="TextBox 147"/>
+          <p:cNvPr id="170" name="TextBox 169"/>
           <p:cNvSpPr txBox="1"/>
           <p:nvPr/>
         </p:nvSpPr>
@@ -18661,7 +21201,7 @@
       </p:sp>
       <p:sp>
         <p:nvSpPr>
-          <p:cNvPr id="149" name="TextBox 148"/>
+          <p:cNvPr id="171" name="TextBox 170"/>
           <p:cNvSpPr txBox="1"/>
           <p:nvPr/>
         </p:nvSpPr>
@@ -18703,7 +21243,7 @@
       </p:sp>
       <p:sp>
         <p:nvSpPr>
-          <p:cNvPr id="150" name="TextBox 149"/>
+          <p:cNvPr id="172" name="TextBox 171"/>
           <p:cNvSpPr txBox="1"/>
           <p:nvPr/>
         </p:nvSpPr>
@@ -18745,7 +21285,7 @@
       </p:sp>
       <p:sp>
         <p:nvSpPr>
-          <p:cNvPr id="151" name="Editable path 96"/>
+          <p:cNvPr id="173" name="Editable path 124"/>
           <p:cNvSpPr/>
           <p:nvPr/>
         </p:nvSpPr>
@@ -18812,7 +21352,7 @@
       </p:sp>
       <p:sp>
         <p:nvSpPr>
-          <p:cNvPr id="152" name="TextBox 151"/>
+          <p:cNvPr id="174" name="TextBox 173"/>
           <p:cNvSpPr txBox="1"/>
           <p:nvPr/>
         </p:nvSpPr>
@@ -18854,7 +21394,7 @@
       </p:sp>
       <p:sp>
         <p:nvSpPr>
-          <p:cNvPr id="153" name="TextBox 152"/>
+          <p:cNvPr id="175" name="TextBox 174"/>
           <p:cNvSpPr txBox="1"/>
           <p:nvPr/>
         </p:nvSpPr>
@@ -18896,7 +21436,7 @@
       </p:sp>
       <p:sp>
         <p:nvSpPr>
-          <p:cNvPr id="154" name="TextBox 153"/>
+          <p:cNvPr id="176" name="TextBox 175"/>
           <p:cNvSpPr txBox="1"/>
           <p:nvPr/>
         </p:nvSpPr>
@@ -18938,7 +21478,7 @@
       </p:sp>
       <p:sp>
         <p:nvSpPr>
-          <p:cNvPr id="155" name="TextBox 154"/>
+          <p:cNvPr id="177" name="TextBox 176"/>
           <p:cNvSpPr txBox="1"/>
           <p:nvPr/>
         </p:nvSpPr>
@@ -18980,7 +21520,7 @@
       </p:sp>
       <p:sp>
         <p:nvSpPr>
-          <p:cNvPr id="156" name="TextBox 155"/>
+          <p:cNvPr id="178" name="TextBox 177"/>
           <p:cNvSpPr txBox="1"/>
           <p:nvPr/>
         </p:nvSpPr>
@@ -19022,7 +21562,7 @@
       </p:sp>
       <p:sp>
         <p:nvSpPr>
-          <p:cNvPr id="157" name="TextBox 156"/>
+          <p:cNvPr id="179" name="TextBox 178"/>
           <p:cNvSpPr txBox="1"/>
           <p:nvPr/>
         </p:nvSpPr>
@@ -19064,7 +21604,7 @@
       </p:sp>
       <p:sp>
         <p:nvSpPr>
-          <p:cNvPr id="158" name="TextBox 157"/>
+          <p:cNvPr id="180" name="TextBox 179"/>
           <p:cNvSpPr txBox="1"/>
           <p:nvPr/>
         </p:nvSpPr>
@@ -19106,7 +21646,7 @@
       </p:sp>
       <p:sp>
         <p:nvSpPr>
-          <p:cNvPr id="159" name="Editable path 97"/>
+          <p:cNvPr id="181" name="Editable path 125"/>
           <p:cNvSpPr/>
           <p:nvPr/>
         </p:nvSpPr>
@@ -19173,7 +21713,7 @@
       </p:sp>
       <p:sp>
         <p:nvSpPr>
-          <p:cNvPr id="160" name="TextBox 159"/>
+          <p:cNvPr id="182" name="TextBox 181"/>
           <p:cNvSpPr txBox="1"/>
           <p:nvPr/>
         </p:nvSpPr>
@@ -19215,7 +21755,7 @@
       </p:sp>
       <p:sp>
         <p:nvSpPr>
-          <p:cNvPr id="161" name="Editable path 98"/>
+          <p:cNvPr id="183" name="Editable path 126"/>
           <p:cNvSpPr/>
           <p:nvPr/>
         </p:nvSpPr>
@@ -19282,7 +21822,7 @@
       </p:sp>
       <p:sp>
         <p:nvSpPr>
-          <p:cNvPr id="162" name="TextBox 161"/>
+          <p:cNvPr id="184" name="TextBox 183"/>
           <p:cNvSpPr txBox="1"/>
           <p:nvPr/>
         </p:nvSpPr>
@@ -19324,7 +21864,7 @@
       </p:sp>
       <p:sp>
         <p:nvSpPr>
-          <p:cNvPr id="163" name="TextBox 162"/>
+          <p:cNvPr id="185" name="TextBox 184"/>
           <p:cNvSpPr txBox="1"/>
           <p:nvPr/>
         </p:nvSpPr>
@@ -19366,7 +21906,7 @@
       </p:sp>
       <p:sp>
         <p:nvSpPr>
-          <p:cNvPr id="164" name="TextBox 163"/>
+          <p:cNvPr id="186" name="TextBox 185"/>
           <p:cNvSpPr txBox="1"/>
           <p:nvPr/>
         </p:nvSpPr>
@@ -19408,14 +21948,14 @@
       </p:sp>
       <p:sp>
         <p:nvSpPr>
-          <p:cNvPr id="165" name="TextBox 164"/>
+          <p:cNvPr id="187" name="TextBox 186"/>
           <p:cNvSpPr txBox="1"/>
           <p:nvPr/>
         </p:nvSpPr>
         <p:spPr>
           <a:xfrm>
-            <a:off x="7215979" y="4375077"/>
-            <a:ext cx="3530303" cy="198937"/>
+            <a:off x="9127917" y="4313933"/>
+            <a:ext cx="1883152" cy="176201"/>
           </a:xfrm>
           <a:prstGeom prst="rect">
             <a:avLst/>
@@ -19437,27 +21977,27 @@
               </a:spcAft>
             </a:pPr>
             <a:r>
-              <a:rPr sz="1305" b="0" i="0">
+              <a:rPr sz="1156" b="0" i="0">
                 <a:solidFill>
                   <a:srgbClr val="2B2B2B"/>
                 </a:solidFill>
                 <a:latin typeface="Times New Roman"/>
               </a:rPr>
-              <a:t>SE(2) RRT → MPC (10 Hz) → 21-action local actor</a:t>
+              <a:t>SE(2) RRT → MPC (10 Hz) →</a:t>
             </a:r>
           </a:p>
         </p:txBody>
       </p:sp>
       <p:sp>
         <p:nvSpPr>
-          <p:cNvPr id="166" name="TextBox 165"/>
+          <p:cNvPr id="188" name="TextBox 187"/>
           <p:cNvSpPr txBox="1"/>
           <p:nvPr/>
         </p:nvSpPr>
         <p:spPr>
           <a:xfrm>
-            <a:off x="7398042" y="4716118"/>
-            <a:ext cx="3142260" cy="190411"/>
+            <a:off x="9449857" y="4456142"/>
+            <a:ext cx="1243687" cy="176201"/>
           </a:xfrm>
           <a:prstGeom prst="rect">
             <a:avLst/>
@@ -19479,27 +22019,27 @@
               </a:spcAft>
             </a:pPr>
             <a:r>
-              <a:rPr sz="1249" b="0" i="0">
+              <a:rPr sz="1156" b="0" i="0">
                 <a:solidFill>
                   <a:srgbClr val="2B2B2B"/>
                 </a:solidFill>
                 <a:latin typeface="Times New Roman"/>
               </a:rPr>
-              <a:t>Imitation / DAgger · phase and height supervisor</a:t>
+              <a:t>21-action local actor</a:t>
             </a:r>
           </a:p>
         </p:txBody>
       </p:sp>
       <p:sp>
         <p:nvSpPr>
-          <p:cNvPr id="167" name="TextBox 166"/>
+          <p:cNvPr id="189" name="TextBox 188"/>
           <p:cNvSpPr txBox="1"/>
           <p:nvPr/>
         </p:nvSpPr>
         <p:spPr>
           <a:xfrm>
-            <a:off x="7719057" y="5023577"/>
-            <a:ext cx="2505176" cy="190411"/>
+            <a:off x="8727711" y="4755968"/>
+            <a:ext cx="2720166" cy="164833"/>
           </a:xfrm>
           <a:prstGeom prst="rect">
             <a:avLst/>
@@ -19521,13 +22061,273 @@
               </a:spcAft>
             </a:pPr>
             <a:r>
-              <a:rPr sz="1249" b="0" i="0">
+              <a:rPr sz="1081" b="0" i="0">
+                <a:solidFill>
+                  <a:srgbClr val="2B2B2B"/>
+                </a:solidFill>
+                <a:latin typeface="Times New Roman"/>
+              </a:rPr>
+              <a:t>Imitation / DAgger · phase and height supervisor</a:t>
+            </a:r>
+          </a:p>
+        </p:txBody>
+      </p:sp>
+      <p:sp>
+        <p:nvSpPr>
+          <p:cNvPr id="190" name="TextBox 189"/>
+          <p:cNvSpPr txBox="1"/>
+          <p:nvPr/>
+        </p:nvSpPr>
+        <p:spPr>
+          <a:xfrm>
+            <a:off x="9000806" y="5052247"/>
+            <a:ext cx="2168659" cy="164833"/>
+          </a:xfrm>
+          <a:prstGeom prst="rect">
+            <a:avLst/>
+          </a:prstGeom>
+          <a:noFill/>
+        </p:spPr>
+        <p:txBody>
+          <a:bodyPr wrap="none" lIns="0" rIns="0" tIns="0" bIns="0">
+            <a:spAutoFit/>
+          </a:bodyPr>
+          <a:lstStyle/>
+          <a:p>
+            <a:pPr>
+              <a:spcBef>
+                <a:spcPts val="0"/>
+              </a:spcBef>
+              <a:spcAft>
+                <a:spcPts val="0"/>
+              </a:spcAft>
+            </a:pPr>
+            <a:r>
+              <a:rPr sz="1081" b="0" i="0">
                 <a:solidFill>
                   <a:srgbClr val="2B2B2B"/>
                 </a:solidFill>
                 <a:latin typeface="Times New Roman"/>
               </a:rPr>
               <a:t>Contact-gated welds · MuJoCo 200 Hz</a:t>
+            </a:r>
+          </a:p>
+        </p:txBody>
+      </p:sp>
+      <p:sp>
+        <p:nvSpPr>
+          <p:cNvPr id="191" name="Editable path 127"/>
+          <p:cNvSpPr/>
+          <p:nvPr/>
+        </p:nvSpPr>
+        <p:spPr>
+          <a:xfrm>
+            <a:off x="5609547" y="3613807"/>
+            <a:ext cx="1338665" cy="173759"/>
+          </a:xfrm>
+          <a:custGeom>
+            <a:avLst/>
+            <a:gdLst/>
+            <a:ahLst/>
+            <a:cxnLst/>
+            <a:rect l="l" t="t" r="r" b="b"/>
+            <a:pathLst>
+              <a:path w="1338665" h="173759">
+                <a:moveTo>
+                  <a:pt x="0" y="0"/>
+                </a:moveTo>
+                <a:lnTo>
+                  <a:pt x="1338665" y="0"/>
+                </a:lnTo>
+                <a:lnTo>
+                  <a:pt x="1338665" y="173759"/>
+                </a:lnTo>
+                <a:lnTo>
+                  <a:pt x="0" y="173759"/>
+                </a:lnTo>
+                <a:lnTo>
+                  <a:pt x="0" y="0"/>
+                </a:lnTo>
+                <a:close/>
+              </a:path>
+            </a:pathLst>
+          </a:custGeom>
+          <a:solidFill>
+            <a:srgbClr val="FFFFFF"/>
+          </a:solidFill>
+          <a:ln>
+            <a:noFill/>
+          </a:ln>
+        </p:spPr>
+        <p:style>
+          <a:lnRef idx="1">
+            <a:schemeClr val="accent1"/>
+          </a:lnRef>
+          <a:fillRef idx="3">
+            <a:schemeClr val="accent1"/>
+          </a:fillRef>
+          <a:effectRef idx="2">
+            <a:schemeClr val="accent1"/>
+          </a:effectRef>
+          <a:fontRef idx="minor">
+            <a:schemeClr val="lt1"/>
+          </a:fontRef>
+        </p:style>
+        <p:txBody>
+          <a:bodyPr rtlCol="0" anchor="ctr"/>
+          <a:lstStyle/>
+          <a:p>
+            <a:pPr algn="ctr"/>
+          </a:p>
+        </p:txBody>
+      </p:sp>
+      <p:sp>
+        <p:nvSpPr>
+          <p:cNvPr id="192" name="TextBox 191"/>
+          <p:cNvSpPr txBox="1"/>
+          <p:nvPr/>
+        </p:nvSpPr>
+        <p:spPr>
+          <a:xfrm>
+            <a:off x="5621861" y="3613329"/>
+            <a:ext cx="1350817" cy="184727"/>
+          </a:xfrm>
+          <a:prstGeom prst="rect">
+            <a:avLst/>
+          </a:prstGeom>
+          <a:noFill/>
+        </p:spPr>
+        <p:txBody>
+          <a:bodyPr wrap="none" lIns="0" rIns="0" tIns="0" bIns="0">
+            <a:spAutoFit/>
+          </a:bodyPr>
+          <a:lstStyle/>
+          <a:p>
+            <a:pPr>
+              <a:spcBef>
+                <a:spcPts val="0"/>
+              </a:spcBef>
+              <a:spcAft>
+                <a:spcPts val="0"/>
+              </a:spcAft>
+            </a:pPr>
+            <a:r>
+              <a:rPr sz="1212" b="0" i="0">
+                <a:solidFill>
+                  <a:srgbClr val="7C5AA6"/>
+                </a:solidFill>
+                <a:latin typeface="Times New Roman"/>
+              </a:rPr>
+              <a:t>pose / twist reference</a:t>
+            </a:r>
+          </a:p>
+        </p:txBody>
+      </p:sp>
+      <p:sp>
+        <p:nvSpPr>
+          <p:cNvPr id="193" name="Editable path 128"/>
+          <p:cNvSpPr/>
+          <p:nvPr/>
+        </p:nvSpPr>
+        <p:spPr>
+          <a:xfrm>
+            <a:off x="9616918" y="3557905"/>
+            <a:ext cx="1004883" cy="173759"/>
+          </a:xfrm>
+          <a:custGeom>
+            <a:avLst/>
+            <a:gdLst/>
+            <a:ahLst/>
+            <a:cxnLst/>
+            <a:rect l="l" t="t" r="r" b="b"/>
+            <a:pathLst>
+              <a:path w="1004883" h="173759">
+                <a:moveTo>
+                  <a:pt x="0" y="0"/>
+                </a:moveTo>
+                <a:lnTo>
+                  <a:pt x="1004883" y="0"/>
+                </a:lnTo>
+                <a:lnTo>
+                  <a:pt x="1004883" y="173759"/>
+                </a:lnTo>
+                <a:lnTo>
+                  <a:pt x="0" y="173759"/>
+                </a:lnTo>
+                <a:lnTo>
+                  <a:pt x="0" y="0"/>
+                </a:lnTo>
+                <a:close/>
+              </a:path>
+            </a:pathLst>
+          </a:custGeom>
+          <a:solidFill>
+            <a:srgbClr val="FFFFFF"/>
+          </a:solidFill>
+          <a:ln>
+            <a:noFill/>
+          </a:ln>
+        </p:spPr>
+        <p:style>
+          <a:lnRef idx="1">
+            <a:schemeClr val="accent1"/>
+          </a:lnRef>
+          <a:fillRef idx="3">
+            <a:schemeClr val="accent1"/>
+          </a:fillRef>
+          <a:effectRef idx="2">
+            <a:schemeClr val="accent1"/>
+          </a:effectRef>
+          <a:fontRef idx="minor">
+            <a:schemeClr val="lt1"/>
+          </a:fontRef>
+        </p:style>
+        <p:txBody>
+          <a:bodyPr rtlCol="0" anchor="ctr"/>
+          <a:lstStyle/>
+          <a:p>
+            <a:pPr algn="ctr"/>
+          </a:p>
+        </p:txBody>
+      </p:sp>
+      <p:sp>
+        <p:nvSpPr>
+          <p:cNvPr id="194" name="TextBox 193"/>
+          <p:cNvSpPr txBox="1"/>
+          <p:nvPr/>
+        </p:nvSpPr>
+        <p:spPr>
+          <a:xfrm>
+            <a:off x="9629232" y="3557428"/>
+            <a:ext cx="1017539" cy="184727"/>
+          </a:xfrm>
+          <a:prstGeom prst="rect">
+            <a:avLst/>
+          </a:prstGeom>
+          <a:noFill/>
+        </p:spPr>
+        <p:txBody>
+          <a:bodyPr wrap="none" lIns="0" rIns="0" tIns="0" bIns="0">
+            <a:spAutoFit/>
+          </a:bodyPr>
+          <a:lstStyle/>
+          <a:p>
+            <a:pPr>
+              <a:spcBef>
+                <a:spcPts val="0"/>
+              </a:spcBef>
+              <a:spcAft>
+                <a:spcPts val="0"/>
+              </a:spcAft>
+            </a:pPr>
+            <a:r>
+              <a:rPr sz="1212" b="0" i="0">
+                <a:solidFill>
+                  <a:srgbClr val="6B7280"/>
+                </a:solidFill>
+                <a:latin typeface="Times New Roman"/>
+              </a:rPr>
+              <a:t>baseline actions</a:t>
             </a:r>
           </a:p>
         </p:txBody>
